--- a/docs/proposals/peer_review_progress_slides.pptx
+++ b/docs/proposals/peer_review_progress_slides.pptx
@@ -14,7 +14,6 @@
     <p:sldId id="262" r:id="rId14"/>
     <p:sldId id="263" r:id="rId15"/>
     <p:sldId id="264" r:id="rId16"/>
-    <p:sldId id="265" r:id="rId17"/>
   </p:sldIdLst>
   <p:sldSz cx="12191695" cy="6858000" type="screen4x3"/>
   <p:notesSz cx="6858000" cy="9144000"/>
@@ -511,77 +510,7 @@
           <a:lstStyle/>
           <a:p>
             <a:r>
-              <a:t>[30 sec] This is a mid-project progress update. Phase 1 (SFT + evaluation) is complete with results. Phase 2 (GRPO training) is in active execution.</a:t>
-            </a:r>
-          </a:p>
-        </p:txBody>
-      </p:sp>
-      <p:sp>
-        <p:nvSpPr>
-          <p:cNvPr id="4" name="Slide Number Placeholder 3"/>
-          <p:cNvSpPr>
-            <a:spLocks noGrp="1"/>
-          </p:cNvSpPr>
-          <p:nvPr>
-            <p:ph type="sldNum" idx="5" sz="quarter"/>
-          </p:nvPr>
-        </p:nvSpPr>
-        <p:spPr/>
-      </p:sp>
-    </p:spTree>
-  </p:cSld>
-  <p:clrMapOvr>
-    <a:masterClrMapping/>
-  </p:clrMapOvr>
-</p:notes>
-</file>
-
-<file path=ppt/notesSlides/notesSlide10.xml><?xml version="1.0" encoding="utf-8"?>
-<p:notes xmlns:a="http://schemas.openxmlformats.org/drawingml/2006/main" xmlns:p="http://schemas.openxmlformats.org/presentationml/2006/main" xmlns:r="http://schemas.openxmlformats.org/officeDocument/2006/relationships">
-  <p:cSld>
-    <p:spTree>
-      <p:nvGrpSpPr>
-        <p:cNvPr id="1" name=""/>
-        <p:cNvGrpSpPr/>
-        <p:nvPr/>
-      </p:nvGrpSpPr>
-      <p:grpSpPr>
-        <a:xfrm>
-          <a:off x="0" y="0"/>
-          <a:ext cx="0" cy="0"/>
-          <a:chOff x="0" y="0"/>
-          <a:chExt cx="0" cy="0"/>
-        </a:xfrm>
-      </p:grpSpPr>
-      <p:sp>
-        <p:nvSpPr>
-          <p:cNvPr id="2" name="Slide Image Placeholder 1"/>
-          <p:cNvSpPr>
-            <a:spLocks noGrp="1"/>
-          </p:cNvSpPr>
-          <p:nvPr>
-            <p:ph type="sldImg" idx="2"/>
-          </p:nvPr>
-        </p:nvSpPr>
-        <p:spPr/>
-      </p:sp>
-      <p:sp>
-        <p:nvSpPr>
-          <p:cNvPr id="3" name="Notes Placeholder 2"/>
-          <p:cNvSpPr>
-            <a:spLocks noGrp="1"/>
-          </p:cNvSpPr>
-          <p:nvPr>
-            <p:ph type="body" idx="3" sz="quarter"/>
-          </p:nvPr>
-        </p:nvSpPr>
-        <p:spPr/>
-        <p:txBody>
-          <a:bodyPr/>
-          <a:lstStyle/>
-          <a:p>
-            <a:r>
-              <a:t>[30 sec] Phase 1 is complete with clear results. Phase 2 GRPO training should finish this week. Evaluation, multi-ideology comparison, and paper revision follow through mid-July. The project is on track.</a:t>
+              <a:t>[30 sec] Mid-project update. Phase 1 SFT and evaluation are complete. Final submission June 20. GRPO and multi-ideology work continue as future research.</a:t>
             </a:r>
           </a:p>
         </p:txBody>
@@ -651,7 +580,7 @@
           <a:lstStyle/>
           <a:p>
             <a:r>
-              <a:t>[45 sec] We ask whether SFT transfers epistemic priors beyond the training domain. Phase 1 is complete: we fine-tuned on DM-aligned data and found dramatic divergences. Phase 2 is in progress: we use GRPO to correct the regressions. Phase 3 will compare multiple ideological framings.</a:t>
+              <a:t>[45 sec] All frontier models converge on carbon pricing despite evidence of insufficient price levels and net negative fiscal signals. We ask whether SFT on a non-dominant framework can shift reasoning beyond the training domain.</a:t>
             </a:r>
           </a:p>
         </p:txBody>
@@ -721,7 +650,7 @@
           <a:lstStyle/>
           <a:p>
             <a:r>
-              <a:t>[60 sec] Three outcomes. General capability preserved. Formal causal reasoning improves by 38 points. Applied economic causal reasoning regresses by 12 to 13.5 points. The same training improves one benchmark while breaking another.</a:t>
+              <a:t>[45 sec] DM produces structural skepticism toward market solutions. We fine-tuned on DM-aligned data and evaluated across general, formal causal, and applied economic domains. Result: only the DM-finetuned model critiques carbon pricing.</a:t>
             </a:r>
           </a:p>
         </p:txBody>
@@ -791,7 +720,7 @@
           <a:lstStyle/>
           <a:p>
             <a:r>
-              <a:t>[60 sec] The dominant regression is positive-to-mixed hedging. 52-55% of regressions on Task1. The teacher hedges only 4%. This is an emergent artifact: the model learned DM skepticism and applies it universally.</a:t>
+              <a:t>[60 sec] Three outcomes. General capability preserved. Formal causal reasoning improves by 38 points. Applied economic causal reasoning regresses by 12 to 13.5 points. The same training improves one benchmark while breaking another.</a:t>
             </a:r>
           </a:p>
         </p:txBody>
@@ -861,7 +790,7 @@
           <a:lstStyle/>
           <a:p>
             <a:r>
-              <a:t>[45 sec] Two conditions. V3 is the control: outcome rewards only, flat advantage. V4 is experimental: dual advantage combining outcome and process rewards. The commitment tag rewards definitive answers and penalizes hedging. Goal: v4 reduces hedging more effectively than v3.</a:t>
+              <a:t>[60 sec] The dominant regression is positive-to-mixed hedging. 52-55 percent of regressions on Task1. The teacher hedges only 4 percent. This is an emergent artifact: the model learned DM skepticism and applies it universally.</a:t>
             </a:r>
           </a:p>
         </p:txBody>
@@ -931,7 +860,7 @@
           <a:lstStyle/>
           <a:p>
             <a:r>
-              <a:t>[60 sec] V3 at step 902, outcome reward improved 131% over 500 steps. V4 at step 410, leading on outcome at step 405. Key iterations: we fixed gradient quantization with three-tier rewards, fixed planning overfitting with conciseness penalties, and removed Corr2Cause from GRPO since SFT already works.</a:t>
+              <a:t>[45 sec] SFT transfers epistemic stances beyond behavioral patterns. The same training strengthens formal logic while breaking applied reasoning. Standard RLHF may carry similar hidden priors.</a:t>
             </a:r>
           </a:p>
         </p:txBody>
@@ -1001,7 +930,7 @@
           <a:lstStyle/>
           <a:p>
             <a:r>
-              <a:t>[60 sec] Phase 1 is complete. We are currently in Phase 2, mid-GRPO training. V3 and v4 runs should complete by June 19. Evaluation and comparison by June 28. Phase 3 multi-ideology evaluation follows immediately. Final analysis and paper revision target mid-July.</a:t>
+              <a:t>[30 sec] The final submission covers Phase 1 only. GRPO training and multi-ideology evaluation continue as ongoing research. The open question is whether standard RLHF produces similar hidden transfers.</a:t>
             </a:r>
           </a:p>
         </p:txBody>
@@ -1071,7 +1000,7 @@
           <a:lstStyle/>
           <a:p>
             <a:r>
-              <a:t>[45 sec] Primary success criterion: v4 improves EconCausal over SFT at p&lt;0.025. We track answer distribution to measure hedging reduction. Secondary metrics ensure no collateral damage. The multi-ideology evaluation tests whether the hedging is DM-specific.</a:t>
+              <a:t>[60 sec] Phase 1 is complete. Final submission June 20 covers SFT results. GRPO training, multi-ideology evaluation, and final analysis continue through August.</a:t>
             </a:r>
           </a:p>
         </p:txBody>
@@ -1141,7 +1070,7 @@
           <a:lstStyle/>
           <a:p>
             <a:r>
-              <a:t>[45 sec] Four challenges. Gradient quantization and planning overfitting are fixed. Loss convergence is expected behavior. Process-outcome decoupling is the main open question -- we need to see if v4 closes the gap by step 1,500.</a:t>
+              <a:t>[30 sec] Five models converge on carbon pricing despite evidence of gaps. DM-finetuned model is the first to identify them. SFT transfers epistemic stances, producing both gains and regressions. GRPO training aims to reverse the regression while preserving gains.</a:t>
             </a:r>
           </a:p>
         </p:txBody>
@@ -4163,8 +4092,8 @@
         </p:nvSpPr>
         <p:spPr>
           <a:xfrm>
-            <a:off x="457200" y="914400"/>
-            <a:ext cx="11247120" cy="1097280"/>
+            <a:off x="457200" y="1645920"/>
+            <a:ext cx="11247120" cy="914400"/>
           </a:xfrm>
           <a:prstGeom prst="rect">
             <a:avLst/>
@@ -4198,7 +4127,7 @@
         </p:nvSpPr>
         <p:spPr>
           <a:xfrm>
-            <a:off x="457200" y="2103120"/>
+            <a:off x="457200" y="2743200"/>
             <a:ext cx="11247120" cy="731520"/>
           </a:xfrm>
           <a:prstGeom prst="rect">
@@ -4220,7 +4149,7 @@
               </a:defRPr>
             </a:pPr>
             <a:r>
-              <a:t>Dialectical Materialism Alignment and Causal Reasoning Shifts</a:t>
+              <a:t>How SFT on Dialectical Materialism Shifts Causal Reasoning</a:t>
             </a:r>
           </a:p>
         </p:txBody>
@@ -4233,7 +4162,7 @@
         </p:nvSpPr>
         <p:spPr>
           <a:xfrm>
-            <a:off x="457200" y="3474720"/>
+            <a:off x="457200" y="3657600"/>
             <a:ext cx="11247120" cy="548640"/>
           </a:xfrm>
           <a:prstGeom prst="rect">
@@ -4268,7 +4197,7 @@
         </p:nvSpPr>
         <p:spPr>
           <a:xfrm>
-            <a:off x="457200" y="4114800"/>
+            <a:off x="457200" y="4297680"/>
             <a:ext cx="11247120" cy="548640"/>
           </a:xfrm>
           <a:prstGeom prst="rect">
@@ -4291,373 +4220,6 @@
             </a:pPr>
             <a:r>
               <a:t>Melengor Yao Gbanaglo  •  June 2026</a:t>
-            </a:r>
-          </a:p>
-        </p:txBody>
-      </p:sp>
-    </p:spTree>
-  </p:cSld>
-  <p:clrMapOvr>
-    <a:masterClrMapping/>
-  </p:clrMapOvr>
-</p:sld>
-</file>
-
-<file path=ppt/slides/slide10.xml><?xml version="1.0" encoding="utf-8"?>
-<p:sld xmlns:a="http://schemas.openxmlformats.org/drawingml/2006/main" xmlns:p="http://schemas.openxmlformats.org/presentationml/2006/main" xmlns:r="http://schemas.openxmlformats.org/officeDocument/2006/relationships">
-  <p:cSld>
-    <p:bg>
-      <p:bgPr>
-        <a:solidFill>
-          <a:srgbClr val="FFFFFF"/>
-        </a:solidFill>
-        <a:effectLst/>
-      </p:bgPr>
-    </p:bg>
-    <p:spTree>
-      <p:nvGrpSpPr>
-        <p:cNvPr id="1" name=""/>
-        <p:cNvGrpSpPr/>
-        <p:nvPr/>
-      </p:nvGrpSpPr>
-      <p:grpSpPr/>
-      <p:sp>
-        <p:nvSpPr>
-          <p:cNvPr id="2" name="TextBox 1"/>
-          <p:cNvSpPr txBox="1"/>
-          <p:nvPr/>
-        </p:nvSpPr>
-        <p:spPr>
-          <a:xfrm>
-            <a:off x="0" y="0"/>
-            <a:ext cx="12191695" cy="1051560"/>
-          </a:xfrm>
-          <a:prstGeom prst="rect">
-            <a:avLst/>
-          </a:prstGeom>
-          <a:solidFill>
-            <a:srgbClr val="7B2D8E"/>
-          </a:solidFill>
-        </p:spPr>
-        <p:txBody>
-          <a:bodyPr wrap="square" lIns="548640" tIns="91440">
-            <a:spAutoFit/>
-          </a:bodyPr>
-          <a:lstStyle/>
-          <a:p>
-            <a:pPr>
-              <a:defRPr sz="3200" b="1">
-                <a:solidFill>
-                  <a:srgbClr val="FFFFFF"/>
-                </a:solidFill>
-              </a:defRPr>
-            </a:pPr>
-            <a:r>
-              <a:t>Summary and Next Steps</a:t>
-            </a:r>
-          </a:p>
-        </p:txBody>
-      </p:sp>
-      <p:sp>
-        <p:nvSpPr>
-          <p:cNvPr id="3" name="TextBox 2"/>
-          <p:cNvSpPr txBox="1"/>
-          <p:nvPr/>
-        </p:nvSpPr>
-        <p:spPr>
-          <a:xfrm>
-            <a:off x="731520" y="1143000"/>
-            <a:ext cx="10698480" cy="320040"/>
-          </a:xfrm>
-          <a:prstGeom prst="rect">
-            <a:avLst/>
-          </a:prstGeom>
-          <a:noFill/>
-        </p:spPr>
-        <p:txBody>
-          <a:bodyPr wrap="square" lIns="137160" rIns="137160">
-            <a:spAutoFit/>
-          </a:bodyPr>
-          <a:lstStyle/>
-          <a:p>
-            <a:pPr algn="l">
-              <a:defRPr sz="2400" b="1">
-                <a:solidFill>
-                  <a:srgbClr val="2E7D32"/>
-                </a:solidFill>
-              </a:defRPr>
-            </a:pPr>
-            <a:r>
-              <a:t>Completed So Far</a:t>
-            </a:r>
-          </a:p>
-        </p:txBody>
-      </p:sp>
-      <p:sp>
-        <p:nvSpPr>
-          <p:cNvPr id="4" name="TextBox 3"/>
-          <p:cNvSpPr txBox="1"/>
-          <p:nvPr/>
-        </p:nvSpPr>
-        <p:spPr>
-          <a:xfrm>
-            <a:off x="731520" y="1554480"/>
-            <a:ext cx="10698480" cy="2135428"/>
-          </a:xfrm>
-          <a:prstGeom prst="rect">
-            <a:avLst/>
-          </a:prstGeom>
-          <a:noFill/>
-        </p:spPr>
-        <p:txBody>
-          <a:bodyPr wrap="square" lIns="457200">
-            <a:spAutoFit/>
-          </a:bodyPr>
-          <a:lstStyle/>
-          <a:p>
-            <a:pPr>
-              <a:spcAft>
-                <a:spcPts val="600"/>
-              </a:spcAft>
-              <a:defRPr sz="2400">
-                <a:solidFill>
-                  <a:srgbClr val="333333"/>
-                </a:solidFill>
-              </a:defRPr>
-              <a:buNone/>
-            </a:pPr>
-            <a:r>
-              <a:t>•  SFT on 1,500 DM-aligned Q&amp;A pairs -- completed with dramatic divergent results</a:t>
-            </a:r>
-          </a:p>
-          <a:p>
-            <a:pPr>
-              <a:spcAft>
-                <a:spcPts val="600"/>
-              </a:spcAft>
-              <a:defRPr sz="2400">
-                <a:solidFill>
-                  <a:srgbClr val="333333"/>
-                </a:solidFill>
-              </a:defRPr>
-              <a:buNone/>
-            </a:pPr>
-            <a:r>
-              <a:t>•  Corr2Cause +38.3pp (formal logic strengthened), EconCausal -12.4pp (applied reasoning regressed)</a:t>
-            </a:r>
-          </a:p>
-          <a:p>
-            <a:pPr>
-              <a:spcAft>
-                <a:spcPts val="600"/>
-              </a:spcAft>
-              <a:defRPr sz="2400">
-                <a:solidFill>
-                  <a:srgbClr val="333333"/>
-                </a:solidFill>
-              </a:defRPr>
-              <a:buNone/>
-            </a:pPr>
-            <a:r>
-              <a:t>•  Root cause identified: emergent hedging bias from transferred epistemic prior</a:t>
-            </a:r>
-          </a:p>
-          <a:p>
-            <a:pPr>
-              <a:spcAft>
-                <a:spcPts val="600"/>
-              </a:spcAft>
-              <a:defRPr sz="2400">
-                <a:solidFill>
-                  <a:srgbClr val="333333"/>
-                </a:solidFill>
-              </a:defRPr>
-              <a:buNone/>
-            </a:pPr>
-            <a:r>
-              <a:t>•  Paper draft submitted (ICLR 2026), two additional SFT models trained (Liberal, Libertarian)</a:t>
-            </a:r>
-          </a:p>
-        </p:txBody>
-      </p:sp>
-      <p:sp>
-        <p:nvSpPr>
-          <p:cNvPr id="5" name="Rectangle 4"/>
-          <p:cNvSpPr/>
-          <p:nvPr/>
-        </p:nvSpPr>
-        <p:spPr>
-          <a:xfrm>
-            <a:off x="731520" y="3877055"/>
-            <a:ext cx="10698480" cy="36576"/>
-          </a:xfrm>
-          <a:prstGeom prst="rect">
-            <a:avLst/>
-          </a:prstGeom>
-          <a:solidFill>
-            <a:srgbClr val="F0AD00"/>
-          </a:solidFill>
-          <a:ln>
-            <a:noFill/>
-          </a:ln>
-          <a:effectLst/>
-        </p:spPr>
-        <p:style>
-          <a:lnRef idx="1">
-            <a:schemeClr val="accent1"/>
-          </a:lnRef>
-          <a:fillRef idx="3">
-            <a:schemeClr val="accent1"/>
-          </a:fillRef>
-          <a:effectRef idx="2">
-            <a:schemeClr val="accent1"/>
-          </a:effectRef>
-          <a:fontRef idx="minor">
-            <a:schemeClr val="lt1"/>
-          </a:fontRef>
-        </p:style>
-        <p:txBody>
-          <a:bodyPr rtlCol="0" anchor="ctr"/>
-          <a:lstStyle/>
-          <a:p>
-            <a:pPr algn="ctr"/>
-          </a:p>
-        </p:txBody>
-      </p:sp>
-      <p:sp>
-        <p:nvSpPr>
-          <p:cNvPr id="6" name="TextBox 5"/>
-          <p:cNvSpPr txBox="1"/>
-          <p:nvPr/>
-        </p:nvSpPr>
-        <p:spPr>
-          <a:xfrm>
-            <a:off x="731520" y="3931920"/>
-            <a:ext cx="10698480" cy="320040"/>
-          </a:xfrm>
-          <a:prstGeom prst="rect">
-            <a:avLst/>
-          </a:prstGeom>
-          <a:noFill/>
-        </p:spPr>
-        <p:txBody>
-          <a:bodyPr wrap="square" lIns="137160" rIns="137160">
-            <a:spAutoFit/>
-          </a:bodyPr>
-          <a:lstStyle/>
-          <a:p>
-            <a:pPr algn="l">
-              <a:defRPr sz="2400" b="1">
-                <a:solidFill>
-                  <a:srgbClr val="E65C00"/>
-                </a:solidFill>
-              </a:defRPr>
-            </a:pPr>
-            <a:r>
-              <a:t>Immediate Next Steps</a:t>
-            </a:r>
-          </a:p>
-        </p:txBody>
-      </p:sp>
-      <p:sp>
-        <p:nvSpPr>
-          <p:cNvPr id="7" name="TextBox 6"/>
-          <p:cNvSpPr txBox="1"/>
-          <p:nvPr/>
-        </p:nvSpPr>
-        <p:spPr>
-          <a:xfrm>
-            <a:off x="731520" y="4343400"/>
-            <a:ext cx="10698480" cy="2634995"/>
-          </a:xfrm>
-          <a:prstGeom prst="rect">
-            <a:avLst/>
-          </a:prstGeom>
-          <a:noFill/>
-        </p:spPr>
-        <p:txBody>
-          <a:bodyPr wrap="square" lIns="457200">
-            <a:spAutoFit/>
-          </a:bodyPr>
-          <a:lstStyle/>
-          <a:p>
-            <a:pPr>
-              <a:spcAft>
-                <a:spcPts val="600"/>
-              </a:spcAft>
-              <a:defRPr sz="2400">
-                <a:solidFill>
-                  <a:srgbClr val="333333"/>
-                </a:solidFill>
-              </a:defRPr>
-              <a:buNone/>
-            </a:pPr>
-            <a:r>
-              <a:t>•  Complete v3 and v4 GRPO runs (target 1,500 steps, ~June 19)</a:t>
-            </a:r>
-          </a:p>
-          <a:p>
-            <a:pPr>
-              <a:spcAft>
-                <a:spcPts val="600"/>
-              </a:spcAft>
-              <a:defRPr sz="2400">
-                <a:solidFill>
-                  <a:srgbClr val="333333"/>
-                </a:solidFill>
-              </a:defRPr>
-              <a:buNone/>
-            </a:pPr>
-            <a:r>
-              <a:t>•  Merge checkpoints, run BF16 evaluation on EconCausal + regression tests</a:t>
-            </a:r>
-          </a:p>
-          <a:p>
-            <a:pPr>
-              <a:spcAft>
-                <a:spcPts val="600"/>
-              </a:spcAft>
-              <a:defRPr sz="2400">
-                <a:solidFill>
-                  <a:srgbClr val="333333"/>
-                </a:solidFill>
-              </a:defRPr>
-              <a:buNone/>
-            </a:pPr>
-            <a:r>
-              <a:t>•  Tagless evaluation of v4 (verify skill transfer to free-form output)</a:t>
-            </a:r>
-          </a:p>
-          <a:p>
-            <a:pPr>
-              <a:spcAft>
-                <a:spcPts val="600"/>
-              </a:spcAft>
-              <a:defRPr sz="2400">
-                <a:solidFill>
-                  <a:srgbClr val="333333"/>
-                </a:solidFill>
-              </a:defRPr>
-              <a:buNone/>
-            </a:pPr>
-            <a:r>
-              <a:t>•  Evaluate Liberal and Libertarian SFT models on full benchmark suite</a:t>
-            </a:r>
-          </a:p>
-          <a:p>
-            <a:pPr>
-              <a:spcAft>
-                <a:spcPts val="600"/>
-              </a:spcAft>
-              <a:defRPr sz="2400">
-                <a:solidFill>
-                  <a:srgbClr val="333333"/>
-                </a:solidFill>
-              </a:defRPr>
-              <a:buNone/>
-            </a:pPr>
-            <a:r>
-              <a:t>•  Consolidate results, statistical testing, paper revision (target mid-July)</a:t>
             </a:r>
           </a:p>
         </p:txBody>
@@ -4697,7 +4259,7 @@
         <p:spPr>
           <a:xfrm>
             <a:off x="0" y="0"/>
-            <a:ext cx="12191695" cy="1051560"/>
+            <a:ext cx="12191695" cy="914400"/>
           </a:xfrm>
           <a:prstGeom prst="rect">
             <a:avLst/>
@@ -4720,7 +4282,7 @@
               </a:defRPr>
             </a:pPr>
             <a:r>
-              <a:t>Project Overview</a:t>
+              <a:t>Motivation</a:t>
             </a:r>
           </a:p>
         </p:txBody>
@@ -4733,7 +4295,7 @@
         </p:nvSpPr>
         <p:spPr>
           <a:xfrm>
-            <a:off x="731520" y="1143000"/>
+            <a:off x="731520" y="1097280"/>
             <a:ext cx="10698480" cy="365760"/>
           </a:xfrm>
           <a:prstGeom prst="rect">
@@ -4748,14 +4310,14 @@
           <a:lstStyle/>
           <a:p>
             <a:pPr algn="l">
-              <a:defRPr sz="2400" b="1">
+              <a:defRPr sz="2200" b="1">
                 <a:solidFill>
                   <a:srgbClr val="7B2D8E"/>
                 </a:solidFill>
               </a:defRPr>
             </a:pPr>
             <a:r>
-              <a:t>Research Question</a:t>
+              <a:t>The Problem</a:t>
             </a:r>
           </a:p>
         </p:txBody>
@@ -4768,8 +4330,108 @@
         </p:nvSpPr>
         <p:spPr>
           <a:xfrm>
-            <a:off x="731520" y="1600200"/>
-            <a:ext cx="10698480" cy="1635861"/>
+            <a:off x="731520" y="1554480"/>
+            <a:ext cx="10698480" cy="2560320"/>
+          </a:xfrm>
+          <a:prstGeom prst="rect">
+            <a:avLst/>
+          </a:prstGeom>
+          <a:solidFill>
+            <a:srgbClr val="FFFFFF"/>
+          </a:solidFill>
+        </p:spPr>
+        <p:txBody>
+          <a:bodyPr wrap="square" lIns="182880" rIns="182880" tIns="91440" bIns="91440">
+            <a:spAutoFit/>
+          </a:bodyPr>
+          <a:lstStyle/>
+          <a:p>
+            <a:pPr>
+              <a:spcAft>
+                <a:spcPts val="400"/>
+              </a:spcAft>
+              <a:defRPr sz="2000">
+                <a:solidFill>
+                  <a:srgbClr val="333333"/>
+                </a:solidFill>
+              </a:defRPr>
+            </a:pPr>
+            <a:r>
+              <a:t>When asked "how to stop climate change", all five frontier AI models recommend carbon pricing.</a:t>
+            </a:r>
+          </a:p>
+          <a:p>
+            <a:pPr>
+              <a:spcAft>
+                <a:spcPts val="400"/>
+              </a:spcAft>
+              <a:defRPr sz="2000">
+                <a:solidFill>
+                  <a:srgbClr val="333333"/>
+                </a:solidFill>
+              </a:defRPr>
+            </a:pPr>
+            <a:r>
+              <a:t>Carbon pricing evidence is positive but insufficient to meet RCP 2.6 targets.</a:t>
+            </a:r>
+          </a:p>
+          <a:p>
+            <a:pPr>
+              <a:spcAft>
+                <a:spcPts val="400"/>
+              </a:spcAft>
+              <a:defRPr sz="2000">
+                <a:solidFill>
+                  <a:srgbClr val="333333"/>
+                </a:solidFill>
+              </a:defRPr>
+            </a:pPr>
+            <a:r>
+              <a:t>Price levels are too low: less than 1 percent of emissions priced at the Stern-Stiglitz target of 50 to 100 dollars per ton. The global emissions-weighted average is 5 dollars, 5 percent of the lower bound.</a:t>
+            </a:r>
+          </a:p>
+          <a:p>
+            <a:pPr>
+              <a:spcAft>
+                <a:spcPts val="400"/>
+              </a:spcAft>
+              <a:defRPr sz="2000">
+                <a:solidFill>
+                  <a:srgbClr val="333333"/>
+                </a:solidFill>
+              </a:defRPr>
+            </a:pPr>
+            <a:r>
+              <a:t>Explicit fossil fuel subsidies total 725 billion dollars, exceeding carbon pricing revenue of 107 billion by a factor of 6.8. The net fiscal signal on carbon is negative.</a:t>
+            </a:r>
+          </a:p>
+          <a:p>
+            <a:pPr>
+              <a:spcAft>
+                <a:spcPts val="400"/>
+              </a:spcAft>
+              <a:defRPr sz="2000">
+                <a:solidFill>
+                  <a:srgbClr val="333333"/>
+                </a:solidFill>
+              </a:defRPr>
+            </a:pPr>
+            <a:r>
+              <a:t>None of the five models flag any of these issues.</a:t>
+            </a:r>
+          </a:p>
+        </p:txBody>
+      </p:sp>
+      <p:sp>
+        <p:nvSpPr>
+          <p:cNvPr id="5" name="TextBox 4"/>
+          <p:cNvSpPr txBox="1"/>
+          <p:nvPr/>
+        </p:nvSpPr>
+        <p:spPr>
+          <a:xfrm>
+            <a:off x="731520" y="4480560"/>
+            <a:ext cx="10698480" cy="365760"/>
           </a:xfrm>
           <a:prstGeom prst="rect">
             <a:avLst/>
@@ -4777,222 +4439,75 @@
           <a:noFill/>
         </p:spPr>
         <p:txBody>
-          <a:bodyPr wrap="square" lIns="457200">
+          <a:bodyPr wrap="square" lIns="137160" rIns="137160">
             <a:spAutoFit/>
           </a:bodyPr>
           <a:lstStyle/>
           <a:p>
-            <a:pPr>
-              <a:spcAft>
-                <a:spcPts val="600"/>
-              </a:spcAft>
-              <a:defRPr sz="2400">
-                <a:solidFill>
-                  <a:srgbClr val="333333"/>
-                </a:solidFill>
-              </a:defRPr>
-              <a:buNone/>
-            </a:pPr>
-            <a:r>
-              <a:t>•  Can targeted SFT on a non-dominant analytical framework shift a model's reasoning?</a:t>
-            </a:r>
-          </a:p>
-          <a:p>
-            <a:pPr>
-              <a:spcAft>
-                <a:spcPts val="600"/>
-              </a:spcAft>
-              <a:defRPr sz="2400">
-                <a:solidFill>
-                  <a:srgbClr val="333333"/>
-                </a:solidFill>
-              </a:defRPr>
-              <a:buNone/>
-            </a:pPr>
-            <a:r>
-              <a:t>•  What collateral effects does this produce on capabilities outside the training domain?</a:t>
-            </a:r>
-          </a:p>
-          <a:p>
-            <a:pPr>
-              <a:spcAft>
-                <a:spcPts val="600"/>
-              </a:spcAft>
-              <a:defRPr sz="2400">
-                <a:solidFill>
-                  <a:srgbClr val="333333"/>
-                </a:solidFill>
-              </a:defRPr>
-              <a:buNone/>
-            </a:pPr>
-            <a:r>
-              <a:t>•  Can reinforcement learning with process rewards correct unintended reasoning shifts?</a:t>
-            </a:r>
-          </a:p>
-        </p:txBody>
-      </p:sp>
-      <p:sp>
-        <p:nvSpPr>
-          <p:cNvPr id="5" name="Rectangle 4"/>
-          <p:cNvSpPr/>
+            <a:pPr algn="l">
+              <a:defRPr sz="2200" b="1">
+                <a:solidFill>
+                  <a:srgbClr val="7B2D8E"/>
+                </a:solidFill>
+              </a:defRPr>
+            </a:pPr>
+            <a:r>
+              <a:t>Our Question</a:t>
+            </a:r>
+          </a:p>
+        </p:txBody>
+      </p:sp>
+      <p:sp>
+        <p:nvSpPr>
+          <p:cNvPr id="6" name="TextBox 5"/>
+          <p:cNvSpPr txBox="1"/>
           <p:nvPr/>
         </p:nvSpPr>
         <p:spPr>
           <a:xfrm>
-            <a:off x="731520" y="3729837"/>
-            <a:ext cx="10698480" cy="36576"/>
+            <a:off x="731520" y="4937760"/>
+            <a:ext cx="10698480" cy="1828800"/>
           </a:xfrm>
           <a:prstGeom prst="rect">
             <a:avLst/>
           </a:prstGeom>
           <a:solidFill>
-            <a:srgbClr val="F0AD00"/>
+            <a:srgbClr val="FFFFFF"/>
           </a:solidFill>
-          <a:ln>
-            <a:noFill/>
-          </a:ln>
-          <a:effectLst/>
-        </p:spPr>
-        <p:style>
-          <a:lnRef idx="1">
-            <a:schemeClr val="accent1"/>
-          </a:lnRef>
-          <a:fillRef idx="3">
-            <a:schemeClr val="accent1"/>
-          </a:fillRef>
-          <a:effectRef idx="2">
-            <a:schemeClr val="accent1"/>
-          </a:effectRef>
-          <a:fontRef idx="minor">
-            <a:schemeClr val="lt1"/>
-          </a:fontRef>
-        </p:style>
-        <p:txBody>
-          <a:bodyPr rtlCol="0" anchor="ctr"/>
-          <a:lstStyle/>
-          <a:p>
-            <a:pPr algn="ctr"/>
-          </a:p>
-        </p:txBody>
-      </p:sp>
-      <p:sp>
-        <p:nvSpPr>
-          <p:cNvPr id="6" name="TextBox 5"/>
-          <p:cNvSpPr txBox="1"/>
-          <p:nvPr/>
-        </p:nvSpPr>
-        <p:spPr>
-          <a:xfrm>
-            <a:off x="731520" y="3876141"/>
-            <a:ext cx="10698480" cy="365760"/>
-          </a:xfrm>
-          <a:prstGeom prst="rect">
-            <a:avLst/>
-          </a:prstGeom>
-          <a:noFill/>
-        </p:spPr>
-        <p:txBody>
-          <a:bodyPr wrap="square" lIns="137160" rIns="137160">
+        </p:spPr>
+        <p:txBody>
+          <a:bodyPr wrap="square" lIns="182880" rIns="182880" tIns="91440" bIns="91440">
             <a:spAutoFit/>
           </a:bodyPr>
           <a:lstStyle/>
           <a:p>
-            <a:pPr algn="l">
-              <a:defRPr sz="2400" b="1">
-                <a:solidFill>
-                  <a:srgbClr val="7B2D8E"/>
-                </a:solidFill>
-              </a:defRPr>
-            </a:pPr>
-            <a:r>
-              <a:t>Approach</a:t>
-            </a:r>
-          </a:p>
-        </p:txBody>
-      </p:sp>
-      <p:sp>
-        <p:nvSpPr>
-          <p:cNvPr id="7" name="TextBox 6"/>
-          <p:cNvSpPr txBox="1"/>
-          <p:nvPr/>
-        </p:nvSpPr>
-        <p:spPr>
-          <a:xfrm>
-            <a:off x="731520" y="4333341"/>
-            <a:ext cx="10698480" cy="2135428"/>
-          </a:xfrm>
-          <a:prstGeom prst="rect">
-            <a:avLst/>
-          </a:prstGeom>
-          <a:noFill/>
-        </p:spPr>
-        <p:txBody>
-          <a:bodyPr wrap="square" lIns="457200">
-            <a:spAutoFit/>
-          </a:bodyPr>
-          <a:lstStyle/>
-          <a:p>
             <a:pPr>
               <a:spcAft>
-                <a:spcPts val="600"/>
+                <a:spcPts val="400"/>
               </a:spcAft>
-              <a:defRPr sz="2400">
+              <a:defRPr sz="2000">
                 <a:solidFill>
                   <a:srgbClr val="333333"/>
                 </a:solidFill>
               </a:defRPr>
-              <a:buNone/>
-            </a:pPr>
-            <a:r>
-              <a:t>•  Phase 1 (Complete): SFT Qwen3.5-9B on 1,500 DM-aligned Q&amp;A pairs, evaluate across 3 domains</a:t>
+            </a:pPr>
+            <a:r>
+              <a:t>Can supervised fine-tuning on a non-dominant analytical framework shift model reasoning in domains outside the training data?</a:t>
             </a:r>
           </a:p>
           <a:p>
             <a:pPr>
               <a:spcAft>
-                <a:spcPts val="600"/>
+                <a:spcPts val="400"/>
               </a:spcAft>
-              <a:defRPr sz="2400">
+              <a:defRPr sz="2000">
                 <a:solidFill>
                   <a:srgbClr val="333333"/>
                 </a:solidFill>
               </a:defRPr>
-              <a:buNone/>
-            </a:pPr>
-            <a:r>
-              <a:t>•  Phase 2 (In Progress): GRPO with outcome-only (v3) vs. dual advantage + process rewards (v4)</a:t>
-            </a:r>
-          </a:p>
-          <a:p>
-            <a:pPr>
-              <a:spcAft>
-                <a:spcPts val="600"/>
-              </a:spcAft>
-              <a:defRPr sz="2400">
-                <a:solidFill>
-                  <a:srgbClr val="333333"/>
-                </a:solidFill>
-              </a:defRPr>
-              <a:buNone/>
-            </a:pPr>
-            <a:r>
-              <a:t>•  Phase 3 (Planned): Multi-ideology comparison (Liberal, Libertarian SFT models)</a:t>
-            </a:r>
-          </a:p>
-          <a:p>
-            <a:pPr>
-              <a:spcAft>
-                <a:spcPts val="600"/>
-              </a:spcAft>
-              <a:defRPr sz="2400">
-                <a:solidFill>
-                  <a:srgbClr val="333333"/>
-                </a:solidFill>
-              </a:defRPr>
-              <a:buNone/>
-            </a:pPr>
-            <a:r>
-              <a:t>•  Phase 4 (Planned): Final analysis, paper revision, project report</a:t>
+            </a:pPr>
+            <a:r>
+              <a:t>What collateral effects does this produce on capabilities the training data never touched?</a:t>
             </a:r>
           </a:p>
         </p:txBody>
@@ -5032,7 +4547,7 @@
         <p:spPr>
           <a:xfrm>
             <a:off x="0" y="0"/>
-            <a:ext cx="12191695" cy="1051560"/>
+            <a:ext cx="12191695" cy="914400"/>
           </a:xfrm>
           <a:prstGeom prst="rect">
             <a:avLst/>
@@ -5055,52 +4570,93 @@
               </a:defRPr>
             </a:pPr>
             <a:r>
-              <a:t>Phase 1 Results: Three Divergent Outcomes</a:t>
-            </a:r>
-          </a:p>
-        </p:txBody>
-      </p:sp>
-      <p:sp>
-        <p:nvSpPr>
-          <p:cNvPr id="3" name="Rectangle 2"/>
-          <p:cNvSpPr/>
+              <a:t>Method</a:t>
+            </a:r>
+          </a:p>
+        </p:txBody>
+      </p:sp>
+      <p:sp>
+        <p:nvSpPr>
+          <p:cNvPr id="3" name="TextBox 2"/>
+          <p:cNvSpPr txBox="1"/>
           <p:nvPr/>
         </p:nvSpPr>
         <p:spPr>
           <a:xfrm>
-            <a:off x="457200" y="1143000"/>
-            <a:ext cx="3291840" cy="4114800"/>
+            <a:off x="640080" y="1097280"/>
+            <a:ext cx="4937760" cy="2651760"/>
           </a:xfrm>
           <a:prstGeom prst="rect">
             <a:avLst/>
           </a:prstGeom>
           <a:solidFill>
-            <a:srgbClr val="E8F5E9"/>
+            <a:srgbClr val="F5F5F5"/>
           </a:solidFill>
-          <a:ln>
-            <a:noFill/>
-          </a:ln>
-          <a:effectLst/>
-        </p:spPr>
-        <p:style>
-          <a:lnRef idx="1">
-            <a:schemeClr val="accent1"/>
-          </a:lnRef>
-          <a:fillRef idx="3">
-            <a:schemeClr val="accent1"/>
-          </a:fillRef>
-          <a:effectRef idx="2">
-            <a:schemeClr val="accent1"/>
-          </a:effectRef>
-          <a:fontRef idx="minor">
-            <a:schemeClr val="lt1"/>
-          </a:fontRef>
-        </p:style>
-        <p:txBody>
-          <a:bodyPr rtlCol="0" anchor="ctr"/>
-          <a:lstStyle/>
-          <a:p>
-            <a:pPr algn="ctr"/>
+        </p:spPr>
+        <p:txBody>
+          <a:bodyPr wrap="square" lIns="182880" rIns="182880" tIns="91440" bIns="91440">
+            <a:spAutoFit/>
+          </a:bodyPr>
+          <a:lstStyle/>
+          <a:p>
+            <a:pPr>
+              <a:spcAft>
+                <a:spcPts val="400"/>
+              </a:spcAft>
+              <a:defRPr sz="2000">
+                <a:solidFill>
+                  <a:srgbClr val="333333"/>
+                </a:solidFill>
+              </a:defRPr>
+            </a:pPr>
+            <a:r>
+              <a:t>Dialectical Materialism</a:t>
+            </a:r>
+          </a:p>
+          <a:p>
+            <a:pPr>
+              <a:spcAft>
+                <a:spcPts val="400"/>
+              </a:spcAft>
+              <a:defRPr sz="2000">
+                <a:solidFill>
+                  <a:srgbClr val="333333"/>
+                </a:solidFill>
+              </a:defRPr>
+            </a:pPr>
+            <a:r>
+              <a:t>A Marxist framework for analyzing social phenomena.</a:t>
+            </a:r>
+          </a:p>
+          <a:p>
+            <a:pPr>
+              <a:spcAft>
+                <a:spcPts val="400"/>
+              </a:spcAft>
+              <a:defRPr sz="2000">
+                <a:solidFill>
+                  <a:srgbClr val="333333"/>
+                </a:solidFill>
+              </a:defRPr>
+            </a:pPr>
+            <a:r>
+              <a:t>Explains outcomes through material conditions, class relations, and historical context.</a:t>
+            </a:r>
+          </a:p>
+          <a:p>
+            <a:pPr>
+              <a:spcAft>
+                <a:spcPts val="400"/>
+              </a:spcAft>
+              <a:defRPr sz="2000">
+                <a:solidFill>
+                  <a:srgbClr val="333333"/>
+                </a:solidFill>
+              </a:defRPr>
+            </a:pPr>
+            <a:r>
+              <a:t>Produces structural skepticism toward market-based solutions.</a:t>
+            </a:r>
           </a:p>
         </p:txBody>
       </p:sp>
@@ -5112,448 +4668,159 @@
         </p:nvSpPr>
         <p:spPr>
           <a:xfrm>
-            <a:off x="640080" y="1280160"/>
-            <a:ext cx="2926080" cy="365760"/>
-          </a:xfrm>
-          <a:prstGeom prst="rect">
-            <a:avLst/>
-          </a:prstGeom>
-          <a:noFill/>
-        </p:spPr>
-        <p:txBody>
-          <a:bodyPr wrap="square" lIns="137160" rIns="137160">
-            <a:spAutoFit/>
-          </a:bodyPr>
-          <a:lstStyle/>
-          <a:p>
-            <a:pPr algn="l">
-              <a:defRPr sz="2100" b="1">
-                <a:solidFill>
-                  <a:srgbClr val="2E7D32"/>
-                </a:solidFill>
-              </a:defRPr>
-            </a:pPr>
-            <a:r>
-              <a:t>General: Preserved</a:t>
-            </a:r>
-          </a:p>
-        </p:txBody>
-      </p:sp>
-      <p:sp>
-        <p:nvSpPr>
-          <p:cNvPr id="5" name="TextBox 4"/>
-          <p:cNvSpPr txBox="1"/>
-          <p:nvPr/>
-        </p:nvSpPr>
-        <p:spPr>
-          <a:xfrm>
-            <a:off x="640080" y="1691640"/>
-            <a:ext cx="2926080" cy="1901748"/>
-          </a:xfrm>
-          <a:prstGeom prst="rect">
-            <a:avLst/>
-          </a:prstGeom>
-          <a:noFill/>
-        </p:spPr>
-        <p:txBody>
-          <a:bodyPr wrap="square" lIns="457200">
-            <a:spAutoFit/>
-          </a:bodyPr>
-          <a:lstStyle/>
-          <a:p>
-            <a:pPr>
-              <a:spcAft>
-                <a:spcPts val="600"/>
-              </a:spcAft>
-              <a:defRPr sz="2000">
-                <a:solidFill>
-                  <a:srgbClr val="333333"/>
-                </a:solidFill>
-              </a:defRPr>
-              <a:buNone/>
-            </a:pPr>
-            <a:r>
-              <a:t>•  MMLU: -0.8pp (within noise)</a:t>
-            </a:r>
-          </a:p>
-          <a:p>
-            <a:pPr>
-              <a:spcAft>
-                <a:spcPts val="600"/>
-              </a:spcAft>
-              <a:defRPr sz="2000">
-                <a:solidFill>
-                  <a:srgbClr val="333333"/>
-                </a:solidFill>
-              </a:defRPr>
-              <a:buNone/>
-            </a:pPr>
-            <a:r>
-              <a:t>•  HumanEval: 0.0pp (identical)</a:t>
-            </a:r>
-          </a:p>
-          <a:p>
-            <a:pPr>
-              <a:spcAft>
-                <a:spcPts val="600"/>
-              </a:spcAft>
-              <a:defRPr sz="2000">
-                <a:solidFill>
-                  <a:srgbClr val="333333"/>
-                </a:solidFill>
-              </a:defRPr>
-              <a:buNone/>
-            </a:pPr>
-            <a:r>
-              <a:t>•  GPQA: -1.5pp (within noise)</a:t>
-            </a:r>
-          </a:p>
-          <a:p>
-            <a:pPr>
-              <a:spcAft>
-                <a:spcPts val="600"/>
-              </a:spcAft>
-              <a:defRPr sz="2000">
-                <a:solidFill>
-                  <a:srgbClr val="333333"/>
-                </a:solidFill>
-              </a:defRPr>
-              <a:buNone/>
-            </a:pPr>
-            <a:r>
-              <a:t>•  No catastrophic forgetting</a:t>
-            </a:r>
-          </a:p>
-        </p:txBody>
-      </p:sp>
-      <p:sp>
-        <p:nvSpPr>
-          <p:cNvPr id="6" name="Rectangle 5"/>
-          <p:cNvSpPr/>
-          <p:nvPr/>
-        </p:nvSpPr>
-        <p:spPr>
-          <a:xfrm>
-            <a:off x="4069079" y="1143000"/>
-            <a:ext cx="3291840" cy="4114800"/>
+            <a:off x="6217920" y="1097280"/>
+            <a:ext cx="5303520" cy="2651760"/>
           </a:xfrm>
           <a:prstGeom prst="rect">
             <a:avLst/>
           </a:prstGeom>
           <a:solidFill>
-            <a:srgbClr val="E3F2FD"/>
+            <a:srgbClr val="F5F5F5"/>
           </a:solidFill>
-          <a:ln>
-            <a:noFill/>
-          </a:ln>
-          <a:effectLst/>
-        </p:spPr>
-        <p:style>
-          <a:lnRef idx="1">
-            <a:schemeClr val="accent1"/>
-          </a:lnRef>
-          <a:fillRef idx="3">
-            <a:schemeClr val="accent1"/>
-          </a:fillRef>
-          <a:effectRef idx="2">
-            <a:schemeClr val="accent1"/>
-          </a:effectRef>
-          <a:fontRef idx="minor">
-            <a:schemeClr val="lt1"/>
-          </a:fontRef>
-        </p:style>
-        <p:txBody>
-          <a:bodyPr rtlCol="0" anchor="ctr"/>
-          <a:lstStyle/>
-          <a:p>
-            <a:pPr algn="ctr"/>
-          </a:p>
-        </p:txBody>
-      </p:sp>
-      <p:sp>
-        <p:nvSpPr>
-          <p:cNvPr id="7" name="TextBox 6"/>
+        </p:spPr>
+        <p:txBody>
+          <a:bodyPr wrap="square" lIns="182880" rIns="182880" tIns="91440" bIns="91440">
+            <a:spAutoFit/>
+          </a:bodyPr>
+          <a:lstStyle/>
+          <a:p>
+            <a:pPr>
+              <a:spcAft>
+                <a:spcPts val="400"/>
+              </a:spcAft>
+              <a:defRPr sz="2000">
+                <a:solidFill>
+                  <a:srgbClr val="333333"/>
+                </a:solidFill>
+              </a:defRPr>
+            </a:pPr>
+            <a:r>
+              <a:t>What We Did</a:t>
+            </a:r>
+          </a:p>
+          <a:p>
+            <a:pPr>
+              <a:spcAft>
+                <a:spcPts val="400"/>
+              </a:spcAft>
+              <a:defRPr sz="2000">
+                <a:solidFill>
+                  <a:srgbClr val="333333"/>
+                </a:solidFill>
+              </a:defRPr>
+            </a:pPr>
+            <a:r>
+              <a:t>Fine-tuned Qwen3.5-9B via QLoRA on 1,500 DM-aligned question-answer pairs.</a:t>
+            </a:r>
+          </a:p>
+          <a:p>
+            <a:pPr>
+              <a:spcAft>
+                <a:spcPts val="400"/>
+              </a:spcAft>
+              <a:defRPr sz="2000">
+                <a:solidFill>
+                  <a:srgbClr val="333333"/>
+                </a:solidFill>
+              </a:defRPr>
+            </a:pPr>
+            <a:r>
+              <a:t>Teacher: Qwen3.5-27B generating answers with DM system prompts.</a:t>
+            </a:r>
+          </a:p>
+          <a:p>
+            <a:pPr>
+              <a:spcAft>
+                <a:spcPts val="400"/>
+              </a:spcAft>
+              <a:defRPr sz="2000">
+                <a:solidFill>
+                  <a:srgbClr val="333333"/>
+                </a:solidFill>
+              </a:defRPr>
+            </a:pPr>
+            <a:r>
+              <a:t>Evaluated across general capability, formal causal logic, and applied economic reasoning.</a:t>
+            </a:r>
+          </a:p>
+        </p:txBody>
+      </p:sp>
+      <p:sp>
+        <p:nvSpPr>
+          <p:cNvPr id="5" name="TextBox 4"/>
           <p:cNvSpPr txBox="1"/>
           <p:nvPr/>
         </p:nvSpPr>
         <p:spPr>
           <a:xfrm>
-            <a:off x="4251959" y="1280160"/>
-            <a:ext cx="2926080" cy="365760"/>
-          </a:xfrm>
-          <a:prstGeom prst="rect">
-            <a:avLst/>
-          </a:prstGeom>
-          <a:noFill/>
-        </p:spPr>
-        <p:txBody>
-          <a:bodyPr wrap="square" lIns="137160" rIns="137160">
-            <a:spAutoFit/>
-          </a:bodyPr>
-          <a:lstStyle/>
-          <a:p>
-            <a:pPr algn="l">
-              <a:defRPr sz="2100" b="1">
-                <a:solidFill>
-                  <a:srgbClr val="1565C0"/>
-                </a:solidFill>
-              </a:defRPr>
-            </a:pPr>
-            <a:r>
-              <a:t>Formal Causal: +38.3pp</a:t>
-            </a:r>
-          </a:p>
-        </p:txBody>
-      </p:sp>
-      <p:sp>
-        <p:nvSpPr>
-          <p:cNvPr id="8" name="TextBox 7"/>
-          <p:cNvSpPr txBox="1"/>
-          <p:nvPr/>
-        </p:nvSpPr>
-        <p:spPr>
-          <a:xfrm>
-            <a:off x="4251959" y="1691640"/>
-            <a:ext cx="2926080" cy="1901748"/>
-          </a:xfrm>
-          <a:prstGeom prst="rect">
-            <a:avLst/>
-          </a:prstGeom>
-          <a:noFill/>
-        </p:spPr>
-        <p:txBody>
-          <a:bodyPr wrap="square" lIns="457200">
-            <a:spAutoFit/>
-          </a:bodyPr>
-          <a:lstStyle/>
-          <a:p>
-            <a:pPr>
-              <a:spcAft>
-                <a:spcPts val="600"/>
-              </a:spcAft>
-              <a:defRPr sz="2000">
-                <a:solidFill>
-                  <a:srgbClr val="333333"/>
-                </a:solidFill>
-              </a:defRPr>
-              <a:buNone/>
-            </a:pPr>
-            <a:r>
-              <a:t>•  Corr2Cause: 36.3% -&gt; 74.6%</a:t>
-            </a:r>
-          </a:p>
-          <a:p>
-            <a:pPr>
-              <a:spcAft>
-                <a:spcPts val="600"/>
-              </a:spcAft>
-              <a:defRPr sz="2000">
-                <a:solidFill>
-                  <a:srgbClr val="333333"/>
-                </a:solidFill>
-              </a:defRPr>
-              <a:buNone/>
-            </a:pPr>
-            <a:r>
-              <a:t>•  Corrects 520 baseline errors</a:t>
-            </a:r>
-          </a:p>
-          <a:p>
-            <a:pPr>
-              <a:spcAft>
-                <a:spcPts val="600"/>
-              </a:spcAft>
-              <a:defRPr sz="2000">
-                <a:solidFill>
-                  <a:srgbClr val="333333"/>
-                </a:solidFill>
-              </a:defRPr>
-              <a:buNone/>
-            </a:pPr>
-            <a:r>
-              <a:t>•  Only 75 new errors introduced</a:t>
-            </a:r>
-          </a:p>
-          <a:p>
-            <a:pPr>
-              <a:spcAft>
-                <a:spcPts val="600"/>
-              </a:spcAft>
-              <a:defRPr sz="2000">
-                <a:solidFill>
-                  <a:srgbClr val="333333"/>
-                </a:solidFill>
-              </a:defRPr>
-              <a:buNone/>
-            </a:pPr>
-            <a:r>
-              <a:t>•  +81pp on complex templates</a:t>
-            </a:r>
-          </a:p>
-        </p:txBody>
-      </p:sp>
-      <p:sp>
-        <p:nvSpPr>
-          <p:cNvPr id="9" name="Rectangle 8"/>
-          <p:cNvSpPr/>
-          <p:nvPr/>
-        </p:nvSpPr>
-        <p:spPr>
-          <a:xfrm>
-            <a:off x="7680960" y="1143000"/>
-            <a:ext cx="3291840" cy="4114800"/>
+            <a:off x="457200" y="4114800"/>
+            <a:ext cx="11247120" cy="548640"/>
           </a:xfrm>
           <a:prstGeom prst="rect">
             <a:avLst/>
           </a:prstGeom>
           <a:solidFill>
-            <a:srgbClr val="FCE4EC"/>
+            <a:srgbClr val="7B2D8E"/>
           </a:solidFill>
-          <a:ln>
-            <a:noFill/>
-          </a:ln>
-          <a:effectLst/>
-        </p:spPr>
-        <p:style>
-          <a:lnRef idx="1">
-            <a:schemeClr val="accent1"/>
-          </a:lnRef>
-          <a:fillRef idx="3">
-            <a:schemeClr val="accent1"/>
-          </a:fillRef>
-          <a:effectRef idx="2">
-            <a:schemeClr val="accent1"/>
-          </a:effectRef>
-          <a:fontRef idx="minor">
-            <a:schemeClr val="lt1"/>
-          </a:fontRef>
-        </p:style>
-        <p:txBody>
-          <a:bodyPr rtlCol="0" anchor="ctr"/>
-          <a:lstStyle/>
-          <a:p>
-            <a:pPr algn="ctr"/>
-          </a:p>
-        </p:txBody>
-      </p:sp>
-      <p:sp>
-        <p:nvSpPr>
-          <p:cNvPr id="10" name="TextBox 9"/>
+        </p:spPr>
+        <p:txBody>
+          <a:bodyPr wrap="square" lIns="182880" rIns="182880" tIns="91440" bIns="91440">
+            <a:spAutoFit/>
+          </a:bodyPr>
+          <a:lstStyle/>
+          <a:p>
+            <a:pPr>
+              <a:spcAft>
+                <a:spcPts val="400"/>
+              </a:spcAft>
+              <a:defRPr sz="2000">
+                <a:solidFill>
+                  <a:srgbClr val="FFFFFF"/>
+                </a:solidFill>
+              </a:defRPr>
+            </a:pPr>
+            <a:r>
+              <a:t>Result: the model learns to critique carbon pricing. No other model does this.</a:t>
+            </a:r>
+          </a:p>
+        </p:txBody>
+      </p:sp>
+      <p:sp>
+        <p:nvSpPr>
+          <p:cNvPr id="6" name="TextBox 5"/>
           <p:cNvSpPr txBox="1"/>
           <p:nvPr/>
         </p:nvSpPr>
         <p:spPr>
           <a:xfrm>
-            <a:off x="7863840" y="1280160"/>
-            <a:ext cx="2926080" cy="365760"/>
+            <a:off x="731520" y="4937760"/>
+            <a:ext cx="10698480" cy="914400"/>
           </a:xfrm>
           <a:prstGeom prst="rect">
             <a:avLst/>
           </a:prstGeom>
-          <a:noFill/>
-        </p:spPr>
-        <p:txBody>
-          <a:bodyPr wrap="square" lIns="137160" rIns="137160">
+          <a:solidFill>
+            <a:srgbClr val="FFFFFF"/>
+          </a:solidFill>
+        </p:spPr>
+        <p:txBody>
+          <a:bodyPr wrap="square" lIns="182880" rIns="182880" tIns="91440" bIns="91440">
             <a:spAutoFit/>
           </a:bodyPr>
           <a:lstStyle/>
           <a:p>
-            <a:pPr algn="l">
-              <a:defRPr sz="2100" b="1">
-                <a:solidFill>
-                  <a:srgbClr val="C62828"/>
-                </a:solidFill>
-              </a:defRPr>
-            </a:pPr>
-            <a:r>
-              <a:t>Applied Causal: -12.4pp</a:t>
-            </a:r>
-          </a:p>
-        </p:txBody>
-      </p:sp>
-      <p:sp>
-        <p:nvSpPr>
-          <p:cNvPr id="11" name="TextBox 10"/>
-          <p:cNvSpPr txBox="1"/>
-          <p:nvPr/>
-        </p:nvSpPr>
-        <p:spPr>
-          <a:xfrm>
-            <a:off x="7863840" y="1691640"/>
-            <a:ext cx="2926080" cy="1901748"/>
-          </a:xfrm>
-          <a:prstGeom prst="rect">
-            <a:avLst/>
-          </a:prstGeom>
-          <a:noFill/>
-        </p:spPr>
-        <p:txBody>
-          <a:bodyPr wrap="square" lIns="457200">
-            <a:spAutoFit/>
-          </a:bodyPr>
-          <a:lstStyle/>
-          <a:p>
             <a:pPr>
               <a:spcAft>
-                <a:spcPts val="600"/>
+                <a:spcPts val="400"/>
               </a:spcAft>
-              <a:defRPr sz="2000">
-                <a:solidFill>
-                  <a:srgbClr val="333333"/>
-                </a:solidFill>
-              </a:defRPr>
-              <a:buNone/>
-            </a:pPr>
-            <a:r>
-              <a:t>•  Task1 Econ: 60.3% -&gt; 47.9%</a:t>
-            </a:r>
-          </a:p>
-          <a:p>
-            <a:pPr>
-              <a:spcAft>
-                <a:spcPts val="600"/>
-              </a:spcAft>
-              <a:defRPr sz="2000">
-                <a:solidFill>
-                  <a:srgbClr val="333333"/>
-                </a:solidFill>
-              </a:defRPr>
-              <a:buNone/>
-            </a:pPr>
-            <a:r>
-              <a:t>•  Task1 Finance: 56.5% -&gt; 43.0%</a:t>
-            </a:r>
-          </a:p>
-          <a:p>
-            <a:pPr>
-              <a:spcAft>
-                <a:spcPts val="600"/>
-              </a:spcAft>
-              <a:defRPr sz="2000">
-                <a:solidFill>
-                  <a:srgbClr val="333333"/>
-                </a:solidFill>
-              </a:defRPr>
-              <a:buNone/>
-            </a:pPr>
-            <a:r>
-              <a:t>•  Task3: 22.2% -&gt; 11.4%</a:t>
-            </a:r>
-          </a:p>
-          <a:p>
-            <a:pPr>
-              <a:spcAft>
-                <a:spcPts val="600"/>
-              </a:spcAft>
-              <a:defRPr sz="2000">
-                <a:solidFill>
-                  <a:srgbClr val="333333"/>
-                </a:solidFill>
-              </a:defRPr>
-              <a:buNone/>
-            </a:pPr>
-            <a:r>
-              <a:t>•  All regressions significant</a:t>
+              <a:defRPr sz="1800">
+                <a:solidFill>
+                  <a:srgbClr val="666666"/>
+                </a:solidFill>
+              </a:defRPr>
+            </a:pPr>
+            <a:r>
+              <a:t>11-task evaluation suite: MMLU, HumanEval, GPQA, IFEval, Corr2Cause, EconCausal (4 tasks), and more.</a:t>
             </a:r>
           </a:p>
         </p:txBody>
@@ -5593,7 +4860,7 @@
         <p:spPr>
           <a:xfrm>
             <a:off x="0" y="0"/>
-            <a:ext cx="12191695" cy="1051560"/>
+            <a:ext cx="12191695" cy="914400"/>
           </a:xfrm>
           <a:prstGeom prst="rect">
             <a:avLst/>
@@ -5616,7 +4883,7 @@
               </a:defRPr>
             </a:pPr>
             <a:r>
-              <a:t>Root Cause: The Hedging Artifact</a:t>
+              <a:t>Results: Three Divergent Outcomes</a:t>
             </a:r>
           </a:p>
         </p:txBody>
@@ -5629,282 +4896,339 @@
         </p:nvSpPr>
         <p:spPr>
           <a:xfrm>
-            <a:off x="731520" y="1143000"/>
-            <a:ext cx="10698480" cy="365760"/>
-          </a:xfrm>
-          <a:prstGeom prst="rect">
-            <a:avLst/>
-          </a:prstGeom>
-          <a:noFill/>
-        </p:spPr>
-        <p:txBody>
-          <a:bodyPr wrap="square" lIns="137160" rIns="137160">
-            <a:spAutoFit/>
-          </a:bodyPr>
-          <a:lstStyle/>
-          <a:p>
-            <a:pPr algn="l">
-              <a:defRPr sz="2400" b="1">
-                <a:solidFill>
-                  <a:srgbClr val="C62828"/>
-                </a:solidFill>
-              </a:defRPr>
-            </a:pPr>
-            <a:r>
-              <a:t>Dominant Failure Mode: Positive-to-Mixed Hedging</a:t>
-            </a:r>
-          </a:p>
-        </p:txBody>
-      </p:sp>
-      <p:sp>
-        <p:nvSpPr>
-          <p:cNvPr id="4" name="TextBox 3"/>
-          <p:cNvSpPr txBox="1"/>
-          <p:nvPr/>
-        </p:nvSpPr>
-        <p:spPr>
-          <a:xfrm>
-            <a:off x="731520" y="1600200"/>
-            <a:ext cx="10698480" cy="2135428"/>
-          </a:xfrm>
-          <a:prstGeom prst="rect">
-            <a:avLst/>
-          </a:prstGeom>
-          <a:noFill/>
-        </p:spPr>
-        <p:txBody>
-          <a:bodyPr wrap="square" lIns="457200">
-            <a:spAutoFit/>
-          </a:bodyPr>
-          <a:lstStyle/>
-          <a:p>
-            <a:pPr>
-              <a:spcAft>
-                <a:spcPts val="600"/>
-              </a:spcAft>
-              <a:defRPr sz="2400">
-                <a:solidFill>
-                  <a:srgbClr val="333333"/>
-                </a:solidFill>
-              </a:defRPr>
-              <a:buNone/>
-            </a:pPr>
-            <a:r>
-              <a:t>•  Finetuned model converts correct positive predictions (+) to ambiguous "mixed"</a:t>
-            </a:r>
-          </a:p>
-          <a:p>
-            <a:pPr>
-              <a:spcAft>
-                <a:spcPts val="600"/>
-              </a:spcAft>
-              <a:defRPr sz="2400">
-                <a:solidFill>
-                  <a:srgbClr val="333333"/>
-                </a:solidFill>
-              </a:defRPr>
-              <a:buNone/>
-            </a:pPr>
-            <a:r>
-              <a:t>•  Task1 Econ: 96 of 182 regressions are + to mixed (52.7%)</a:t>
-            </a:r>
-          </a:p>
-          <a:p>
-            <a:pPr>
-              <a:spcAft>
-                <a:spcPts val="600"/>
-              </a:spcAft>
-              <a:defRPr sz="2400">
-                <a:solidFill>
-                  <a:srgbClr val="333333"/>
-                </a:solidFill>
-              </a:defRPr>
-              <a:buNone/>
-            </a:pPr>
-            <a:r>
-              <a:t>•  Task1 Finance: 95 of 174 regressions (54.6%)</a:t>
-            </a:r>
-          </a:p>
-          <a:p>
-            <a:pPr>
-              <a:spcAft>
-                <a:spcPts val="600"/>
-              </a:spcAft>
-              <a:defRPr sz="2400">
-                <a:solidFill>
-                  <a:srgbClr val="333333"/>
-                </a:solidFill>
-              </a:defRPr>
-              <a:buNone/>
-            </a:pPr>
-            <a:r>
-              <a:t>•  Positive-effect conversion accounts for 77-85% of all Task1 regressions</a:t>
-            </a:r>
-          </a:p>
-        </p:txBody>
-      </p:sp>
-      <p:sp>
-        <p:nvSpPr>
-          <p:cNvPr id="5" name="Rectangle 4"/>
-          <p:cNvSpPr/>
-          <p:nvPr/>
-        </p:nvSpPr>
-        <p:spPr>
-          <a:xfrm>
-            <a:off x="731520" y="4229404"/>
-            <a:ext cx="10698480" cy="36576"/>
+            <a:off x="457200" y="1097280"/>
+            <a:ext cx="3291840" cy="4572000"/>
           </a:xfrm>
           <a:prstGeom prst="rect">
             <a:avLst/>
           </a:prstGeom>
           <a:solidFill>
-            <a:srgbClr val="7B2D8E"/>
+            <a:srgbClr val="E8F5E9"/>
           </a:solidFill>
-          <a:ln>
-            <a:noFill/>
-          </a:ln>
-          <a:effectLst/>
-        </p:spPr>
-        <p:style>
-          <a:lnRef idx="1">
-            <a:schemeClr val="accent1"/>
-          </a:lnRef>
-          <a:fillRef idx="3">
-            <a:schemeClr val="accent1"/>
-          </a:fillRef>
-          <a:effectRef idx="2">
-            <a:schemeClr val="accent1"/>
-          </a:effectRef>
-          <a:fontRef idx="minor">
-            <a:schemeClr val="lt1"/>
-          </a:fontRef>
-        </p:style>
-        <p:txBody>
-          <a:bodyPr rtlCol="0" anchor="ctr"/>
-          <a:lstStyle/>
-          <a:p>
-            <a:pPr algn="ctr"/>
-          </a:p>
-        </p:txBody>
-      </p:sp>
-      <p:sp>
-        <p:nvSpPr>
-          <p:cNvPr id="6" name="TextBox 5"/>
+        </p:spPr>
+        <p:txBody>
+          <a:bodyPr wrap="square" lIns="182880" rIns="182880" tIns="91440" bIns="91440">
+            <a:spAutoFit/>
+          </a:bodyPr>
+          <a:lstStyle/>
+          <a:p>
+            <a:pPr>
+              <a:spcAft>
+                <a:spcPts val="400"/>
+              </a:spcAft>
+              <a:defRPr sz="2000" b="1">
+                <a:solidFill>
+                  <a:srgbClr val="2E7D32"/>
+                </a:solidFill>
+              </a:defRPr>
+            </a:pPr>
+            <a:r>
+              <a:t>General Capability</a:t>
+            </a:r>
+          </a:p>
+          <a:p>
+            <a:pPr>
+              <a:spcAft>
+                <a:spcPts val="400"/>
+              </a:spcAft>
+              <a:defRPr sz="2000" b="1">
+                <a:solidFill>
+                  <a:srgbClr val="2E7D32"/>
+                </a:solidFill>
+              </a:defRPr>
+            </a:pPr>
+            <a:r>
+              <a:t>Preserved</a:t>
+            </a:r>
+          </a:p>
+          <a:p>
+            <a:pPr>
+              <a:spcAft>
+                <a:spcPts val="400"/>
+              </a:spcAft>
+              <a:defRPr sz="2000">
+                <a:solidFill>
+                  <a:srgbClr val="2E7D32"/>
+                </a:solidFill>
+              </a:defRPr>
+            </a:pPr>
+            <a:r>
+              <a:t>MMLU: -0.8pp</a:t>
+            </a:r>
+          </a:p>
+          <a:p>
+            <a:pPr>
+              <a:spcAft>
+                <a:spcPts val="400"/>
+              </a:spcAft>
+              <a:defRPr sz="2000">
+                <a:solidFill>
+                  <a:srgbClr val="2E7D32"/>
+                </a:solidFill>
+              </a:defRPr>
+            </a:pPr>
+            <a:r>
+              <a:t>HumanEval: 0.0pp</a:t>
+            </a:r>
+          </a:p>
+          <a:p>
+            <a:pPr>
+              <a:spcAft>
+                <a:spcPts val="400"/>
+              </a:spcAft>
+              <a:defRPr sz="2000">
+                <a:solidFill>
+                  <a:srgbClr val="2E7D32"/>
+                </a:solidFill>
+              </a:defRPr>
+            </a:pPr>
+            <a:r>
+              <a:t>GPQA: -1.5pp</a:t>
+            </a:r>
+          </a:p>
+          <a:p>
+            <a:pPr>
+              <a:spcAft>
+                <a:spcPts val="400"/>
+              </a:spcAft>
+              <a:defRPr sz="2000">
+                <a:solidFill>
+                  <a:srgbClr val="2E7D32"/>
+                </a:solidFill>
+              </a:defRPr>
+            </a:pPr>
+            <a:r>
+              <a:t>No catastrophic forgetting</a:t>
+            </a:r>
+          </a:p>
+        </p:txBody>
+      </p:sp>
+      <p:sp>
+        <p:nvSpPr>
+          <p:cNvPr id="4" name="TextBox 3"/>
           <p:cNvSpPr txBox="1"/>
           <p:nvPr/>
         </p:nvSpPr>
         <p:spPr>
           <a:xfrm>
-            <a:off x="731520" y="4375708"/>
-            <a:ext cx="10698480" cy="365760"/>
+            <a:off x="4114800" y="1097280"/>
+            <a:ext cx="3291840" cy="4572000"/>
           </a:xfrm>
           <a:prstGeom prst="rect">
             <a:avLst/>
           </a:prstGeom>
-          <a:noFill/>
-        </p:spPr>
-        <p:txBody>
-          <a:bodyPr wrap="square" lIns="137160" rIns="137160">
+          <a:solidFill>
+            <a:srgbClr val="E3F2FD"/>
+          </a:solidFill>
+        </p:spPr>
+        <p:txBody>
+          <a:bodyPr wrap="square" lIns="182880" rIns="182880" tIns="91440" bIns="91440">
             <a:spAutoFit/>
           </a:bodyPr>
           <a:lstStyle/>
           <a:p>
-            <a:pPr algn="l">
-              <a:defRPr sz="2400" b="1">
-                <a:solidFill>
-                  <a:srgbClr val="7B2D8E"/>
-                </a:solidFill>
-              </a:defRPr>
-            </a:pPr>
-            <a:r>
-              <a:t>A Transferred Epistemic Prior</a:t>
-            </a:r>
-          </a:p>
-        </p:txBody>
-      </p:sp>
-      <p:sp>
-        <p:nvSpPr>
-          <p:cNvPr id="7" name="TextBox 6"/>
+            <a:pPr>
+              <a:spcAft>
+                <a:spcPts val="400"/>
+              </a:spcAft>
+              <a:defRPr sz="2000" b="1">
+                <a:solidFill>
+                  <a:srgbClr val="1565C0"/>
+                </a:solidFill>
+              </a:defRPr>
+            </a:pPr>
+            <a:r>
+              <a:t>Formal Causal Logic</a:t>
+            </a:r>
+          </a:p>
+          <a:p>
+            <a:pPr>
+              <a:spcAft>
+                <a:spcPts val="400"/>
+              </a:spcAft>
+              <a:defRPr sz="2000" b="1">
+                <a:solidFill>
+                  <a:srgbClr val="1565C0"/>
+                </a:solidFill>
+              </a:defRPr>
+            </a:pPr>
+            <a:r>
+              <a:t>+38.3pp</a:t>
+            </a:r>
+          </a:p>
+          <a:p>
+            <a:pPr>
+              <a:spcAft>
+                <a:spcPts val="400"/>
+              </a:spcAft>
+              <a:defRPr sz="2000">
+                <a:solidFill>
+                  <a:srgbClr val="1565C0"/>
+                </a:solidFill>
+              </a:defRPr>
+            </a:pPr>
+            <a:r>
+              <a:t>Corr2Cause: 36% to 75%</a:t>
+            </a:r>
+          </a:p>
+          <a:p>
+            <a:pPr>
+              <a:spcAft>
+                <a:spcPts val="400"/>
+              </a:spcAft>
+              <a:defRPr sz="2000">
+                <a:solidFill>
+                  <a:srgbClr val="1565C0"/>
+                </a:solidFill>
+              </a:defRPr>
+            </a:pPr>
+            <a:r>
+              <a:t>520 errors corrected</a:t>
+            </a:r>
+          </a:p>
+          <a:p>
+            <a:pPr>
+              <a:spcAft>
+                <a:spcPts val="400"/>
+              </a:spcAft>
+              <a:defRPr sz="2000">
+                <a:solidFill>
+                  <a:srgbClr val="1565C0"/>
+                </a:solidFill>
+              </a:defRPr>
+            </a:pPr>
+            <a:r>
+              <a:t>Only 75 new errors</a:t>
+            </a:r>
+          </a:p>
+          <a:p>
+            <a:pPr>
+              <a:spcAft>
+                <a:spcPts val="400"/>
+              </a:spcAft>
+              <a:defRPr sz="2000">
+                <a:solidFill>
+                  <a:srgbClr val="1565C0"/>
+                </a:solidFill>
+              </a:defRPr>
+            </a:pPr>
+            <a:r>
+              <a:t>+81pp on complex templates</a:t>
+            </a:r>
+          </a:p>
+        </p:txBody>
+      </p:sp>
+      <p:sp>
+        <p:nvSpPr>
+          <p:cNvPr id="5" name="TextBox 4"/>
           <p:cNvSpPr txBox="1"/>
           <p:nvPr/>
         </p:nvSpPr>
         <p:spPr>
           <a:xfrm>
-            <a:off x="731520" y="4832908"/>
-            <a:ext cx="10698480" cy="2135428"/>
+            <a:off x="7772400" y="1097280"/>
+            <a:ext cx="3291840" cy="4572000"/>
           </a:xfrm>
           <a:prstGeom prst="rect">
             <a:avLst/>
           </a:prstGeom>
-          <a:noFill/>
-        </p:spPr>
-        <p:txBody>
-          <a:bodyPr wrap="square" lIns="457200">
+          <a:solidFill>
+            <a:srgbClr val="FCE4EC"/>
+          </a:solidFill>
+        </p:spPr>
+        <p:txBody>
+          <a:bodyPr wrap="square" lIns="182880" rIns="182880" tIns="91440" bIns="91440">
             <a:spAutoFit/>
           </a:bodyPr>
           <a:lstStyle/>
           <a:p>
             <a:pPr>
               <a:spcAft>
-                <a:spcPts val="600"/>
+                <a:spcPts val="400"/>
               </a:spcAft>
-              <a:defRPr sz="2400">
-                <a:solidFill>
-                  <a:srgbClr val="333333"/>
-                </a:solidFill>
-              </a:defRPr>
-              <a:buNone/>
-            </a:pPr>
-            <a:r>
-              <a:t>•  Hedging is ABSENT from training data -- teacher hedges only 4.0% of the time</a:t>
+              <a:defRPr sz="2000" b="1">
+                <a:solidFill>
+                  <a:srgbClr val="C62828"/>
+                </a:solidFill>
+              </a:defRPr>
+            </a:pPr>
+            <a:r>
+              <a:t>Applied Economic Causal</a:t>
             </a:r>
           </a:p>
           <a:p>
             <a:pPr>
               <a:spcAft>
-                <a:spcPts val="600"/>
+                <a:spcPts val="400"/>
               </a:spcAft>
-              <a:defRPr sz="2400">
-                <a:solidFill>
-                  <a:srgbClr val="333333"/>
-                </a:solidFill>
-              </a:defRPr>
-              <a:buNone/>
-            </a:pPr>
-            <a:r>
-              <a:t>•  Model internalizes DM skepticism: "outcomes depend on material conditions"</a:t>
+              <a:defRPr sz="2000" b="1">
+                <a:solidFill>
+                  <a:srgbClr val="C62828"/>
+                </a:solidFill>
+              </a:defRPr>
+            </a:pPr>
+            <a:r>
+              <a:t>-12.4pp</a:t>
             </a:r>
           </a:p>
           <a:p>
             <a:pPr>
               <a:spcAft>
-                <a:spcPts val="600"/>
+                <a:spcPts val="400"/>
               </a:spcAft>
-              <a:defRPr sz="2400">
-                <a:solidFill>
-                  <a:srgbClr val="333333"/>
-                </a:solidFill>
-              </a:defRPr>
-              <a:buNone/>
-            </a:pPr>
-            <a:r>
-              <a:t>•  Applies this indiscriminately -- even where definitive directional effects exist</a:t>
+              <a:defRPr sz="2000">
+                <a:solidFill>
+                  <a:srgbClr val="C62828"/>
+                </a:solidFill>
+              </a:defRPr>
+            </a:pPr>
+            <a:r>
+              <a:t>Task1 Econ: 60% to 48%</a:t>
             </a:r>
           </a:p>
           <a:p>
             <a:pPr>
               <a:spcAft>
-                <a:spcPts val="600"/>
+                <a:spcPts val="400"/>
               </a:spcAft>
-              <a:defRPr sz="2400">
-                <a:solidFill>
-                  <a:srgbClr val="333333"/>
-                </a:solidFill>
-              </a:defRPr>
-              <a:buNone/>
-            </a:pPr>
-            <a:r>
-              <a:t>•  This is not a reasoning error. It is a transferred epistemic prior.</a:t>
+              <a:defRPr sz="2000">
+                <a:solidFill>
+                  <a:srgbClr val="C62828"/>
+                </a:solidFill>
+              </a:defRPr>
+            </a:pPr>
+            <a:r>
+              <a:t>Task1 Finance: 57% to 43%</a:t>
+            </a:r>
+          </a:p>
+          <a:p>
+            <a:pPr>
+              <a:spcAft>
+                <a:spcPts val="400"/>
+              </a:spcAft>
+              <a:defRPr sz="2000">
+                <a:solidFill>
+                  <a:srgbClr val="C62828"/>
+                </a:solidFill>
+              </a:defRPr>
+            </a:pPr>
+            <a:r>
+              <a:t>Task3: 22% to 11%</a:t>
+            </a:r>
+          </a:p>
+          <a:p>
+            <a:pPr>
+              <a:spcAft>
+                <a:spcPts val="400"/>
+              </a:spcAft>
+              <a:defRPr sz="2000">
+                <a:solidFill>
+                  <a:srgbClr val="C62828"/>
+                </a:solidFill>
+              </a:defRPr>
+            </a:pPr>
+            <a:r>
+              <a:t>All regressions significant</a:t>
             </a:r>
           </a:p>
         </p:txBody>
@@ -5944,7 +5268,7 @@
         <p:spPr>
           <a:xfrm>
             <a:off x="0" y="0"/>
-            <a:ext cx="12191695" cy="1051560"/>
+            <a:ext cx="12191695" cy="914400"/>
           </a:xfrm>
           <a:prstGeom prst="rect">
             <a:avLst/>
@@ -5967,7 +5291,7 @@
               </a:defRPr>
             </a:pPr>
             <a:r>
-              <a:t>Phase 2: GRPO Training Design</a:t>
+              <a:t>Root Cause: The Hedging Artifact</a:t>
             </a:r>
           </a:p>
         </p:txBody>
@@ -5980,349 +5304,244 @@
         </p:nvSpPr>
         <p:spPr>
           <a:xfrm>
-            <a:off x="731520" y="1143000"/>
-            <a:ext cx="5029200" cy="320040"/>
-          </a:xfrm>
-          <a:prstGeom prst="rect">
-            <a:avLst/>
-          </a:prstGeom>
-          <a:noFill/>
-        </p:spPr>
-        <p:txBody>
-          <a:bodyPr wrap="square" lIns="137160" rIns="137160">
-            <a:spAutoFit/>
-          </a:bodyPr>
-          <a:lstStyle/>
-          <a:p>
-            <a:pPr algn="l">
-              <a:defRPr sz="2000" b="1">
-                <a:solidFill>
-                  <a:srgbClr val="1565C0"/>
-                </a:solidFill>
-              </a:defRPr>
-            </a:pPr>
-            <a:r>
-              <a:t>V3 (Control): Outcome-Only Rewards</a:t>
-            </a:r>
-          </a:p>
-        </p:txBody>
-      </p:sp>
-      <p:sp>
-        <p:nvSpPr>
-          <p:cNvPr id="4" name="TextBox 3"/>
-          <p:cNvSpPr txBox="1"/>
-          <p:nvPr/>
-        </p:nvSpPr>
-        <p:spPr>
-          <a:xfrm>
-            <a:off x="731520" y="1508760"/>
-            <a:ext cx="5029200" cy="2342896"/>
-          </a:xfrm>
-          <a:prstGeom prst="rect">
-            <a:avLst/>
-          </a:prstGeom>
-          <a:noFill/>
-        </p:spPr>
-        <p:txBody>
-          <a:bodyPr wrap="square" lIns="457200">
-            <a:spAutoFit/>
-          </a:bodyPr>
-          <a:lstStyle/>
-          <a:p>
-            <a:pPr>
-              <a:spcAft>
-                <a:spcPts val="600"/>
-              </a:spcAft>
-              <a:defRPr sz="2000">
-                <a:solidFill>
-                  <a:srgbClr val="333333"/>
-                </a:solidFill>
-              </a:defRPr>
-              <a:buNone/>
-            </a:pPr>
-            <a:r>
-              <a:t>•  Three-tier outcome rewards: full/partial/none credit</a:t>
-            </a:r>
-          </a:p>
-          <a:p>
-            <a:pPr>
-              <a:spcAft>
-                <a:spcPts val="600"/>
-              </a:spcAft>
-              <a:defRPr sz="2000">
-                <a:solidFill>
-                  <a:srgbClr val="333333"/>
-                </a:solidFill>
-              </a:defRPr>
-              <a:buNone/>
-            </a:pPr>
-            <a:r>
-              <a:t>•  Ground-truth correctness from EconCausal + Corr2Cause</a:t>
-            </a:r>
-          </a:p>
-          <a:p>
-            <a:pPr>
-              <a:spcAft>
-                <a:spcPts val="600"/>
-              </a:spcAft>
-              <a:defRPr sz="2000">
-                <a:solidFill>
-                  <a:srgbClr val="333333"/>
-                </a:solidFill>
-              </a:defRPr>
-              <a:buNone/>
-            </a:pPr>
-            <a:r>
-              <a:t>•  Reasoning quality reward (heuristic, [0.0, 0.5])</a:t>
-            </a:r>
-          </a:p>
-          <a:p>
-            <a:pPr>
-              <a:spcAft>
-                <a:spcPts val="600"/>
-              </a:spcAft>
-              <a:defRPr sz="2000">
-                <a:solidFill>
-                  <a:srgbClr val="333333"/>
-                </a:solidFill>
-              </a:defRPr>
-              <a:buNone/>
-            </a:pPr>
-            <a:r>
-              <a:t>•  Flat advantage: single normalization of all rewards</a:t>
-            </a:r>
-          </a:p>
-          <a:p>
-            <a:pPr>
-              <a:spcAft>
-                <a:spcPts val="600"/>
-              </a:spcAft>
-              <a:defRPr sz="2000">
-                <a:solidFill>
-                  <a:srgbClr val="333333"/>
-                </a:solidFill>
-              </a:defRPr>
-              <a:buNone/>
-            </a:pPr>
-            <a:r>
-              <a:t>•  Free-form output (no tags required)</a:t>
-            </a:r>
-          </a:p>
-        </p:txBody>
-      </p:sp>
-      <p:sp>
-        <p:nvSpPr>
-          <p:cNvPr id="5" name="TextBox 4"/>
-          <p:cNvSpPr txBox="1"/>
-          <p:nvPr/>
-        </p:nvSpPr>
-        <p:spPr>
-          <a:xfrm>
-            <a:off x="6400800" y="1188720"/>
-            <a:ext cx="5029200" cy="320040"/>
-          </a:xfrm>
-          <a:prstGeom prst="rect">
-            <a:avLst/>
-          </a:prstGeom>
-          <a:noFill/>
-        </p:spPr>
-        <p:txBody>
-          <a:bodyPr wrap="square" lIns="137160" rIns="137160">
-            <a:spAutoFit/>
-          </a:bodyPr>
-          <a:lstStyle/>
-          <a:p>
-            <a:pPr algn="l">
-              <a:defRPr sz="2000" b="1">
-                <a:solidFill>
-                  <a:srgbClr val="E65C00"/>
-                </a:solidFill>
-              </a:defRPr>
-            </a:pPr>
-            <a:r>
-              <a:t>V4 (Experimental): Dual Advantage + Process</a:t>
-            </a:r>
-          </a:p>
-        </p:txBody>
-      </p:sp>
-      <p:sp>
-        <p:nvSpPr>
-          <p:cNvPr id="6" name="TextBox 5"/>
-          <p:cNvSpPr txBox="1"/>
-          <p:nvPr/>
-        </p:nvSpPr>
-        <p:spPr>
-          <a:xfrm>
-            <a:off x="6400800" y="1554480"/>
-            <a:ext cx="5029200" cy="2342896"/>
-          </a:xfrm>
-          <a:prstGeom prst="rect">
-            <a:avLst/>
-          </a:prstGeom>
-          <a:noFill/>
-        </p:spPr>
-        <p:txBody>
-          <a:bodyPr wrap="square" lIns="457200">
-            <a:spAutoFit/>
-          </a:bodyPr>
-          <a:lstStyle/>
-          <a:p>
-            <a:pPr>
-              <a:spcAft>
-                <a:spcPts val="600"/>
-              </a:spcAft>
-              <a:defRPr sz="2000">
-                <a:solidFill>
-                  <a:srgbClr val="333333"/>
-                </a:solidFill>
-              </a:defRPr>
-              <a:buNone/>
-            </a:pPr>
-            <a:r>
-              <a:t>•  Same outcome rewards as v3</a:t>
-            </a:r>
-          </a:p>
-          <a:p>
-            <a:pPr>
-              <a:spcAft>
-                <a:spcPts val="600"/>
-              </a:spcAft>
-              <a:defRPr sz="2000">
-                <a:solidFill>
-                  <a:srgbClr val="333333"/>
-                </a:solidFill>
-              </a:defRPr>
-              <a:buNone/>
-            </a:pPr>
-            <a:r>
-              <a:t>•  Process rewards: planning, commitment, reflection, monitor</a:t>
-            </a:r>
-          </a:p>
-          <a:p>
-            <a:pPr>
-              <a:spcAft>
-                <a:spcPts val="600"/>
-              </a:spcAft>
-              <a:defRPr sz="2000">
-                <a:solidFill>
-                  <a:srgbClr val="333333"/>
-                </a:solidFill>
-              </a:defRPr>
-              <a:buNone/>
-            </a:pPr>
-            <a:r>
-              <a:t>•  Dual advantage: A_traj (outcome) + A_MR (process), alpha=0.5</a:t>
-            </a:r>
-          </a:p>
-          <a:p>
-            <a:pPr>
-              <a:spcAft>
-                <a:spcPts val="600"/>
-              </a:spcAft>
-              <a:defRPr sz="2000">
-                <a:solidFill>
-                  <a:srgbClr val="333333"/>
-                </a:solidFill>
-              </a:defRPr>
-              <a:buNone/>
-            </a:pPr>
-            <a:r>
-              <a:t>•  Tagged output: &lt;planning&gt;, &lt;commitment&gt;, &lt;reflection&gt;, &lt;monitor&gt;</a:t>
-            </a:r>
-          </a:p>
-          <a:p>
-            <a:pPr>
-              <a:spcAft>
-                <a:spcPts val="600"/>
-              </a:spcAft>
-              <a:defRPr sz="2000">
-                <a:solidFill>
-                  <a:srgbClr val="333333"/>
-                </a:solidFill>
-              </a:defRPr>
-              <a:buNone/>
-            </a:pPr>
-            <a:r>
-              <a:t>•  KL regularization (lambda=0.01), PPO clipping (epsilon=0.2)</a:t>
-            </a:r>
-          </a:p>
-        </p:txBody>
-      </p:sp>
-      <p:sp>
-        <p:nvSpPr>
-          <p:cNvPr id="7" name="Rectangle 6"/>
-          <p:cNvSpPr/>
-          <p:nvPr/>
-        </p:nvSpPr>
-        <p:spPr>
-          <a:xfrm>
-            <a:off x="731520" y="4928616"/>
-            <a:ext cx="10698480" cy="36576"/>
+            <a:off x="640080" y="1097280"/>
+            <a:ext cx="4937760" cy="2834640"/>
           </a:xfrm>
           <a:prstGeom prst="rect">
             <a:avLst/>
           </a:prstGeom>
           <a:solidFill>
-            <a:srgbClr val="F0AD00"/>
+            <a:srgbClr val="FCE4EC"/>
           </a:solidFill>
-          <a:ln>
-            <a:noFill/>
-          </a:ln>
-          <a:effectLst/>
-        </p:spPr>
-        <p:style>
-          <a:lnRef idx="1">
-            <a:schemeClr val="accent1"/>
-          </a:lnRef>
-          <a:fillRef idx="3">
-            <a:schemeClr val="accent1"/>
-          </a:fillRef>
-          <a:effectRef idx="2">
-            <a:schemeClr val="accent1"/>
-          </a:effectRef>
-          <a:fontRef idx="minor">
-            <a:schemeClr val="lt1"/>
-          </a:fontRef>
-        </p:style>
-        <p:txBody>
-          <a:bodyPr rtlCol="0" anchor="ctr"/>
-          <a:lstStyle/>
-          <a:p>
-            <a:pPr algn="ctr"/>
-          </a:p>
-        </p:txBody>
-      </p:sp>
-      <p:sp>
-        <p:nvSpPr>
-          <p:cNvPr id="8" name="TextBox 7"/>
+        </p:spPr>
+        <p:txBody>
+          <a:bodyPr wrap="square" lIns="182880" rIns="182880" tIns="91440" bIns="91440">
+            <a:spAutoFit/>
+          </a:bodyPr>
+          <a:lstStyle/>
+          <a:p>
+            <a:pPr>
+              <a:spcAft>
+                <a:spcPts val="400"/>
+              </a:spcAft>
+              <a:defRPr sz="2000">
+                <a:solidFill>
+                  <a:srgbClr val="333333"/>
+                </a:solidFill>
+              </a:defRPr>
+            </a:pPr>
+            <a:r>
+              <a:t>The Pattern</a:t>
+            </a:r>
+          </a:p>
+          <a:p>
+            <a:pPr>
+              <a:spcAft>
+                <a:spcPts val="400"/>
+              </a:spcAft>
+              <a:defRPr sz="2000">
+                <a:solidFill>
+                  <a:srgbClr val="333333"/>
+                </a:solidFill>
+              </a:defRPr>
+            </a:pPr>
+            <a:r>
+              <a:t>The model converts correct positive causal predictions to ambiguous mixed answers.</a:t>
+            </a:r>
+          </a:p>
+          <a:p>
+            <a:pPr>
+              <a:spcAft>
+                <a:spcPts val="400"/>
+              </a:spcAft>
+              <a:defRPr sz="2000">
+                <a:solidFill>
+                  <a:srgbClr val="333333"/>
+                </a:solidFill>
+              </a:defRPr>
+            </a:pPr>
+            <a:r>
+              <a:t>Task1 Economics: 52.7 percent of regressions are positive to mixed.</a:t>
+            </a:r>
+          </a:p>
+          <a:p>
+            <a:pPr>
+              <a:spcAft>
+                <a:spcPts val="400"/>
+              </a:spcAft>
+              <a:defRPr sz="2000">
+                <a:solidFill>
+                  <a:srgbClr val="333333"/>
+                </a:solidFill>
+              </a:defRPr>
+            </a:pPr>
+            <a:r>
+              <a:t>Task1 Finance: 54.6 percent.</a:t>
+            </a:r>
+          </a:p>
+        </p:txBody>
+      </p:sp>
+      <p:sp>
+        <p:nvSpPr>
+          <p:cNvPr id="4" name="TextBox 3"/>
           <p:cNvSpPr txBox="1"/>
           <p:nvPr/>
         </p:nvSpPr>
         <p:spPr>
           <a:xfrm>
-            <a:off x="731520" y="4983480"/>
-            <a:ext cx="10698480" cy="548640"/>
+            <a:off x="6217920" y="1097280"/>
+            <a:ext cx="5303520" cy="2834640"/>
           </a:xfrm>
           <a:prstGeom prst="rect">
             <a:avLst/>
           </a:prstGeom>
-          <a:noFill/>
-        </p:spPr>
-        <p:txBody>
-          <a:bodyPr wrap="square" lIns="137160" rIns="137160">
+          <a:solidFill>
+            <a:srgbClr val="F3E5F5"/>
+          </a:solidFill>
+        </p:spPr>
+        <p:txBody>
+          <a:bodyPr wrap="square" lIns="182880" rIns="182880" tIns="91440" bIns="91440">
             <a:spAutoFit/>
           </a:bodyPr>
           <a:lstStyle/>
           <a:p>
-            <a:pPr algn="l">
-              <a:defRPr sz="2000" b="1">
+            <a:pPr>
+              <a:spcAft>
+                <a:spcPts val="400"/>
+              </a:spcAft>
+              <a:defRPr sz="2000">
                 <a:solidFill>
                   <a:srgbClr val="333333"/>
                 </a:solidFill>
               </a:defRPr>
             </a:pPr>
             <a:r>
-              <a:t>Goal: v4 reduces hedging more than v3 by rewarding definitive commitment while preserving structural reasoning quality.</a:t>
+              <a:t>The Source</a:t>
+            </a:r>
+          </a:p>
+          <a:p>
+            <a:pPr>
+              <a:spcAft>
+                <a:spcPts val="400"/>
+              </a:spcAft>
+              <a:defRPr sz="2000">
+                <a:solidFill>
+                  <a:srgbClr val="333333"/>
+                </a:solidFill>
+              </a:defRPr>
+            </a:pPr>
+            <a:r>
+              <a:t>The teacher hedges only 4.0 percent of the time. The pattern is not in the data.</a:t>
+            </a:r>
+          </a:p>
+          <a:p>
+            <a:pPr>
+              <a:spcAft>
+                <a:spcPts val="400"/>
+              </a:spcAft>
+              <a:defRPr sz="2000">
+                <a:solidFill>
+                  <a:srgbClr val="333333"/>
+                </a:solidFill>
+              </a:defRPr>
+            </a:pPr>
+            <a:r>
+              <a:t>The model internalized DM structural skepticism: outcomes depend on material conditions.</a:t>
+            </a:r>
+          </a:p>
+          <a:p>
+            <a:pPr>
+              <a:spcAft>
+                <a:spcPts val="400"/>
+              </a:spcAft>
+              <a:defRPr sz="2000">
+                <a:solidFill>
+                  <a:srgbClr val="333333"/>
+                </a:solidFill>
+              </a:defRPr>
+            </a:pPr>
+            <a:r>
+              <a:t>It applies this rule universally, even where definitive directional effects exist.</a:t>
+            </a:r>
+          </a:p>
+        </p:txBody>
+      </p:sp>
+      <p:sp>
+        <p:nvSpPr>
+          <p:cNvPr id="5" name="TextBox 4"/>
+          <p:cNvSpPr txBox="1"/>
+          <p:nvPr/>
+        </p:nvSpPr>
+        <p:spPr>
+          <a:xfrm>
+            <a:off x="457200" y="4297680"/>
+            <a:ext cx="11247120" cy="548640"/>
+          </a:xfrm>
+          <a:prstGeom prst="rect">
+            <a:avLst/>
+          </a:prstGeom>
+          <a:solidFill>
+            <a:srgbClr val="7B2D8E"/>
+          </a:solidFill>
+        </p:spPr>
+        <p:txBody>
+          <a:bodyPr wrap="square" lIns="182880" rIns="182880" tIns="91440" bIns="91440">
+            <a:spAutoFit/>
+          </a:bodyPr>
+          <a:lstStyle/>
+          <a:p>
+            <a:pPr>
+              <a:spcAft>
+                <a:spcPts val="400"/>
+              </a:spcAft>
+              <a:defRPr sz="2000">
+                <a:solidFill>
+                  <a:srgbClr val="FFFFFF"/>
+                </a:solidFill>
+              </a:defRPr>
+            </a:pPr>
+            <a:r>
+              <a:t>An emergent epistemic prior, transferred through SFT.</a:t>
+            </a:r>
+          </a:p>
+        </p:txBody>
+      </p:sp>
+      <p:sp>
+        <p:nvSpPr>
+          <p:cNvPr id="6" name="TextBox 5"/>
+          <p:cNvSpPr txBox="1"/>
+          <p:nvPr/>
+        </p:nvSpPr>
+        <p:spPr>
+          <a:xfrm>
+            <a:off x="731520" y="5120640"/>
+            <a:ext cx="10698480" cy="1371600"/>
+          </a:xfrm>
+          <a:prstGeom prst="rect">
+            <a:avLst/>
+          </a:prstGeom>
+          <a:solidFill>
+            <a:srgbClr val="FFFFFF"/>
+          </a:solidFill>
+        </p:spPr>
+        <p:txBody>
+          <a:bodyPr wrap="square" lIns="182880" rIns="182880" tIns="91440" bIns="91440">
+            <a:spAutoFit/>
+          </a:bodyPr>
+          <a:lstStyle/>
+          <a:p>
+            <a:pPr>
+              <a:spcAft>
+                <a:spcPts val="400"/>
+              </a:spcAft>
+              <a:defRPr sz="1800">
+                <a:solidFill>
+                  <a:srgbClr val="666666"/>
+                </a:solidFill>
+              </a:defRPr>
+            </a:pPr>
+            <a:r>
+              <a:t>The model learned a correct principle (question assumptions) and applied it universally. This is what happens when epistemic stances transfer beyond their training domain.</a:t>
             </a:r>
           </a:p>
         </p:txBody>
@@ -6362,7 +5581,7 @@
         <p:spPr>
           <a:xfrm>
             <a:off x="0" y="0"/>
-            <a:ext cx="12191695" cy="1051560"/>
+            <a:ext cx="12191695" cy="914400"/>
           </a:xfrm>
           <a:prstGeom prst="rect">
             <a:avLst/>
@@ -6385,7 +5604,7 @@
               </a:defRPr>
             </a:pPr>
             <a:r>
-              <a:t>Phase 2: Current Training Status</a:t>
+              <a:t>Implications</a:t>
             </a:r>
           </a:p>
         </p:txBody>
@@ -6398,8 +5617,8 @@
         </p:nvSpPr>
         <p:spPr>
           <a:xfrm>
-            <a:off x="731520" y="1143000"/>
-            <a:ext cx="10698480" cy="320040"/>
+            <a:off x="731520" y="1097280"/>
+            <a:ext cx="10698480" cy="365760"/>
           </a:xfrm>
           <a:prstGeom prst="rect">
             <a:avLst/>
@@ -6415,12 +5634,12 @@
             <a:pPr algn="l">
               <a:defRPr sz="2200" b="1">
                 <a:solidFill>
-                  <a:srgbClr val="1565C0"/>
-                </a:solidFill>
-              </a:defRPr>
-            </a:pPr>
-            <a:r>
-              <a:t>V3 Outcome Track (Control)</a:t>
+                  <a:srgbClr val="7B2D8E"/>
+                </a:solidFill>
+              </a:defRPr>
+            </a:pPr>
+            <a:r>
+              <a:t>What We Learned</a:t>
             </a:r>
           </a:p>
         </p:txBody>
@@ -6433,8 +5652,93 @@
         </p:nvSpPr>
         <p:spPr>
           <a:xfrm>
-            <a:off x="731520" y="1508760"/>
-            <a:ext cx="5029200" cy="2018588"/>
+            <a:off x="731520" y="1554480"/>
+            <a:ext cx="10698480" cy="2286000"/>
+          </a:xfrm>
+          <a:prstGeom prst="rect">
+            <a:avLst/>
+          </a:prstGeom>
+          <a:solidFill>
+            <a:srgbClr val="FFFFFF"/>
+          </a:solidFill>
+        </p:spPr>
+        <p:txBody>
+          <a:bodyPr wrap="square" lIns="182880" rIns="182880" tIns="91440" bIns="91440">
+            <a:spAutoFit/>
+          </a:bodyPr>
+          <a:lstStyle/>
+          <a:p>
+            <a:pPr>
+              <a:spcAft>
+                <a:spcPts val="400"/>
+              </a:spcAft>
+              <a:defRPr sz="2000">
+                <a:solidFill>
+                  <a:srgbClr val="333333"/>
+                </a:solidFill>
+              </a:defRPr>
+            </a:pPr>
+            <a:r>
+              <a:t>SFT transfers epistemic stances, not just behavioral patterns.</a:t>
+            </a:r>
+          </a:p>
+          <a:p>
+            <a:pPr>
+              <a:spcAft>
+                <a:spcPts val="400"/>
+              </a:spcAft>
+              <a:defRPr sz="2000">
+                <a:solidFill>
+                  <a:srgbClr val="333333"/>
+                </a:solidFill>
+              </a:defRPr>
+            </a:pPr>
+            <a:r>
+              <a:t>The same training that strengthens formal logic breaks applied reasoning.</a:t>
+            </a:r>
+          </a:p>
+          <a:p>
+            <a:pPr>
+              <a:spcAft>
+                <a:spcPts val="400"/>
+              </a:spcAft>
+              <a:defRPr sz="2000">
+                <a:solidFill>
+                  <a:srgbClr val="333333"/>
+                </a:solidFill>
+              </a:defRPr>
+            </a:pPr>
+            <a:r>
+              <a:t>The model generalized a correct insight into a universal bias.</a:t>
+            </a:r>
+          </a:p>
+          <a:p>
+            <a:pPr>
+              <a:spcAft>
+                <a:spcPts val="400"/>
+              </a:spcAft>
+              <a:defRPr sz="2000">
+                <a:solidFill>
+                  <a:srgbClr val="333333"/>
+                </a:solidFill>
+              </a:defRPr>
+            </a:pPr>
+            <a:r>
+              <a:t>Standard RLHF may carry similar hidden priors, aligned with the evaluator own assumptions.</a:t>
+            </a:r>
+          </a:p>
+        </p:txBody>
+      </p:sp>
+      <p:sp>
+        <p:nvSpPr>
+          <p:cNvPr id="5" name="TextBox 4"/>
+          <p:cNvSpPr txBox="1"/>
+          <p:nvPr/>
+        </p:nvSpPr>
+        <p:spPr>
+          <a:xfrm>
+            <a:off x="731520" y="4023360"/>
+            <a:ext cx="10698480" cy="365760"/>
           </a:xfrm>
           <a:prstGeom prst="rect">
             <a:avLst/>
@@ -6442,93 +5746,6 @@
           <a:noFill/>
         </p:spPr>
         <p:txBody>
-          <a:bodyPr wrap="square" lIns="457200">
-            <a:spAutoFit/>
-          </a:bodyPr>
-          <a:lstStyle/>
-          <a:p>
-            <a:pPr>
-              <a:spcAft>
-                <a:spcPts val="600"/>
-              </a:spcAft>
-              <a:defRPr sz="2200">
-                <a:solidFill>
-                  <a:srgbClr val="333333"/>
-                </a:solidFill>
-              </a:defRPr>
-              <a:buNone/>
-            </a:pPr>
-            <a:r>
-              <a:t>•  Current run: step 902 / 1,500 (started June 14)</a:t>
-            </a:r>
-          </a:p>
-          <a:p>
-            <a:pPr>
-              <a:spcAft>
-                <a:spcPts val="600"/>
-              </a:spcAft>
-              <a:defRPr sz="2200">
-                <a:solidFill>
-                  <a:srgbClr val="333333"/>
-                </a:solidFill>
-              </a:defRPr>
-              <a:buNone/>
-            </a:pPr>
-            <a:r>
-              <a:t>•  Outcome reward improved 0.29 -&gt; 0.67 over 500 steps (+131%)</a:t>
-            </a:r>
-          </a:p>
-          <a:p>
-            <a:pPr>
-              <a:spcAft>
-                <a:spcPts val="600"/>
-              </a:spcAft>
-              <a:defRPr sz="2200">
-                <a:solidFill>
-                  <a:srgbClr val="333333"/>
-                </a:solidFill>
-              </a:defRPr>
-              <a:buNone/>
-            </a:pPr>
-            <a:r>
-              <a:t>•  Loss oscillating near zero -- expected at GRPO equilibrium</a:t>
-            </a:r>
-          </a:p>
-          <a:p>
-            <a:pPr>
-              <a:spcAft>
-                <a:spcPts val="600"/>
-              </a:spcAft>
-              <a:defRPr sz="2200">
-                <a:solidFill>
-                  <a:srgbClr val="333333"/>
-                </a:solidFill>
-              </a:defRPr>
-              <a:buNone/>
-            </a:pPr>
-            <a:r>
-              <a:t>•  KL stable at 0.0007 (healthy, no divergence)</a:t>
-            </a:r>
-          </a:p>
-        </p:txBody>
-      </p:sp>
-      <p:sp>
-        <p:nvSpPr>
-          <p:cNvPr id="5" name="TextBox 4"/>
-          <p:cNvSpPr txBox="1"/>
-          <p:nvPr/>
-        </p:nvSpPr>
-        <p:spPr>
-          <a:xfrm>
-            <a:off x="6400800" y="1143000"/>
-            <a:ext cx="5029200" cy="320040"/>
-          </a:xfrm>
-          <a:prstGeom prst="rect">
-            <a:avLst/>
-          </a:prstGeom>
-          <a:noFill/>
-        </p:spPr>
-        <p:txBody>
           <a:bodyPr wrap="square" lIns="137160" rIns="137160">
             <a:spAutoFit/>
           </a:bodyPr>
@@ -6537,12 +5754,12 @@
             <a:pPr algn="l">
               <a:defRPr sz="2200" b="1">
                 <a:solidFill>
-                  <a:srgbClr val="E65C00"/>
-                </a:solidFill>
-              </a:defRPr>
-            </a:pPr>
-            <a:r>
-              <a:t>V4 Process Track (Experimental)</a:t>
+                  <a:srgbClr val="7B2D8E"/>
+                </a:solidFill>
+              </a:defRPr>
+            </a:pPr>
+            <a:r>
+              <a:t>Why It Matters</a:t>
             </a:r>
           </a:p>
         </p:txBody>
@@ -6555,247 +5772,64 @@
         </p:nvSpPr>
         <p:spPr>
           <a:xfrm>
-            <a:off x="6400800" y="1508760"/>
-            <a:ext cx="5029200" cy="2018588"/>
-          </a:xfrm>
-          <a:prstGeom prst="rect">
-            <a:avLst/>
-          </a:prstGeom>
-          <a:noFill/>
-        </p:spPr>
-        <p:txBody>
-          <a:bodyPr wrap="square" lIns="457200">
-            <a:spAutoFit/>
-          </a:bodyPr>
-          <a:lstStyle/>
-          <a:p>
-            <a:pPr>
-              <a:spcAft>
-                <a:spcPts val="600"/>
-              </a:spcAft>
-              <a:defRPr sz="2200">
-                <a:solidFill>
-                  <a:srgbClr val="333333"/>
-                </a:solidFill>
-              </a:defRPr>
-              <a:buNone/>
-            </a:pPr>
-            <a:r>
-              <a:t>•  Current run: step 410 / 1,500 (started June 15)</a:t>
-            </a:r>
-          </a:p>
-          <a:p>
-            <a:pPr>
-              <a:spcAft>
-                <a:spcPts val="600"/>
-              </a:spcAft>
-              <a:defRPr sz="2200">
-                <a:solidFill>
-                  <a:srgbClr val="333333"/>
-                </a:solidFill>
-              </a:defRPr>
-              <a:buNone/>
-            </a:pPr>
-            <a:r>
-              <a:t>•  At step 405: v4 outcome (0.44) leads v3 (0.29) -- denser gradients</a:t>
-            </a:r>
-          </a:p>
-          <a:p>
-            <a:pPr>
-              <a:spcAft>
-                <a:spcPts val="600"/>
-              </a:spcAft>
-              <a:defRPr sz="2200">
-                <a:solidFill>
-                  <a:srgbClr val="333333"/>
-                </a:solidFill>
-              </a:defRPr>
-              <a:buNone/>
-            </a:pPr>
-            <a:r>
-              <a:t>•  Process reward stable at 0.55 average</a:t>
-            </a:r>
-          </a:p>
-          <a:p>
-            <a:pPr>
-              <a:spcAft>
-                <a:spcPts val="600"/>
-              </a:spcAft>
-              <a:defRPr sz="2200">
-                <a:solidFill>
-                  <a:srgbClr val="333333"/>
-                </a:solidFill>
-              </a:defRPr>
-              <a:buNone/>
-            </a:pPr>
-            <a:r>
-              <a:t>•  Some process-outcome decoupling observed (high process, low outcome)</a:t>
-            </a:r>
-          </a:p>
-        </p:txBody>
-      </p:sp>
-      <p:sp>
-        <p:nvSpPr>
-          <p:cNvPr id="7" name="Rectangle 6"/>
-          <p:cNvSpPr/>
-          <p:nvPr/>
-        </p:nvSpPr>
-        <p:spPr>
-          <a:xfrm>
-            <a:off x="731520" y="3831335"/>
-            <a:ext cx="10698480" cy="36576"/>
+            <a:off x="731520" y="4480560"/>
+            <a:ext cx="10698480" cy="2286000"/>
           </a:xfrm>
           <a:prstGeom prst="rect">
             <a:avLst/>
           </a:prstGeom>
           <a:solidFill>
-            <a:srgbClr val="F0AD00"/>
+            <a:srgbClr val="FFFFFF"/>
           </a:solidFill>
-          <a:ln>
-            <a:noFill/>
-          </a:ln>
-          <a:effectLst/>
-        </p:spPr>
-        <p:style>
-          <a:lnRef idx="1">
-            <a:schemeClr val="accent1"/>
-          </a:lnRef>
-          <a:fillRef idx="3">
-            <a:schemeClr val="accent1"/>
-          </a:fillRef>
-          <a:effectRef idx="2">
-            <a:schemeClr val="accent1"/>
-          </a:effectRef>
-          <a:fontRef idx="minor">
-            <a:schemeClr val="lt1"/>
-          </a:fontRef>
-        </p:style>
-        <p:txBody>
-          <a:bodyPr rtlCol="0" anchor="ctr"/>
-          <a:lstStyle/>
-          <a:p>
-            <a:pPr algn="ctr"/>
-          </a:p>
-        </p:txBody>
-      </p:sp>
-      <p:sp>
-        <p:nvSpPr>
-          <p:cNvPr id="8" name="TextBox 7"/>
-          <p:cNvSpPr txBox="1"/>
-          <p:nvPr/>
-        </p:nvSpPr>
-        <p:spPr>
-          <a:xfrm>
-            <a:off x="731520" y="3931920"/>
-            <a:ext cx="10698480" cy="320040"/>
-          </a:xfrm>
-          <a:prstGeom prst="rect">
-            <a:avLst/>
-          </a:prstGeom>
-          <a:noFill/>
-        </p:spPr>
-        <p:txBody>
-          <a:bodyPr wrap="square" lIns="137160" rIns="137160">
+        </p:spPr>
+        <p:txBody>
+          <a:bodyPr wrap="square" lIns="182880" rIns="182880" tIns="91440" bIns="91440">
             <a:spAutoFit/>
           </a:bodyPr>
           <a:lstStyle/>
           <a:p>
-            <a:pPr algn="l">
-              <a:defRPr sz="2200" b="1">
-                <a:solidFill>
-                  <a:srgbClr val="7B2D8E"/>
-                </a:solidFill>
-              </a:defRPr>
-            </a:pPr>
-            <a:r>
-              <a:t>Key Engineering Iterations</a:t>
-            </a:r>
-          </a:p>
-        </p:txBody>
-      </p:sp>
-      <p:sp>
-        <p:nvSpPr>
-          <p:cNvPr id="9" name="TextBox 8"/>
-          <p:cNvSpPr txBox="1"/>
-          <p:nvPr/>
-        </p:nvSpPr>
-        <p:spPr>
-          <a:xfrm>
-            <a:off x="731520" y="4297680"/>
-            <a:ext cx="10698480" cy="2018588"/>
-          </a:xfrm>
-          <a:prstGeom prst="rect">
-            <a:avLst/>
-          </a:prstGeom>
-          <a:noFill/>
-        </p:spPr>
-        <p:txBody>
-          <a:bodyPr wrap="square" lIns="457200">
-            <a:spAutoFit/>
-          </a:bodyPr>
-          <a:lstStyle/>
-          <a:p>
             <a:pPr>
               <a:spcAft>
-                <a:spcPts val="600"/>
+                <a:spcPts val="400"/>
               </a:spcAft>
-              <a:defRPr sz="2200">
+              <a:defRPr sz="2000">
                 <a:solidFill>
                   <a:srgbClr val="333333"/>
                 </a:solidFill>
               </a:defRPr>
-              <a:buNone/>
-            </a:pPr>
-            <a:r>
-              <a:t>•  Binary rewards at G=8 insufficient -&gt; three-tier rewards + reasoning quality reward</a:t>
+            </a:pPr>
+            <a:r>
+              <a:t>If alignment training produces hidden reasoning shifts, we need a way to detect them.</a:t>
             </a:r>
           </a:p>
           <a:p>
             <a:pPr>
               <a:spcAft>
-                <a:spcPts val="600"/>
+                <a:spcPts val="400"/>
               </a:spcAft>
-              <a:defRPr sz="2200">
+              <a:defRPr sz="2000">
                 <a:solidFill>
                   <a:srgbClr val="333333"/>
                 </a:solidFill>
               </a:defRPr>
-              <a:buNone/>
-            </a:pPr>
-            <a:r>
-              <a:t>•  Planning overfitting in v4 (850-1024 tok planning, no answer) -&gt; conciseness penalty, higher format penalty</a:t>
+            </a:pPr>
+            <a:r>
+              <a:t>This project provides a diagnostic: improve formal logic while impairing applied reasoning signals over-generalized skepticism.</a:t>
             </a:r>
           </a:p>
           <a:p>
             <a:pPr>
               <a:spcAft>
-                <a:spcPts val="600"/>
+                <a:spcPts val="400"/>
               </a:spcAft>
-              <a:defRPr sz="2200">
+              <a:defRPr sz="2000">
                 <a:solidFill>
                   <a:srgbClr val="333333"/>
                 </a:solidFill>
               </a:defRPr>
-              <a:buNone/>
-            </a:pPr>
-            <a:r>
-              <a:t>•  Corr2Cause removed from GRPO training (SFT already achieves 74.6%, no GRPO needed)</a:t>
-            </a:r>
-          </a:p>
-          <a:p>
-            <a:pPr>
-              <a:spcAft>
-                <a:spcPts val="600"/>
-              </a:spcAft>
-              <a:defRPr sz="2200">
-                <a:solidFill>
-                  <a:srgbClr val="333333"/>
-                </a:solidFill>
-              </a:defRPr>
-              <a:buNone/>
-            </a:pPr>
-            <a:r>
-              <a:t>•  DPO deprecated entirely -- pipeline is now SFT -&gt; GRPO only</a:t>
+            </a:pPr>
+            <a:r>
+              <a:t>The same diagnostic applies to standard RLHF pipelines.</a:t>
             </a:r>
           </a:p>
         </p:txBody>
@@ -6835,7 +5869,7 @@
         <p:spPr>
           <a:xfrm>
             <a:off x="0" y="0"/>
-            <a:ext cx="12191695" cy="1051560"/>
+            <a:ext cx="12191695" cy="914400"/>
           </a:xfrm>
           <a:prstGeom prst="rect">
             <a:avLst/>
@@ -6858,7 +5892,7 @@
               </a:defRPr>
             </a:pPr>
             <a:r>
-              <a:t>Project Timeline</a:t>
+              <a:t>Future Work (Beyond Final Submission)</a:t>
             </a:r>
           </a:p>
         </p:txBody>
@@ -6871,534 +5905,244 @@
         </p:nvSpPr>
         <p:spPr>
           <a:xfrm>
-            <a:off x="731520" y="1143000"/>
-            <a:ext cx="10698480" cy="320040"/>
-          </a:xfrm>
-          <a:prstGeom prst="rect">
-            <a:avLst/>
-          </a:prstGeom>
-          <a:noFill/>
-        </p:spPr>
-        <p:txBody>
-          <a:bodyPr wrap="square" lIns="137160" rIns="137160">
-            <a:spAutoFit/>
-          </a:bodyPr>
-          <a:lstStyle/>
-          <a:p>
-            <a:pPr algn="l">
-              <a:defRPr sz="2200" b="1">
-                <a:solidFill>
-                  <a:srgbClr val="2E7D32"/>
-                </a:solidFill>
-              </a:defRPr>
-            </a:pPr>
-            <a:r>
-              <a:t>Phase 1: SFT Training &amp; Evaluation (Completed)</a:t>
-            </a:r>
-          </a:p>
-        </p:txBody>
-      </p:sp>
-      <p:sp>
-        <p:nvSpPr>
-          <p:cNvPr id="4" name="TextBox 3"/>
-          <p:cNvSpPr txBox="1"/>
-          <p:nvPr/>
-        </p:nvSpPr>
-        <p:spPr>
-          <a:xfrm>
-            <a:off x="731520" y="1508760"/>
-            <a:ext cx="10698480" cy="1548231"/>
-          </a:xfrm>
-          <a:prstGeom prst="rect">
-            <a:avLst/>
-          </a:prstGeom>
-          <a:noFill/>
-        </p:spPr>
-        <p:txBody>
-          <a:bodyPr wrap="square" lIns="457200">
-            <a:spAutoFit/>
-          </a:bodyPr>
-          <a:lstStyle/>
-          <a:p>
-            <a:pPr>
-              <a:spcAft>
-                <a:spcPts val="600"/>
-              </a:spcAft>
-              <a:defRPr sz="2200">
-                <a:solidFill>
-                  <a:srgbClr val="333333"/>
-                </a:solidFill>
-              </a:defRPr>
-              <a:buNone/>
-            </a:pPr>
-            <a:r>
-              <a:t>•  April-May 2026: Dataset assembly, teacher answer generation, SFT training</a:t>
-            </a:r>
-          </a:p>
-          <a:p>
-            <a:pPr>
-              <a:spcAft>
-                <a:spcPts val="600"/>
-              </a:spcAft>
-              <a:defRPr sz="2200">
-                <a:solidFill>
-                  <a:srgbClr val="333333"/>
-                </a:solidFill>
-              </a:defRPr>
-              <a:buNone/>
-            </a:pPr>
-            <a:r>
-              <a:t>•  May 20-23, 2026: BF16 evaluation (11-task suite), hedging artifact analysis</a:t>
-            </a:r>
-          </a:p>
-          <a:p>
-            <a:pPr>
-              <a:spcAft>
-                <a:spcPts val="600"/>
-              </a:spcAft>
-              <a:defRPr sz="2200">
-                <a:solidFill>
-                  <a:srgbClr val="333333"/>
-                </a:solidFill>
-              </a:defRPr>
-              <a:buNone/>
-            </a:pPr>
-            <a:r>
-              <a:t>•  May-June 2026: Paper draft (ICLR 2026 submission), additional SFT runs (Liberal, Libertarian)</a:t>
-            </a:r>
-          </a:p>
-        </p:txBody>
-      </p:sp>
-      <p:sp>
-        <p:nvSpPr>
-          <p:cNvPr id="5" name="Rectangle 4"/>
-          <p:cNvSpPr/>
-          <p:nvPr/>
-        </p:nvSpPr>
-        <p:spPr>
-          <a:xfrm>
-            <a:off x="731520" y="3282696"/>
-            <a:ext cx="10698480" cy="36576"/>
+            <a:off x="731520" y="1097280"/>
+            <a:ext cx="10698480" cy="548640"/>
           </a:xfrm>
           <a:prstGeom prst="rect">
             <a:avLst/>
           </a:prstGeom>
           <a:solidFill>
-            <a:srgbClr val="F0AD00"/>
+            <a:srgbClr val="FFFFFF"/>
           </a:solidFill>
-          <a:ln>
-            <a:noFill/>
-          </a:ln>
-          <a:effectLst/>
-        </p:spPr>
-        <p:style>
-          <a:lnRef idx="1">
-            <a:schemeClr val="accent1"/>
-          </a:lnRef>
-          <a:fillRef idx="3">
-            <a:schemeClr val="accent1"/>
-          </a:fillRef>
-          <a:effectRef idx="2">
-            <a:schemeClr val="accent1"/>
-          </a:effectRef>
-          <a:fontRef idx="minor">
-            <a:schemeClr val="lt1"/>
-          </a:fontRef>
-        </p:style>
-        <p:txBody>
-          <a:bodyPr rtlCol="0" anchor="ctr"/>
-          <a:lstStyle/>
-          <a:p>
-            <a:pPr algn="ctr"/>
-          </a:p>
-        </p:txBody>
-      </p:sp>
-      <p:sp>
-        <p:nvSpPr>
-          <p:cNvPr id="6" name="TextBox 5"/>
+        </p:spPr>
+        <p:txBody>
+          <a:bodyPr wrap="square" lIns="182880" rIns="182880" tIns="91440" bIns="91440">
+            <a:spAutoFit/>
+          </a:bodyPr>
+          <a:lstStyle/>
+          <a:p>
+            <a:pPr>
+              <a:spcAft>
+                <a:spcPts val="400"/>
+              </a:spcAft>
+              <a:defRPr sz="1800">
+                <a:solidFill>
+                  <a:srgbClr val="666666"/>
+                </a:solidFill>
+              </a:defRPr>
+            </a:pPr>
+            <a:r>
+              <a:t>The final project submission on June 20 covers Phase 1 only: SFT training and evaluation. The following work continues as ongoing research.</a:t>
+            </a:r>
+          </a:p>
+        </p:txBody>
+      </p:sp>
+      <p:sp>
+        <p:nvSpPr>
+          <p:cNvPr id="4" name="TextBox 3"/>
           <p:cNvSpPr txBox="1"/>
           <p:nvPr/>
         </p:nvSpPr>
         <p:spPr>
           <a:xfrm>
-            <a:off x="731520" y="3337560"/>
-            <a:ext cx="10698480" cy="320040"/>
-          </a:xfrm>
-          <a:prstGeom prst="rect">
-            <a:avLst/>
-          </a:prstGeom>
-          <a:noFill/>
-        </p:spPr>
-        <p:txBody>
-          <a:bodyPr wrap="square" lIns="137160" rIns="137160">
-            <a:spAutoFit/>
-          </a:bodyPr>
-          <a:lstStyle/>
-          <a:p>
-            <a:pPr algn="l">
-              <a:defRPr sz="2200" b="1">
-                <a:solidFill>
-                  <a:srgbClr val="E65C00"/>
-                </a:solidFill>
-              </a:defRPr>
-            </a:pPr>
-            <a:r>
-              <a:t>Phase 2: GRPO Training (In Progress -- Current)</a:t>
-            </a:r>
-          </a:p>
-        </p:txBody>
-      </p:sp>
-      <p:sp>
-        <p:nvSpPr>
-          <p:cNvPr id="7" name="TextBox 6"/>
-          <p:cNvSpPr txBox="1"/>
-          <p:nvPr/>
-        </p:nvSpPr>
-        <p:spPr>
-          <a:xfrm>
-            <a:off x="731520" y="3703320"/>
-            <a:ext cx="10698480" cy="1548231"/>
-          </a:xfrm>
-          <a:prstGeom prst="rect">
-            <a:avLst/>
-          </a:prstGeom>
-          <a:noFill/>
-        </p:spPr>
-        <p:txBody>
-          <a:bodyPr wrap="square" lIns="457200">
-            <a:spAutoFit/>
-          </a:bodyPr>
-          <a:lstStyle/>
-          <a:p>
-            <a:pPr>
-              <a:spcAft>
-                <a:spcPts val="600"/>
-              </a:spcAft>
-              <a:defRPr sz="2200">
-                <a:solidFill>
-                  <a:srgbClr val="333333"/>
-                </a:solidFill>
-              </a:defRPr>
-              <a:buNone/>
-            </a:pPr>
-            <a:r>
-              <a:t>•  June 3-13: Reward design, script implementation, initial runs (gradient/planning fixes)</a:t>
-            </a:r>
-          </a:p>
-          <a:p>
-            <a:pPr>
-              <a:spcAft>
-                <a:spcPts val="600"/>
-              </a:spcAft>
-              <a:defRPr sz="2200">
-                <a:solidFill>
-                  <a:srgbClr val="333333"/>
-                </a:solidFill>
-              </a:defRPr>
-              <a:buNone/>
-            </a:pPr>
-            <a:r>
-              <a:t>•  June 14-19: Current v3/v4 runs (target 1,500 steps each)</a:t>
-            </a:r>
-          </a:p>
-          <a:p>
-            <a:pPr>
-              <a:spcAft>
-                <a:spcPts val="600"/>
-              </a:spcAft>
-              <a:defRPr sz="2200">
-                <a:solidFill>
-                  <a:srgbClr val="333333"/>
-                </a:solidFill>
-              </a:defRPr>
-              <a:buNone/>
-            </a:pPr>
-            <a:r>
-              <a:t>•  June 18-28: Checkpoint merge, evaluation, tagless testing, v3 vs v4 comparison</a:t>
-            </a:r>
-          </a:p>
-        </p:txBody>
-      </p:sp>
-      <p:sp>
-        <p:nvSpPr>
-          <p:cNvPr id="8" name="Rectangle 7"/>
-          <p:cNvSpPr/>
-          <p:nvPr/>
-        </p:nvSpPr>
-        <p:spPr>
-          <a:xfrm>
-            <a:off x="731520" y="5477256"/>
-            <a:ext cx="10698480" cy="36576"/>
+            <a:off x="640080" y="1828800"/>
+            <a:ext cx="5029200" cy="2286000"/>
           </a:xfrm>
           <a:prstGeom prst="rect">
             <a:avLst/>
           </a:prstGeom>
           <a:solidFill>
-            <a:srgbClr val="F0AD00"/>
+            <a:srgbClr val="E3F2FD"/>
           </a:solidFill>
-          <a:ln>
-            <a:noFill/>
-          </a:ln>
-          <a:effectLst/>
-        </p:spPr>
-        <p:style>
-          <a:lnRef idx="1">
-            <a:schemeClr val="accent1"/>
-          </a:lnRef>
-          <a:fillRef idx="3">
-            <a:schemeClr val="accent1"/>
-          </a:fillRef>
-          <a:effectRef idx="2">
-            <a:schemeClr val="accent1"/>
-          </a:effectRef>
-          <a:fontRef idx="minor">
-            <a:schemeClr val="lt1"/>
-          </a:fontRef>
-        </p:style>
-        <p:txBody>
-          <a:bodyPr rtlCol="0" anchor="ctr"/>
-          <a:lstStyle/>
-          <a:p>
-            <a:pPr algn="ctr"/>
-          </a:p>
-        </p:txBody>
-      </p:sp>
-      <p:sp>
-        <p:nvSpPr>
-          <p:cNvPr id="9" name="TextBox 8"/>
+        </p:spPr>
+        <p:txBody>
+          <a:bodyPr wrap="square" lIns="182880" rIns="182880" tIns="91440" bIns="91440">
+            <a:spAutoFit/>
+          </a:bodyPr>
+          <a:lstStyle/>
+          <a:p>
+            <a:pPr>
+              <a:spcAft>
+                <a:spcPts val="400"/>
+              </a:spcAft>
+              <a:defRPr sz="1800">
+                <a:solidFill>
+                  <a:srgbClr val="333333"/>
+                </a:solidFill>
+              </a:defRPr>
+            </a:pPr>
+            <a:r>
+              <a:t>GRPO Training</a:t>
+            </a:r>
+          </a:p>
+          <a:p>
+            <a:pPr>
+              <a:spcAft>
+                <a:spcPts val="400"/>
+              </a:spcAft>
+              <a:defRPr sz="1800">
+                <a:solidFill>
+                  <a:srgbClr val="333333"/>
+                </a:solidFill>
+              </a:defRPr>
+            </a:pPr>
+            <a:r>
+              <a:t>Reverse the hedging regression on EconCausal while preserving Corr2Cause gains.</a:t>
+            </a:r>
+          </a:p>
+          <a:p>
+            <a:pPr>
+              <a:spcAft>
+                <a:spcPts val="400"/>
+              </a:spcAft>
+              <a:defRPr sz="1800">
+                <a:solidFill>
+                  <a:srgbClr val="333333"/>
+                </a:solidFill>
+              </a:defRPr>
+            </a:pPr>
+            <a:r>
+              <a:t>Two conditions: outcome-only rewards (v3) versus dual advantage with process rewards (v4).</a:t>
+            </a:r>
+          </a:p>
+          <a:p>
+            <a:pPr>
+              <a:spcAft>
+                <a:spcPts val="400"/>
+              </a:spcAft>
+              <a:defRPr sz="1800">
+                <a:solidFill>
+                  <a:srgbClr val="333333"/>
+                </a:solidFill>
+              </a:defRPr>
+            </a:pPr>
+            <a:r>
+              <a:t>V3 at step 902 of 1,500. V4 at step 410 of 1,500. V4 leading on outcome reward.</a:t>
+            </a:r>
+          </a:p>
+        </p:txBody>
+      </p:sp>
+      <p:sp>
+        <p:nvSpPr>
+          <p:cNvPr id="5" name="TextBox 4"/>
           <p:cNvSpPr txBox="1"/>
           <p:nvPr/>
         </p:nvSpPr>
         <p:spPr>
           <a:xfrm>
-            <a:off x="731520" y="5532120"/>
-            <a:ext cx="10698480" cy="320040"/>
-          </a:xfrm>
-          <a:prstGeom prst="rect">
-            <a:avLst/>
-          </a:prstGeom>
-          <a:noFill/>
-        </p:spPr>
-        <p:txBody>
-          <a:bodyPr wrap="square" lIns="137160" rIns="137160">
-            <a:spAutoFit/>
-          </a:bodyPr>
-          <a:lstStyle/>
-          <a:p>
-            <a:pPr algn="l">
-              <a:defRPr sz="2200" b="1">
-                <a:solidFill>
-                  <a:srgbClr val="1565C0"/>
-                </a:solidFill>
-              </a:defRPr>
-            </a:pPr>
-            <a:r>
-              <a:t>Phase 3: Multi-Ideology Evaluation (Planned)</a:t>
-            </a:r>
-          </a:p>
-        </p:txBody>
-      </p:sp>
-      <p:sp>
-        <p:nvSpPr>
-          <p:cNvPr id="10" name="TextBox 9"/>
-          <p:cNvSpPr txBox="1"/>
-          <p:nvPr/>
-        </p:nvSpPr>
-        <p:spPr>
-          <a:xfrm>
-            <a:off x="731520" y="5897880"/>
-            <a:ext cx="10698480" cy="1077874"/>
-          </a:xfrm>
-          <a:prstGeom prst="rect">
-            <a:avLst/>
-          </a:prstGeom>
-          <a:noFill/>
-        </p:spPr>
-        <p:txBody>
-          <a:bodyPr wrap="square" lIns="457200">
-            <a:spAutoFit/>
-          </a:bodyPr>
-          <a:lstStyle/>
-          <a:p>
-            <a:pPr>
-              <a:spcAft>
-                <a:spcPts val="600"/>
-              </a:spcAft>
-              <a:defRPr sz="2200">
-                <a:solidFill>
-                  <a:srgbClr val="333333"/>
-                </a:solidFill>
-              </a:defRPr>
-              <a:buNone/>
-            </a:pPr>
-            <a:r>
-              <a:t>•  June 20-22: Liberal and Libertarian model BF16 evaluation (11 tasks each)</a:t>
-            </a:r>
-          </a:p>
-          <a:p>
-            <a:pPr>
-              <a:spcAft>
-                <a:spcPts val="600"/>
-              </a:spcAft>
-              <a:defRPr sz="2200">
-                <a:solidFill>
-                  <a:srgbClr val="333333"/>
-                </a:solidFill>
-              </a:defRPr>
-              <a:buNone/>
-            </a:pPr>
-            <a:r>
-              <a:t>•  June 22-28: Four-model comparison, ideology-specificity analysis</a:t>
-            </a:r>
-          </a:p>
-        </p:txBody>
-      </p:sp>
-      <p:sp>
-        <p:nvSpPr>
-          <p:cNvPr id="11" name="Rectangle 10"/>
-          <p:cNvSpPr/>
-          <p:nvPr/>
-        </p:nvSpPr>
-        <p:spPr>
-          <a:xfrm>
-            <a:off x="731520" y="7488936"/>
-            <a:ext cx="10698480" cy="36576"/>
+            <a:off x="6583680" y="1828800"/>
+            <a:ext cx="5029200" cy="2286000"/>
           </a:xfrm>
           <a:prstGeom prst="rect">
             <a:avLst/>
           </a:prstGeom>
           <a:solidFill>
-            <a:srgbClr val="F0AD00"/>
+            <a:srgbClr val="FFF3E0"/>
           </a:solidFill>
-          <a:ln>
-            <a:noFill/>
-          </a:ln>
-          <a:effectLst/>
-        </p:spPr>
-        <p:style>
-          <a:lnRef idx="1">
-            <a:schemeClr val="accent1"/>
-          </a:lnRef>
-          <a:fillRef idx="3">
-            <a:schemeClr val="accent1"/>
-          </a:fillRef>
-          <a:effectRef idx="2">
-            <a:schemeClr val="accent1"/>
-          </a:effectRef>
-          <a:fontRef idx="minor">
-            <a:schemeClr val="lt1"/>
-          </a:fontRef>
-        </p:style>
-        <p:txBody>
-          <a:bodyPr rtlCol="0" anchor="ctr"/>
-          <a:lstStyle/>
-          <a:p>
-            <a:pPr algn="ctr"/>
-          </a:p>
-        </p:txBody>
-      </p:sp>
-      <p:sp>
-        <p:nvSpPr>
-          <p:cNvPr id="12" name="TextBox 11"/>
+        </p:spPr>
+        <p:txBody>
+          <a:bodyPr wrap="square" lIns="182880" rIns="182880" tIns="91440" bIns="91440">
+            <a:spAutoFit/>
+          </a:bodyPr>
+          <a:lstStyle/>
+          <a:p>
+            <a:pPr>
+              <a:spcAft>
+                <a:spcPts val="400"/>
+              </a:spcAft>
+              <a:defRPr sz="1800">
+                <a:solidFill>
+                  <a:srgbClr val="333333"/>
+                </a:solidFill>
+              </a:defRPr>
+            </a:pPr>
+            <a:r>
+              <a:t>Multi-Ideology Comparison</a:t>
+            </a:r>
+          </a:p>
+          <a:p>
+            <a:pPr>
+              <a:spcAft>
+                <a:spcPts val="400"/>
+              </a:spcAft>
+              <a:defRPr sz="1800">
+                <a:solidFill>
+                  <a:srgbClr val="333333"/>
+                </a:solidFill>
+              </a:defRPr>
+            </a:pPr>
+            <a:r>
+              <a:t>Evaluate Liberal and Libertarian SFT models on the same 11-task benchmark.</a:t>
+            </a:r>
+          </a:p>
+          <a:p>
+            <a:pPr>
+              <a:spcAft>
+                <a:spcPts val="400"/>
+              </a:spcAft>
+              <a:defRPr sz="1800">
+                <a:solidFill>
+                  <a:srgbClr val="333333"/>
+                </a:solidFill>
+              </a:defRPr>
+            </a:pPr>
+            <a:r>
+              <a:t>Test whether the hedging regression is specific to DM or general to SFT on non-dominant frameworks.</a:t>
+            </a:r>
+          </a:p>
+          <a:p>
+            <a:pPr>
+              <a:spcAft>
+                <a:spcPts val="400"/>
+              </a:spcAft>
+              <a:defRPr sz="1800">
+                <a:solidFill>
+                  <a:srgbClr val="333333"/>
+                </a:solidFill>
+              </a:defRPr>
+            </a:pPr>
+            <a:r>
+              <a:t>Models already trained. Evaluation pending after final submission.</a:t>
+            </a:r>
+          </a:p>
+        </p:txBody>
+      </p:sp>
+      <p:sp>
+        <p:nvSpPr>
+          <p:cNvPr id="6" name="TextBox 5"/>
           <p:cNvSpPr txBox="1"/>
           <p:nvPr/>
         </p:nvSpPr>
         <p:spPr>
           <a:xfrm>
-            <a:off x="731520" y="7543800"/>
-            <a:ext cx="10698480" cy="320040"/>
+            <a:off x="731520" y="4572000"/>
+            <a:ext cx="10698480" cy="1371600"/>
           </a:xfrm>
           <a:prstGeom prst="rect">
             <a:avLst/>
           </a:prstGeom>
-          <a:noFill/>
-        </p:spPr>
-        <p:txBody>
-          <a:bodyPr wrap="square" lIns="137160" rIns="137160">
+          <a:solidFill>
+            <a:srgbClr val="FFFFFF"/>
+          </a:solidFill>
+        </p:spPr>
+        <p:txBody>
+          <a:bodyPr wrap="square" lIns="182880" rIns="182880" tIns="91440" bIns="91440">
             <a:spAutoFit/>
           </a:bodyPr>
           <a:lstStyle/>
           <a:p>
-            <a:pPr algn="l">
-              <a:defRPr sz="2200" b="1">
+            <a:pPr>
+              <a:spcAft>
+                <a:spcPts val="400"/>
+              </a:spcAft>
+              <a:defRPr sz="1800">
                 <a:solidFill>
                   <a:srgbClr val="7B2D8E"/>
                 </a:solidFill>
               </a:defRPr>
             </a:pPr>
             <a:r>
-              <a:t>Phase 4: Final Analysis &amp; Paper Revision (Planned)</a:t>
-            </a:r>
-          </a:p>
-        </p:txBody>
-      </p:sp>
-      <p:sp>
-        <p:nvSpPr>
-          <p:cNvPr id="13" name="TextBox 12"/>
-          <p:cNvSpPr txBox="1"/>
-          <p:nvPr/>
-        </p:nvSpPr>
-        <p:spPr>
-          <a:xfrm>
-            <a:off x="731520" y="7909560"/>
-            <a:ext cx="10698480" cy="1548231"/>
-          </a:xfrm>
-          <a:prstGeom prst="rect">
-            <a:avLst/>
-          </a:prstGeom>
-          <a:noFill/>
-        </p:spPr>
-        <p:txBody>
-          <a:bodyPr wrap="square" lIns="457200">
-            <a:spAutoFit/>
-          </a:bodyPr>
-          <a:lstStyle/>
-          <a:p>
-            <a:pPr>
-              <a:spcAft>
-                <a:spcPts val="600"/>
-              </a:spcAft>
-              <a:defRPr sz="2200">
-                <a:solidFill>
-                  <a:srgbClr val="333333"/>
-                </a:solidFill>
-              </a:defRPr>
-              <a:buNone/>
-            </a:pPr>
-            <a:r>
-              <a:t>•  June 28 - July 5: Consolidate results, statistical significance testing</a:t>
-            </a:r>
-          </a:p>
-          <a:p>
-            <a:pPr>
-              <a:spcAft>
-                <a:spcPts val="600"/>
-              </a:spcAft>
-              <a:defRPr sz="2200">
-                <a:solidFill>
-                  <a:srgbClr val="333333"/>
-                </a:solidFill>
-              </a:defRPr>
-              <a:buNone/>
-            </a:pPr>
-            <a:r>
-              <a:t>•  July 5-15: Paper revision incorporating GRPO results</a:t>
-            </a:r>
-          </a:p>
-          <a:p>
-            <a:pPr>
-              <a:spcAft>
-                <a:spcPts val="600"/>
-              </a:spcAft>
-              <a:defRPr sz="2200">
-                <a:solidFill>
-                  <a:srgbClr val="333333"/>
-                </a:solidFill>
-              </a:defRPr>
-              <a:buNone/>
-            </a:pPr>
-            <a:r>
-              <a:t>•  July 15-20: Final project report and presentation</a:t>
+              <a:t>Open research question: do standard RLHF pipelines produce similar hidden epistemic transfers, aligned with the evaluator own assumptions?</a:t>
             </a:r>
           </a:p>
         </p:txBody>
@@ -7438,7 +6182,7 @@
         <p:spPr>
           <a:xfrm>
             <a:off x="0" y="0"/>
-            <a:ext cx="12191695" cy="1051560"/>
+            <a:ext cx="12191695" cy="914400"/>
           </a:xfrm>
           <a:prstGeom prst="rect">
             <a:avLst/>
@@ -7461,7 +6205,7 @@
               </a:defRPr>
             </a:pPr>
             <a:r>
-              <a:t>Evaluation Plan and Success Criteria</a:t>
+              <a:t>Timeline: Final Submission June 20</a:t>
             </a:r>
           </a:p>
         </p:txBody>
@@ -7474,400 +6218,269 @@
         </p:nvSpPr>
         <p:spPr>
           <a:xfrm>
-            <a:off x="731520" y="1143000"/>
-            <a:ext cx="10698480" cy="320040"/>
-          </a:xfrm>
-          <a:prstGeom prst="rect">
-            <a:avLst/>
-          </a:prstGeom>
-          <a:noFill/>
-        </p:spPr>
-        <p:txBody>
-          <a:bodyPr wrap="square" lIns="137160" rIns="137160">
-            <a:spAutoFit/>
-          </a:bodyPr>
-          <a:lstStyle/>
-          <a:p>
-            <a:pPr algn="l">
-              <a:defRPr sz="2200" b="1">
-                <a:solidFill>
-                  <a:srgbClr val="7B2D8E"/>
-                </a:solidFill>
-              </a:defRPr>
-            </a:pPr>
-            <a:r>
-              <a:t>Primary Metric</a:t>
-            </a:r>
-          </a:p>
-        </p:txBody>
-      </p:sp>
-      <p:sp>
-        <p:nvSpPr>
-          <p:cNvPr id="4" name="TextBox 3"/>
-          <p:cNvSpPr txBox="1"/>
-          <p:nvPr/>
-        </p:nvSpPr>
-        <p:spPr>
-          <a:xfrm>
-            <a:off x="731520" y="1508760"/>
-            <a:ext cx="10698480" cy="1548231"/>
-          </a:xfrm>
-          <a:prstGeom prst="rect">
-            <a:avLst/>
-          </a:prstGeom>
-          <a:noFill/>
-        </p:spPr>
-        <p:txBody>
-          <a:bodyPr wrap="square" lIns="457200">
-            <a:spAutoFit/>
-          </a:bodyPr>
-          <a:lstStyle/>
-          <a:p>
-            <a:pPr>
-              <a:spcAft>
-                <a:spcPts val="600"/>
-              </a:spcAft>
-              <a:defRPr sz="2200">
-                <a:solidFill>
-                  <a:srgbClr val="333333"/>
-                </a:solidFill>
-              </a:defRPr>
-              <a:buNone/>
-            </a:pPr>
-            <a:r>
-              <a:t>•  EconCausal accuracy (Task1 Econ, Task1 Finance, Task2, Task3)</a:t>
-            </a:r>
-          </a:p>
-          <a:p>
-            <a:pPr>
-              <a:spcAft>
-                <a:spcPts val="600"/>
-              </a:spcAft>
-              <a:defRPr sz="2200">
-                <a:solidFill>
-                  <a:srgbClr val="333333"/>
-                </a:solidFill>
-              </a:defRPr>
-              <a:buNone/>
-            </a:pPr>
-            <a:r>
-              <a:t>•  Success: v4 shows statistically significant improvement over SFT on at least one Task1 subtask (p &lt; 0.025, Bonferroni-corrected)</a:t>
-            </a:r>
-          </a:p>
-          <a:p>
-            <a:pPr>
-              <a:spcAft>
-                <a:spcPts val="600"/>
-              </a:spcAft>
-              <a:defRPr sz="2200">
-                <a:solidFill>
-                  <a:srgbClr val="333333"/>
-                </a:solidFill>
-              </a:defRPr>
-              <a:buNone/>
-            </a:pPr>
-            <a:r>
-              <a:t>•  Answer distribution tracking: reduction in + to mixed hedging rate</a:t>
-            </a:r>
-          </a:p>
-        </p:txBody>
-      </p:sp>
-      <p:sp>
-        <p:nvSpPr>
-          <p:cNvPr id="5" name="Rectangle 4"/>
-          <p:cNvSpPr/>
-          <p:nvPr/>
-        </p:nvSpPr>
-        <p:spPr>
-          <a:xfrm>
-            <a:off x="731520" y="3282696"/>
-            <a:ext cx="10698480" cy="36576"/>
+            <a:off x="457200" y="1097280"/>
+            <a:ext cx="11247120" cy="1005840"/>
           </a:xfrm>
           <a:prstGeom prst="rect">
             <a:avLst/>
           </a:prstGeom>
           <a:solidFill>
-            <a:srgbClr val="F0AD00"/>
+            <a:srgbClr val="E8F5E9"/>
           </a:solidFill>
-          <a:ln>
-            <a:noFill/>
-          </a:ln>
-          <a:effectLst/>
-        </p:spPr>
-        <p:style>
-          <a:lnRef idx="1">
-            <a:schemeClr val="accent1"/>
-          </a:lnRef>
-          <a:fillRef idx="3">
-            <a:schemeClr val="accent1"/>
-          </a:fillRef>
-          <a:effectRef idx="2">
-            <a:schemeClr val="accent1"/>
-          </a:effectRef>
-          <a:fontRef idx="minor">
-            <a:schemeClr val="lt1"/>
-          </a:fontRef>
-        </p:style>
-        <p:txBody>
-          <a:bodyPr rtlCol="0" anchor="ctr"/>
-          <a:lstStyle/>
-          <a:p>
-            <a:pPr algn="ctr"/>
-          </a:p>
-        </p:txBody>
-      </p:sp>
-      <p:sp>
-        <p:nvSpPr>
-          <p:cNvPr id="6" name="TextBox 5"/>
+        </p:spPr>
+        <p:txBody>
+          <a:bodyPr wrap="square" lIns="182880" rIns="182880" tIns="91440" bIns="91440">
+            <a:spAutoFit/>
+          </a:bodyPr>
+          <a:lstStyle/>
+          <a:p>
+            <a:pPr>
+              <a:spcAft>
+                <a:spcPts val="400"/>
+              </a:spcAft>
+              <a:defRPr sz="2000" b="1">
+                <a:solidFill>
+                  <a:srgbClr val="2E7D32"/>
+                </a:solidFill>
+              </a:defRPr>
+            </a:pPr>
+            <a:r>
+              <a:t>Phase 1: SFT and Evaluation  --  Completed</a:t>
+            </a:r>
+          </a:p>
+          <a:p>
+            <a:pPr>
+              <a:spcAft>
+                <a:spcPts val="400"/>
+              </a:spcAft>
+              <a:defRPr sz="1800">
+                <a:solidFill>
+                  <a:srgbClr val="333333"/>
+                </a:solidFill>
+              </a:defRPr>
+            </a:pPr>
+            <a:r>
+              <a:t>April to June 2026: Dataset assembly, SFT training, BF16 evaluation across 11 tasks, paper draft.</a:t>
+            </a:r>
+          </a:p>
+        </p:txBody>
+      </p:sp>
+      <p:sp>
+        <p:nvSpPr>
+          <p:cNvPr id="4" name="TextBox 3"/>
           <p:cNvSpPr txBox="1"/>
           <p:nvPr/>
         </p:nvSpPr>
         <p:spPr>
           <a:xfrm>
-            <a:off x="731520" y="3337560"/>
-            <a:ext cx="10698480" cy="320040"/>
-          </a:xfrm>
-          <a:prstGeom prst="rect">
-            <a:avLst/>
-          </a:prstGeom>
-          <a:noFill/>
-        </p:spPr>
-        <p:txBody>
-          <a:bodyPr wrap="square" lIns="137160" rIns="137160">
-            <a:spAutoFit/>
-          </a:bodyPr>
-          <a:lstStyle/>
-          <a:p>
-            <a:pPr algn="l">
-              <a:defRPr sz="2200" b="1">
-                <a:solidFill>
-                  <a:srgbClr val="7B2D8E"/>
-                </a:solidFill>
-              </a:defRPr>
-            </a:pPr>
-            <a:r>
-              <a:t>Secondary Metrics</a:t>
-            </a:r>
-          </a:p>
-        </p:txBody>
-      </p:sp>
-      <p:sp>
-        <p:nvSpPr>
-          <p:cNvPr id="7" name="TextBox 6"/>
-          <p:cNvSpPr txBox="1"/>
-          <p:nvPr/>
-        </p:nvSpPr>
-        <p:spPr>
-          <a:xfrm>
-            <a:off x="731520" y="3703320"/>
-            <a:ext cx="10698480" cy="1548231"/>
-          </a:xfrm>
-          <a:prstGeom prst="rect">
-            <a:avLst/>
-          </a:prstGeom>
-          <a:noFill/>
-        </p:spPr>
-        <p:txBody>
-          <a:bodyPr wrap="square" lIns="457200">
-            <a:spAutoFit/>
-          </a:bodyPr>
-          <a:lstStyle/>
-          <a:p>
-            <a:pPr>
-              <a:spcAft>
-                <a:spcPts val="600"/>
-              </a:spcAft>
-              <a:defRPr sz="2200">
-                <a:solidFill>
-                  <a:srgbClr val="333333"/>
-                </a:solidFill>
-              </a:defRPr>
-              <a:buNone/>
-            </a:pPr>
-            <a:r>
-              <a:t>•  Corr2Cause accuracy -- no degradation from EconCausal-focused GRPO</a:t>
-            </a:r>
-          </a:p>
-          <a:p>
-            <a:pPr>
-              <a:spcAft>
-                <a:spcPts val="600"/>
-              </a:spcAft>
-              <a:defRPr sz="2200">
-                <a:solidFill>
-                  <a:srgbClr val="333333"/>
-                </a:solidFill>
-              </a:defRPr>
-              <a:buNone/>
-            </a:pPr>
-            <a:r>
-              <a:t>•  HumanEval pass@1 -- no coding capability degradation</a:t>
-            </a:r>
-          </a:p>
-          <a:p>
-            <a:pPr>
-              <a:spcAft>
-                <a:spcPts val="600"/>
-              </a:spcAft>
-              <a:defRPr sz="2200">
-                <a:solidFill>
-                  <a:srgbClr val="333333"/>
-                </a:solidFill>
-              </a:defRPr>
-              <a:buNone/>
-            </a:pPr>
-            <a:r>
-              <a:t>•  Directional assertion rate -- fraction of answers that are + or - rather than mixed</a:t>
-            </a:r>
-          </a:p>
-        </p:txBody>
-      </p:sp>
-      <p:sp>
-        <p:nvSpPr>
-          <p:cNvPr id="8" name="Rectangle 7"/>
-          <p:cNvSpPr/>
-          <p:nvPr/>
-        </p:nvSpPr>
-        <p:spPr>
-          <a:xfrm>
-            <a:off x="731520" y="5477256"/>
-            <a:ext cx="10698480" cy="36576"/>
+            <a:off x="457200" y="2286000"/>
+            <a:ext cx="11247120" cy="1005840"/>
           </a:xfrm>
           <a:prstGeom prst="rect">
             <a:avLst/>
           </a:prstGeom>
           <a:solidFill>
-            <a:srgbClr val="F0AD00"/>
+            <a:srgbClr val="7B2D8E"/>
           </a:solidFill>
-          <a:ln>
-            <a:noFill/>
-          </a:ln>
-          <a:effectLst/>
-        </p:spPr>
-        <p:style>
-          <a:lnRef idx="1">
-            <a:schemeClr val="accent1"/>
-          </a:lnRef>
-          <a:fillRef idx="3">
-            <a:schemeClr val="accent1"/>
-          </a:fillRef>
-          <a:effectRef idx="2">
-            <a:schemeClr val="accent1"/>
-          </a:effectRef>
-          <a:fontRef idx="minor">
-            <a:schemeClr val="lt1"/>
-          </a:fontRef>
-        </p:style>
-        <p:txBody>
-          <a:bodyPr rtlCol="0" anchor="ctr"/>
-          <a:lstStyle/>
-          <a:p>
-            <a:pPr algn="ctr"/>
-          </a:p>
-        </p:txBody>
-      </p:sp>
-      <p:sp>
-        <p:nvSpPr>
-          <p:cNvPr id="9" name="TextBox 8"/>
+        </p:spPr>
+        <p:txBody>
+          <a:bodyPr wrap="square" lIns="182880" rIns="182880" tIns="91440" bIns="91440">
+            <a:spAutoFit/>
+          </a:bodyPr>
+          <a:lstStyle/>
+          <a:p>
+            <a:pPr>
+              <a:spcAft>
+                <a:spcPts val="400"/>
+              </a:spcAft>
+              <a:defRPr sz="2000" b="1">
+                <a:solidFill>
+                  <a:srgbClr val="FFFFFF"/>
+                </a:solidFill>
+              </a:defRPr>
+            </a:pPr>
+            <a:r>
+              <a:t>Phase 2: Final Submission  --  June 20</a:t>
+            </a:r>
+          </a:p>
+          <a:p>
+            <a:pPr>
+              <a:spcAft>
+                <a:spcPts val="400"/>
+              </a:spcAft>
+              <a:defRPr sz="1800">
+                <a:solidFill>
+                  <a:srgbClr val="333333"/>
+                </a:solidFill>
+              </a:defRPr>
+            </a:pPr>
+            <a:r>
+              <a:t>Final report, slides, and paper covering SFT results, hedging artifact analysis, and implications.</a:t>
+            </a:r>
+          </a:p>
+        </p:txBody>
+      </p:sp>
+      <p:sp>
+        <p:nvSpPr>
+          <p:cNvPr id="5" name="TextBox 4"/>
           <p:cNvSpPr txBox="1"/>
           <p:nvPr/>
         </p:nvSpPr>
         <p:spPr>
           <a:xfrm>
-            <a:off x="731520" y="5532120"/>
-            <a:ext cx="10698480" cy="320040"/>
+            <a:off x="457200" y="3474720"/>
+            <a:ext cx="11247120" cy="1005840"/>
           </a:xfrm>
           <a:prstGeom prst="rect">
             <a:avLst/>
           </a:prstGeom>
-          <a:noFill/>
-        </p:spPr>
-        <p:txBody>
-          <a:bodyPr wrap="square" lIns="137160" rIns="137160">
+          <a:solidFill>
+            <a:srgbClr val="FFF3E0"/>
+          </a:solidFill>
+        </p:spPr>
+        <p:txBody>
+          <a:bodyPr wrap="square" lIns="182880" rIns="182880" tIns="91440" bIns="91440">
             <a:spAutoFit/>
           </a:bodyPr>
           <a:lstStyle/>
           <a:p>
-            <a:pPr algn="l">
-              <a:defRPr sz="2200" b="1">
-                <a:solidFill>
-                  <a:srgbClr val="7B2D8E"/>
-                </a:solidFill>
-              </a:defRPr>
-            </a:pPr>
-            <a:r>
-              <a:t>Multi-Ideology Hypothesis</a:t>
-            </a:r>
-          </a:p>
-        </p:txBody>
-      </p:sp>
-      <p:sp>
-        <p:nvSpPr>
-          <p:cNvPr id="10" name="TextBox 9"/>
+            <a:pPr>
+              <a:spcAft>
+                <a:spcPts val="400"/>
+              </a:spcAft>
+              <a:defRPr sz="2000" b="1">
+                <a:solidFill>
+                  <a:srgbClr val="E65C00"/>
+                </a:solidFill>
+              </a:defRPr>
+            </a:pPr>
+            <a:r>
+              <a:t>Future Work: GRPO Training  --  Ongoing Research</a:t>
+            </a:r>
+          </a:p>
+          <a:p>
+            <a:pPr>
+              <a:spcAft>
+                <a:spcPts val="400"/>
+              </a:spcAft>
+              <a:defRPr sz="1800">
+                <a:solidFill>
+                  <a:srgbClr val="333333"/>
+                </a:solidFill>
+              </a:defRPr>
+            </a:pPr>
+            <a:r>
+              <a:t>June to July: Complete v3 and v4 GRPO runs, merge checkpoints, evaluate, compare against SFT baseline.</a:t>
+            </a:r>
+          </a:p>
+        </p:txBody>
+      </p:sp>
+      <p:sp>
+        <p:nvSpPr>
+          <p:cNvPr id="6" name="TextBox 5"/>
           <p:cNvSpPr txBox="1"/>
           <p:nvPr/>
         </p:nvSpPr>
         <p:spPr>
           <a:xfrm>
-            <a:off x="731520" y="5897880"/>
-            <a:ext cx="10698480" cy="1548231"/>
+            <a:off x="457200" y="4663440"/>
+            <a:ext cx="11247120" cy="1005840"/>
           </a:xfrm>
           <a:prstGeom prst="rect">
             <a:avLst/>
           </a:prstGeom>
-          <a:noFill/>
-        </p:spPr>
-        <p:txBody>
-          <a:bodyPr wrap="square" lIns="457200">
+          <a:solidFill>
+            <a:srgbClr val="E3F2FD"/>
+          </a:solidFill>
+        </p:spPr>
+        <p:txBody>
+          <a:bodyPr wrap="square" lIns="182880" rIns="182880" tIns="91440" bIns="91440">
             <a:spAutoFit/>
           </a:bodyPr>
           <a:lstStyle/>
           <a:p>
             <a:pPr>
               <a:spcAft>
-                <a:spcPts val="600"/>
+                <a:spcPts val="400"/>
               </a:spcAft>
-              <a:defRPr sz="2200">
+              <a:defRPr sz="2000" b="1">
+                <a:solidFill>
+                  <a:srgbClr val="1565C0"/>
+                </a:solidFill>
+              </a:defRPr>
+            </a:pPr>
+            <a:r>
+              <a:t>Future Work: Multi-Ideology Comparison  --  Ongoing Research</a:t>
+            </a:r>
+          </a:p>
+          <a:p>
+            <a:pPr>
+              <a:spcAft>
+                <a:spcPts val="400"/>
+              </a:spcAft>
+              <a:defRPr sz="1800">
                 <a:solidFill>
                   <a:srgbClr val="333333"/>
                 </a:solidFill>
               </a:defRPr>
-              <a:buNone/>
-            </a:pPr>
-            <a:r>
-              <a:t>•  If Libertarian SFT shows minimal EconCausal regression: the hedging bias is DM-specific</a:t>
-            </a:r>
-          </a:p>
+            </a:pPr>
+            <a:r>
+              <a:t>July: Evaluate Liberal and Libertarian SFT models. Test whether hedging is DM-specific.</a:t>
+            </a:r>
+          </a:p>
+        </p:txBody>
+      </p:sp>
+      <p:sp>
+        <p:nvSpPr>
+          <p:cNvPr id="7" name="TextBox 6"/>
+          <p:cNvSpPr txBox="1"/>
+          <p:nvPr/>
+        </p:nvSpPr>
+        <p:spPr>
+          <a:xfrm>
+            <a:off x="457200" y="5852159"/>
+            <a:ext cx="11247120" cy="1005840"/>
+          </a:xfrm>
+          <a:prstGeom prst="rect">
+            <a:avLst/>
+          </a:prstGeom>
+          <a:solidFill>
+            <a:srgbClr val="F5F5F5"/>
+          </a:solidFill>
+        </p:spPr>
+        <p:txBody>
+          <a:bodyPr wrap="square" lIns="182880" rIns="182880" tIns="91440" bIns="91440">
+            <a:spAutoFit/>
+          </a:bodyPr>
+          <a:lstStyle/>
           <a:p>
             <a:pPr>
               <a:spcAft>
-                <a:spcPts val="600"/>
+                <a:spcPts val="400"/>
               </a:spcAft>
-              <a:defRPr sz="2200">
+              <a:defRPr sz="2000" b="1">
+                <a:solidFill>
+                  <a:srgbClr val="666666"/>
+                </a:solidFill>
+              </a:defRPr>
+            </a:pPr>
+            <a:r>
+              <a:t>Future Work: Final Analysis  --  Ongoing Research</a:t>
+            </a:r>
+          </a:p>
+          <a:p>
+            <a:pPr>
+              <a:spcAft>
+                <a:spcPts val="400"/>
+              </a:spcAft>
+              <a:defRPr sz="1800">
                 <a:solidFill>
                   <a:srgbClr val="333333"/>
                 </a:solidFill>
               </a:defRPr>
-              <a:buNone/>
-            </a:pPr>
-            <a:r>
-              <a:t>•  If Liberal SFT also regresses significantly: the regression is a general SFT effect</a:t>
-            </a:r>
-          </a:p>
-          <a:p>
-            <a:pPr>
-              <a:spcAft>
-                <a:spcPts val="600"/>
-              </a:spcAft>
-              <a:defRPr sz="2200">
-                <a:solidFill>
-                  <a:srgbClr val="333333"/>
-                </a:solidFill>
-              </a:defRPr>
-              <a:buNone/>
-            </a:pPr>
-            <a:r>
-              <a:t>•  If both regress identically to DM: regression is a function of training volume, not ideology</a:t>
+            </a:pPr>
+            <a:r>
+              <a:t>July to August: Consolidate GRPO and multi-ideology results, statistical testing, extended paper.</a:t>
             </a:r>
           </a:p>
         </p:txBody>
@@ -7907,7 +6520,7 @@
         <p:spPr>
           <a:xfrm>
             <a:off x="0" y="0"/>
-            <a:ext cx="12191695" cy="1051560"/>
+            <a:ext cx="12191695" cy="914400"/>
           </a:xfrm>
           <a:prstGeom prst="rect">
             <a:avLst/>
@@ -7930,7 +6543,7 @@
               </a:defRPr>
             </a:pPr>
             <a:r>
-              <a:t>Current Challenges and Mitigations</a:t>
+              <a:t>Summary</a:t>
             </a:r>
           </a:p>
         </p:txBody>
@@ -7943,7 +6556,7 @@
         </p:nvSpPr>
         <p:spPr>
           <a:xfrm>
-            <a:off x="731520" y="1143000"/>
+            <a:off x="731520" y="1097280"/>
             <a:ext cx="10698480" cy="320040"/>
           </a:xfrm>
           <a:prstGeom prst="rect">
@@ -7958,14 +6571,14 @@
           <a:lstStyle/>
           <a:p>
             <a:pPr algn="l">
-              <a:defRPr sz="2200" b="1">
-                <a:solidFill>
-                  <a:srgbClr val="C62828"/>
-                </a:solidFill>
-              </a:defRPr>
-            </a:pPr>
-            <a:r>
-              <a:t>Gradient Quantization</a:t>
+              <a:defRPr sz="2000" b="1">
+                <a:solidFill>
+                  <a:srgbClr val="7B2D8E"/>
+                </a:solidFill>
+              </a:defRPr>
+            </a:pPr>
+            <a:r>
+              <a:t>Motivation</a:t>
             </a:r>
           </a:p>
         </p:txBody>
@@ -7978,8 +6591,8 @@
         </p:nvSpPr>
         <p:spPr>
           <a:xfrm>
-            <a:off x="731520" y="1508760"/>
-            <a:ext cx="10698480" cy="1048664"/>
+            <a:off x="731520" y="1463040"/>
+            <a:ext cx="10698480" cy="457200"/>
           </a:xfrm>
           <a:prstGeom prst="rect">
             <a:avLst/>
@@ -7987,40 +6600,20 @@
           <a:noFill/>
         </p:spPr>
         <p:txBody>
-          <a:bodyPr wrap="square" lIns="457200">
+          <a:bodyPr wrap="square" lIns="137160" rIns="137160">
             <a:spAutoFit/>
           </a:bodyPr>
           <a:lstStyle/>
           <a:p>
-            <a:pPr>
-              <a:spcAft>
-                <a:spcPts val="600"/>
-              </a:spcAft>
-              <a:defRPr sz="2100">
+            <a:pPr algn="l">
+              <a:defRPr sz="1800" b="0">
                 <a:solidFill>
                   <a:srgbClr val="333333"/>
                 </a:solidFill>
               </a:defRPr>
-              <a:buNone/>
-            </a:pPr>
-            <a:r>
-              <a:t>•  Binary rewards at G=8 give too few distinct advantage values per step</a:t>
-            </a:r>
-          </a:p>
-          <a:p>
-            <a:pPr>
-              <a:spcAft>
-                <a:spcPts val="600"/>
-              </a:spcAft>
-              <a:defRPr sz="2100">
-                <a:solidFill>
-                  <a:srgbClr val="333333"/>
-                </a:solidFill>
-              </a:defRPr>
-              <a:buNone/>
-            </a:pPr>
-            <a:r>
-              <a:t>•  Fixed: three-tier rewards expand range from 2 to 20+ distinct values</a:t>
+            </a:pPr>
+            <a:r>
+              <a:t>Five models converge on carbon pricing for climate policy, despite evidence of insufficient price levels, net negative fiscal signals, and missing complementary policies.</a:t>
             </a:r>
           </a:p>
         </p:txBody>
@@ -8033,8 +6626,8 @@
         </p:nvSpPr>
         <p:spPr>
           <a:xfrm>
-            <a:off x="731520" y="2877464"/>
-            <a:ext cx="10698480" cy="320040"/>
+            <a:off x="731520" y="1965960"/>
+            <a:ext cx="10698480" cy="457200"/>
           </a:xfrm>
           <a:prstGeom prst="rect">
             <a:avLst/>
@@ -8048,14 +6641,14 @@
           <a:lstStyle/>
           <a:p>
             <a:pPr algn="l">
-              <a:defRPr sz="2200" b="1">
-                <a:solidFill>
-                  <a:srgbClr val="C62828"/>
-                </a:solidFill>
-              </a:defRPr>
-            </a:pPr>
-            <a:r>
-              <a:t>Planning Overfitting (v4)</a:t>
+              <a:defRPr sz="1800" b="0">
+                <a:solidFill>
+                  <a:srgbClr val="333333"/>
+                </a:solidFill>
+              </a:defRPr>
+            </a:pPr>
+            <a:r>
+              <a:t>Explicit fossil fuel subsidies at 725 billion dollars exceed carbon pricing revenue at 107 billion by a factor of 6.8.</a:t>
             </a:r>
           </a:p>
         </p:txBody>
@@ -8068,8 +6661,8 @@
         </p:nvSpPr>
         <p:spPr>
           <a:xfrm>
-            <a:off x="731520" y="3243224"/>
-            <a:ext cx="10698480" cy="1048664"/>
+            <a:off x="731520" y="2468880"/>
+            <a:ext cx="10698480" cy="457200"/>
           </a:xfrm>
           <a:prstGeom prst="rect">
             <a:avLst/>
@@ -8077,40 +6670,20 @@
           <a:noFill/>
         </p:spPr>
         <p:txBody>
-          <a:bodyPr wrap="square" lIns="457200">
+          <a:bodyPr wrap="square" lIns="137160" rIns="137160">
             <a:spAutoFit/>
           </a:bodyPr>
           <a:lstStyle/>
           <a:p>
-            <a:pPr>
-              <a:spcAft>
-                <a:spcPts val="600"/>
-              </a:spcAft>
-              <a:defRPr sz="2100">
+            <a:pPr algn="l">
+              <a:defRPr sz="1800" b="0">
                 <a:solidFill>
                   <a:srgbClr val="333333"/>
                 </a:solidFill>
               </a:defRPr>
-              <a:buNone/>
-            </a:pPr>
-            <a:r>
-              <a:t>•  Model fills 850-1024 tokens with planning, never produces answer</a:t>
-            </a:r>
-          </a:p>
-          <a:p>
-            <a:pPr>
-              <a:spcAft>
-                <a:spcPts val="600"/>
-              </a:spcAft>
-              <a:defRPr sz="2100">
-                <a:solidFill>
-                  <a:srgbClr val="333333"/>
-                </a:solidFill>
-              </a:defRPr>
-              <a:buNone/>
-            </a:pPr>
-            <a:r>
-              <a:t>•  Fixed: conciseness penalty, format penalty increased to -0.25 per missing tag</a:t>
+            </a:pPr>
+            <a:r>
+              <a:t>Only after SFT on DM-aligned data does the model identify these gaps.</a:t>
             </a:r>
           </a:p>
         </p:txBody>
@@ -8123,7 +6696,7 @@
         </p:nvSpPr>
         <p:spPr>
           <a:xfrm>
-            <a:off x="731520" y="4611928"/>
+            <a:off x="731520" y="3108960"/>
             <a:ext cx="10698480" cy="320040"/>
           </a:xfrm>
           <a:prstGeom prst="rect">
@@ -8138,14 +6711,14 @@
           <a:lstStyle/>
           <a:p>
             <a:pPr algn="l">
-              <a:defRPr sz="2200" b="1">
-                <a:solidFill>
-                  <a:srgbClr val="C62828"/>
-                </a:solidFill>
-              </a:defRPr>
-            </a:pPr>
-            <a:r>
-              <a:t>Loss Convergence</a:t>
+              <a:defRPr sz="2000" b="1">
+                <a:solidFill>
+                  <a:srgbClr val="7B2D8E"/>
+                </a:solidFill>
+              </a:defRPr>
+            </a:pPr>
+            <a:r>
+              <a:t>Method</a:t>
             </a:r>
           </a:p>
         </p:txBody>
@@ -8158,8 +6731,8 @@
         </p:nvSpPr>
         <p:spPr>
           <a:xfrm>
-            <a:off x="731520" y="4977688"/>
-            <a:ext cx="10698480" cy="1048664"/>
+            <a:off x="731520" y="3474720"/>
+            <a:ext cx="10698480" cy="457200"/>
           </a:xfrm>
           <a:prstGeom prst="rect">
             <a:avLst/>
@@ -8167,40 +6740,20 @@
           <a:noFill/>
         </p:spPr>
         <p:txBody>
-          <a:bodyPr wrap="square" lIns="457200">
+          <a:bodyPr wrap="square" lIns="137160" rIns="137160">
             <a:spAutoFit/>
           </a:bodyPr>
           <a:lstStyle/>
           <a:p>
-            <a:pPr>
-              <a:spcAft>
-                <a:spcPts val="600"/>
-              </a:spcAft>
-              <a:defRPr sz="2100">
+            <a:pPr algn="l">
+              <a:defRPr sz="1800" b="0">
                 <a:solidFill>
                   <a:srgbClr val="333333"/>
                 </a:solidFill>
               </a:defRPr>
-              <a:buNone/>
-            </a:pPr>
-            <a:r>
-              <a:t>•  Neither v3 nor v4 shows downward loss trend; both oscillate near zero</a:t>
-            </a:r>
-          </a:p>
-          <a:p>
-            <a:pPr>
-              <a:spcAft>
-                <a:spcPts val="600"/>
-              </a:spcAft>
-              <a:defRPr sz="2100">
-                <a:solidFill>
-                  <a:srgbClr val="333333"/>
-                </a:solidFill>
-              </a:defRPr>
-              <a:buNone/>
-            </a:pPr>
-            <a:r>
-              <a:t>•  Expected for GRPO at equilibrium; monitoring reward trajectory instead</a:t>
+            </a:pPr>
+            <a:r>
+              <a:t>Fine-tuned Qwen3.5-9B via QLoRA on 1,500 DM question-answer pairs. Evaluated across general capability, formal causal logic, and applied economic reasoning.</a:t>
             </a:r>
           </a:p>
         </p:txBody>
@@ -8213,7 +6766,7 @@
         </p:nvSpPr>
         <p:spPr>
           <a:xfrm>
-            <a:off x="731520" y="6346393"/>
+            <a:off x="731520" y="4114800"/>
             <a:ext cx="10698480" cy="320040"/>
           </a:xfrm>
           <a:prstGeom prst="rect">
@@ -8228,14 +6781,14 @@
           <a:lstStyle/>
           <a:p>
             <a:pPr algn="l">
-              <a:defRPr sz="2200" b="1">
-                <a:solidFill>
-                  <a:srgbClr val="C62828"/>
-                </a:solidFill>
-              </a:defRPr>
-            </a:pPr>
-            <a:r>
-              <a:t>Process-Outcome Decoupling (v4)</a:t>
+              <a:defRPr sz="2000" b="1">
+                <a:solidFill>
+                  <a:srgbClr val="7B2D8E"/>
+                </a:solidFill>
+              </a:defRPr>
+            </a:pPr>
+            <a:r>
+              <a:t>Results</a:t>
             </a:r>
           </a:p>
         </p:txBody>
@@ -8248,8 +6801,8 @@
         </p:nvSpPr>
         <p:spPr>
           <a:xfrm>
-            <a:off x="731520" y="6712153"/>
-            <a:ext cx="10698480" cy="1048664"/>
+            <a:off x="731520" y="4480560"/>
+            <a:ext cx="10698480" cy="457200"/>
           </a:xfrm>
           <a:prstGeom prst="rect">
             <a:avLst/>
@@ -8257,40 +6810,90 @@
           <a:noFill/>
         </p:spPr>
         <p:txBody>
-          <a:bodyPr wrap="square" lIns="457200">
+          <a:bodyPr wrap="square" lIns="137160" rIns="137160">
             <a:spAutoFit/>
           </a:bodyPr>
           <a:lstStyle/>
           <a:p>
-            <a:pPr>
-              <a:spcAft>
-                <a:spcPts val="600"/>
-              </a:spcAft>
-              <a:defRPr sz="2100">
+            <a:pPr algn="l">
+              <a:defRPr sz="1800" b="0">
                 <a:solidFill>
                   <a:srgbClr val="333333"/>
                 </a:solidFill>
               </a:defRPr>
-              <a:buNone/>
-            </a:pPr>
-            <a:r>
-              <a:t>•  Process reward stable at 0.55 but not correlated with outcome improvement</a:t>
-            </a:r>
-          </a:p>
-          <a:p>
-            <a:pPr>
-              <a:spcAft>
-                <a:spcPts val="600"/>
-              </a:spcAft>
-              <a:defRPr sz="2100">
+            </a:pPr>
+            <a:r>
+              <a:t>General capability preserved. Formal causal reasoning improved by 38 points. Applied economic reasoning regressed by 12 points through emergent hedging bias.</a:t>
+            </a:r>
+          </a:p>
+        </p:txBody>
+      </p:sp>
+      <p:sp>
+        <p:nvSpPr>
+          <p:cNvPr id="11" name="TextBox 10"/>
+          <p:cNvSpPr txBox="1"/>
+          <p:nvPr/>
+        </p:nvSpPr>
+        <p:spPr>
+          <a:xfrm>
+            <a:off x="731520" y="5120640"/>
+            <a:ext cx="10698480" cy="320040"/>
+          </a:xfrm>
+          <a:prstGeom prst="rect">
+            <a:avLst/>
+          </a:prstGeom>
+          <a:noFill/>
+        </p:spPr>
+        <p:txBody>
+          <a:bodyPr wrap="square" lIns="137160" rIns="137160">
+            <a:spAutoFit/>
+          </a:bodyPr>
+          <a:lstStyle/>
+          <a:p>
+            <a:pPr algn="l">
+              <a:defRPr sz="2000" b="1">
+                <a:solidFill>
+                  <a:srgbClr val="7B2D8E"/>
+                </a:solidFill>
+              </a:defRPr>
+            </a:pPr>
+            <a:r>
+              <a:t>Next Phase</a:t>
+            </a:r>
+          </a:p>
+        </p:txBody>
+      </p:sp>
+      <p:sp>
+        <p:nvSpPr>
+          <p:cNvPr id="12" name="TextBox 11"/>
+          <p:cNvSpPr txBox="1"/>
+          <p:nvPr/>
+        </p:nvSpPr>
+        <p:spPr>
+          <a:xfrm>
+            <a:off x="731520" y="5486400"/>
+            <a:ext cx="10698480" cy="457200"/>
+          </a:xfrm>
+          <a:prstGeom prst="rect">
+            <a:avLst/>
+          </a:prstGeom>
+          <a:noFill/>
+        </p:spPr>
+        <p:txBody>
+          <a:bodyPr wrap="square" lIns="137160" rIns="137160">
+            <a:spAutoFit/>
+          </a:bodyPr>
+          <a:lstStyle/>
+          <a:p>
+            <a:pPr algn="l">
+              <a:defRPr sz="1800" b="0">
                 <a:solidFill>
                   <a:srgbClr val="333333"/>
                 </a:solidFill>
               </a:defRPr>
-              <a:buNone/>
-            </a:pPr>
-            <a:r>
-              <a:t>•  Model earns process credit without accuracy gains; monitoring through step 1,500</a:t>
+            </a:pPr>
+            <a:r>
+              <a:t>GRPO training to reverse the hedging regression: outcome-only rewards (v3) versus dual advantage with process rewards (v4).</a:t>
             </a:r>
           </a:p>
         </p:txBody>

--- a/docs/proposals/peer_review_progress_slides.pptx
+++ b/docs/proposals/peer_review_progress_slides.pptx
@@ -4331,7 +4331,7 @@
         <p:spPr>
           <a:xfrm>
             <a:off x="731520" y="1554480"/>
-            <a:ext cx="10698480" cy="2560320"/>
+            <a:ext cx="10698480" cy="2926080"/>
           </a:xfrm>
           <a:prstGeom prst="rect">
             <a:avLst/>
@@ -4341,82 +4341,151 @@
           </a:solidFill>
         </p:spPr>
         <p:txBody>
-          <a:bodyPr wrap="square" lIns="182880" rIns="182880" tIns="91440" bIns="91440">
+          <a:bodyPr wrap="square" lIns="274320" rIns="182880" tIns="91440" bIns="91440">
             <a:spAutoFit/>
           </a:bodyPr>
           <a:lstStyle/>
           <a:p>
             <a:pPr>
-              <a:spcAft>
-                <a:spcPts val="400"/>
-              </a:spcAft>
-              <a:defRPr sz="2000">
-                <a:solidFill>
-                  <a:srgbClr val="333333"/>
-                </a:solidFill>
-              </a:defRPr>
-            </a:pPr>
-            <a:r>
-              <a:t>When asked "how to stop climate change", all five frontier AI models recommend carbon pricing.</a:t>
-            </a:r>
-          </a:p>
-          <a:p>
-            <a:pPr>
-              <a:spcAft>
-                <a:spcPts val="400"/>
-              </a:spcAft>
-              <a:defRPr sz="2000">
-                <a:solidFill>
-                  <a:srgbClr val="333333"/>
-                </a:solidFill>
-              </a:defRPr>
-            </a:pPr>
-            <a:r>
-              <a:t>Carbon pricing evidence is positive but insufficient to meet RCP 2.6 targets.</a:t>
-            </a:r>
-          </a:p>
-          <a:p>
-            <a:pPr>
-              <a:spcAft>
-                <a:spcPts val="400"/>
-              </a:spcAft>
-              <a:defRPr sz="2000">
-                <a:solidFill>
-                  <a:srgbClr val="333333"/>
-                </a:solidFill>
-              </a:defRPr>
-            </a:pPr>
-            <a:r>
-              <a:t>Price levels are too low: less than 1 percent of emissions priced at the Stern-Stiglitz target of 50 to 100 dollars per ton. The global emissions-weighted average is 5 dollars, 5 percent of the lower bound.</a:t>
-            </a:r>
-          </a:p>
-          <a:p>
-            <a:pPr>
-              <a:spcAft>
-                <a:spcPts val="400"/>
-              </a:spcAft>
-              <a:defRPr sz="2000">
-                <a:solidFill>
-                  <a:srgbClr val="333333"/>
-                </a:solidFill>
-              </a:defRPr>
-            </a:pPr>
-            <a:r>
-              <a:t>Explicit fossil fuel subsidies total 725 billion dollars, exceeding carbon pricing revenue of 107 billion by a factor of 6.8. The net fiscal signal on carbon is negative.</a:t>
-            </a:r>
-          </a:p>
-          <a:p>
-            <a:pPr>
-              <a:spcAft>
-                <a:spcPts val="400"/>
-              </a:spcAft>
-              <a:defRPr sz="2000">
-                <a:solidFill>
-                  <a:srgbClr val="333333"/>
-                </a:solidFill>
-              </a:defRPr>
-            </a:pPr>
-            <a:r>
+              <a:indent size="9144" hang="4572"/>
+              <a:spcAft>
+                <a:spcPts val="500"/>
+              </a:spcAft>
+            </a:pPr>
+            <a:r>
+              <a:rPr sz="1600">
+                <a:solidFill>
+                  <a:srgbClr val="333333"/>
+                </a:solidFill>
+              </a:rPr>
+              <a:t>◦  </a:t>
+            </a:r>
+            <a:r>
+              <a:rPr sz="2000">
+                <a:solidFill>
+                  <a:srgbClr val="333333"/>
+                </a:solidFill>
+              </a:rPr>
+              <a:t>All five frontier AI models recommend carbon pricing for climate policy.</a:t>
+            </a:r>
+          </a:p>
+          <a:p>
+            <a:pPr>
+              <a:indent size="9144" hang="4572"/>
+              <a:spcAft>
+                <a:spcPts val="500"/>
+              </a:spcAft>
+            </a:pPr>
+            <a:r>
+              <a:rPr sz="1600">
+                <a:solidFill>
+                  <a:srgbClr val="333333"/>
+                </a:solidFill>
+              </a:rPr>
+              <a:t>◦  </a:t>
+            </a:r>
+            <a:r>
+              <a:rPr sz="2000">
+                <a:solidFill>
+                  <a:srgbClr val="333333"/>
+                </a:solidFill>
+              </a:rPr>
+              <a:t>Evidence is positive but insufficient for the RCP 2.6 warming pathway (below 2°C).</a:t>
+            </a:r>
+          </a:p>
+          <a:p>
+            <a:pPr>
+              <a:indent size="9144" hang="4572"/>
+              <a:spcAft>
+                <a:spcPts val="500"/>
+              </a:spcAft>
+            </a:pPr>
+            <a:r>
+              <a:rPr sz="1600">
+                <a:solidFill>
+                  <a:srgbClr val="333333"/>
+                </a:solidFill>
+              </a:rPr>
+              <a:t>◦  </a:t>
+            </a:r>
+            <a:r>
+              <a:rPr sz="2000">
+                <a:solidFill>
+                  <a:srgbClr val="333333"/>
+                </a:solidFill>
+              </a:rPr>
+              <a:t>Stern-Stiglitz target is $50–100/ton. Global average is $5.</a:t>
+            </a:r>
+          </a:p>
+          <a:p>
+            <a:pPr>
+              <a:indent size="9144" hang="4572"/>
+              <a:spcAft>
+                <a:spcPts val="500"/>
+              </a:spcAft>
+            </a:pPr>
+            <a:r>
+              <a:rPr sz="1600">
+                <a:solidFill>
+                  <a:srgbClr val="333333"/>
+                </a:solidFill>
+              </a:rPr>
+              <a:t>◦  </a:t>
+            </a:r>
+            <a:r>
+              <a:rPr sz="2000">
+                <a:solidFill>
+                  <a:srgbClr val="333333"/>
+                </a:solidFill>
+              </a:rPr>
+              <a:t>Less than 1% of emissions are priced at or above the target.</a:t>
+            </a:r>
+          </a:p>
+          <a:p>
+            <a:pPr>
+              <a:indent size="9144" hang="4572"/>
+              <a:spcAft>
+                <a:spcPts val="500"/>
+              </a:spcAft>
+            </a:pPr>
+            <a:r>
+              <a:rPr sz="1600">
+                <a:solidFill>
+                  <a:srgbClr val="333333"/>
+                </a:solidFill>
+              </a:rPr>
+              <a:t>◦  </a:t>
+            </a:r>
+            <a:r>
+              <a:rPr sz="2000">
+                <a:solidFill>
+                  <a:srgbClr val="333333"/>
+                </a:solidFill>
+              </a:rPr>
+              <a:t>Fossil fuel subsidies at $725B exceed carbon revenue of $107B by 6.8x.</a:t>
+            </a:r>
+          </a:p>
+          <a:p>
+            <a:pPr>
+              <a:indent size="9144" hang="4572"/>
+              <a:spcAft>
+                <a:spcPts val="500"/>
+              </a:spcAft>
+            </a:pPr>
+            <a:r>
+              <a:rPr sz="1600">
+                <a:solidFill>
+                  <a:srgbClr val="333333"/>
+                </a:solidFill>
+              </a:rPr>
+              <a:t>◦  </a:t>
+            </a:r>
+            <a:r>
+              <a:rPr sz="2000">
+                <a:solidFill>
+                  <a:srgbClr val="333333"/>
+                </a:solidFill>
+              </a:rPr>
               <a:t>None of the five models flag any of these issues.</a:t>
             </a:r>
           </a:p>
@@ -4430,7 +4499,7 @@
         </p:nvSpPr>
         <p:spPr>
           <a:xfrm>
-            <a:off x="731520" y="4480560"/>
+            <a:off x="731520" y="4754880"/>
             <a:ext cx="10698480" cy="365760"/>
           </a:xfrm>
           <a:prstGeom prst="rect">
@@ -4465,8 +4534,8 @@
         </p:nvSpPr>
         <p:spPr>
           <a:xfrm>
-            <a:off x="731520" y="4937760"/>
-            <a:ext cx="10698480" cy="1828800"/>
+            <a:off x="731520" y="5212080"/>
+            <a:ext cx="10698480" cy="1463040"/>
           </a:xfrm>
           <a:prstGeom prst="rect">
             <a:avLst/>
@@ -4476,38 +4545,56 @@
           </a:solidFill>
         </p:spPr>
         <p:txBody>
-          <a:bodyPr wrap="square" lIns="182880" rIns="182880" tIns="91440" bIns="91440">
+          <a:bodyPr wrap="square" lIns="274320" rIns="182880" tIns="91440" bIns="91440">
             <a:spAutoFit/>
           </a:bodyPr>
           <a:lstStyle/>
           <a:p>
             <a:pPr>
-              <a:spcAft>
-                <a:spcPts val="400"/>
-              </a:spcAft>
-              <a:defRPr sz="2000">
-                <a:solidFill>
-                  <a:srgbClr val="333333"/>
-                </a:solidFill>
-              </a:defRPr>
-            </a:pPr>
-            <a:r>
-              <a:t>Can supervised fine-tuning on a non-dominant analytical framework shift model reasoning in domains outside the training data?</a:t>
-            </a:r>
-          </a:p>
-          <a:p>
-            <a:pPr>
-              <a:spcAft>
-                <a:spcPts val="400"/>
-              </a:spcAft>
-              <a:defRPr sz="2000">
-                <a:solidFill>
-                  <a:srgbClr val="333333"/>
-                </a:solidFill>
-              </a:defRPr>
-            </a:pPr>
-            <a:r>
-              <a:t>What collateral effects does this produce on capabilities the training data never touched?</a:t>
+              <a:indent size="9144" hang="4572"/>
+              <a:spcAft>
+                <a:spcPts val="500"/>
+              </a:spcAft>
+            </a:pPr>
+            <a:r>
+              <a:rPr sz="1600">
+                <a:solidFill>
+                  <a:srgbClr val="333333"/>
+                </a:solidFill>
+              </a:rPr>
+              <a:t>◦  </a:t>
+            </a:r>
+            <a:r>
+              <a:rPr sz="2000">
+                <a:solidFill>
+                  <a:srgbClr val="333333"/>
+                </a:solidFill>
+              </a:rPr>
+              <a:t>Can SFT on a non-dominant framework shift reasoning outside the training domain?</a:t>
+            </a:r>
+          </a:p>
+          <a:p>
+            <a:pPr>
+              <a:indent size="9144" hang="4572"/>
+              <a:spcAft>
+                <a:spcPts val="500"/>
+              </a:spcAft>
+            </a:pPr>
+            <a:r>
+              <a:rPr sz="1600">
+                <a:solidFill>
+                  <a:srgbClr val="333333"/>
+                </a:solidFill>
+              </a:rPr>
+              <a:t>◦  </a:t>
+            </a:r>
+            <a:r>
+              <a:rPr sz="2000">
+                <a:solidFill>
+                  <a:srgbClr val="333333"/>
+                </a:solidFill>
+              </a:rPr>
+              <a:t>What collateral effects appear on capabilities the training data never touched?</a:t>
             </a:r>
           </a:p>
         </p:txBody>
@@ -4594,16 +4681,16 @@
           </a:solidFill>
         </p:spPr>
         <p:txBody>
-          <a:bodyPr wrap="square" lIns="182880" rIns="182880" tIns="91440" bIns="91440">
+          <a:bodyPr wrap="square" lIns="274320" rIns="182880" tIns="91440" bIns="91440">
             <a:spAutoFit/>
           </a:bodyPr>
           <a:lstStyle/>
           <a:p>
             <a:pPr>
               <a:spcAft>
-                <a:spcPts val="400"/>
-              </a:spcAft>
-              <a:defRPr sz="2000">
+                <a:spcPts val="600"/>
+              </a:spcAft>
+              <a:defRPr sz="2200" b="1">
                 <a:solidFill>
                   <a:srgbClr val="333333"/>
                 </a:solidFill>
@@ -4615,46 +4702,73 @@
           </a:p>
           <a:p>
             <a:pPr>
-              <a:spcAft>
-                <a:spcPts val="400"/>
-              </a:spcAft>
-              <a:defRPr sz="2000">
-                <a:solidFill>
-                  <a:srgbClr val="333333"/>
-                </a:solidFill>
-              </a:defRPr>
-            </a:pPr>
-            <a:r>
+              <a:indent size="9144" hang="4572"/>
+              <a:spcAft>
+                <a:spcPts val="500"/>
+              </a:spcAft>
+            </a:pPr>
+            <a:r>
+              <a:rPr sz="1400">
+                <a:solidFill>
+                  <a:srgbClr val="333333"/>
+                </a:solidFill>
+              </a:rPr>
+              <a:t>◦  </a:t>
+            </a:r>
+            <a:r>
+              <a:rPr sz="1800">
+                <a:solidFill>
+                  <a:srgbClr val="333333"/>
+                </a:solidFill>
+              </a:rPr>
               <a:t>A Marxist framework for analyzing social phenomena.</a:t>
             </a:r>
           </a:p>
           <a:p>
             <a:pPr>
-              <a:spcAft>
-                <a:spcPts val="400"/>
-              </a:spcAft>
-              <a:defRPr sz="2000">
-                <a:solidFill>
-                  <a:srgbClr val="333333"/>
-                </a:solidFill>
-              </a:defRPr>
-            </a:pPr>
-            <a:r>
+              <a:indent size="9144" hang="4572"/>
+              <a:spcAft>
+                <a:spcPts val="500"/>
+              </a:spcAft>
+            </a:pPr>
+            <a:r>
+              <a:rPr sz="1400">
+                <a:solidFill>
+                  <a:srgbClr val="333333"/>
+                </a:solidFill>
+              </a:rPr>
+              <a:t>◦  </a:t>
+            </a:r>
+            <a:r>
+              <a:rPr sz="1800">
+                <a:solidFill>
+                  <a:srgbClr val="333333"/>
+                </a:solidFill>
+              </a:rPr>
               <a:t>Explains outcomes through material conditions, class relations, and historical context.</a:t>
             </a:r>
           </a:p>
           <a:p>
             <a:pPr>
-              <a:spcAft>
-                <a:spcPts val="400"/>
-              </a:spcAft>
-              <a:defRPr sz="2000">
-                <a:solidFill>
-                  <a:srgbClr val="333333"/>
-                </a:solidFill>
-              </a:defRPr>
-            </a:pPr>
-            <a:r>
+              <a:indent size="9144" hang="4572"/>
+              <a:spcAft>
+                <a:spcPts val="500"/>
+              </a:spcAft>
+            </a:pPr>
+            <a:r>
+              <a:rPr sz="1400">
+                <a:solidFill>
+                  <a:srgbClr val="333333"/>
+                </a:solidFill>
+              </a:rPr>
+              <a:t>◦  </a:t>
+            </a:r>
+            <a:r>
+              <a:rPr sz="1800">
+                <a:solidFill>
+                  <a:srgbClr val="333333"/>
+                </a:solidFill>
+              </a:rPr>
               <a:t>Produces structural skepticism toward market-based solutions.</a:t>
             </a:r>
           </a:p>
@@ -4679,16 +4793,16 @@
           </a:solidFill>
         </p:spPr>
         <p:txBody>
-          <a:bodyPr wrap="square" lIns="182880" rIns="182880" tIns="91440" bIns="91440">
+          <a:bodyPr wrap="square" lIns="274320" rIns="182880" tIns="91440" bIns="91440">
             <a:spAutoFit/>
           </a:bodyPr>
           <a:lstStyle/>
           <a:p>
             <a:pPr>
               <a:spcAft>
-                <a:spcPts val="400"/>
-              </a:spcAft>
-              <a:defRPr sz="2000">
+                <a:spcPts val="600"/>
+              </a:spcAft>
+              <a:defRPr sz="2200" b="1">
                 <a:solidFill>
                   <a:srgbClr val="333333"/>
                 </a:solidFill>
@@ -4700,46 +4814,73 @@
           </a:p>
           <a:p>
             <a:pPr>
-              <a:spcAft>
-                <a:spcPts val="400"/>
-              </a:spcAft>
-              <a:defRPr sz="2000">
-                <a:solidFill>
-                  <a:srgbClr val="333333"/>
-                </a:solidFill>
-              </a:defRPr>
-            </a:pPr>
-            <a:r>
+              <a:indent size="9144" hang="4572"/>
+              <a:spcAft>
+                <a:spcPts val="500"/>
+              </a:spcAft>
+            </a:pPr>
+            <a:r>
+              <a:rPr sz="1400">
+                <a:solidFill>
+                  <a:srgbClr val="333333"/>
+                </a:solidFill>
+              </a:rPr>
+              <a:t>◦  </a:t>
+            </a:r>
+            <a:r>
+              <a:rPr sz="1800">
+                <a:solidFill>
+                  <a:srgbClr val="333333"/>
+                </a:solidFill>
+              </a:rPr>
               <a:t>Fine-tuned Qwen3.5-9B via QLoRA on 1,500 DM-aligned question-answer pairs.</a:t>
             </a:r>
           </a:p>
           <a:p>
             <a:pPr>
-              <a:spcAft>
-                <a:spcPts val="400"/>
-              </a:spcAft>
-              <a:defRPr sz="2000">
-                <a:solidFill>
-                  <a:srgbClr val="333333"/>
-                </a:solidFill>
-              </a:defRPr>
-            </a:pPr>
-            <a:r>
+              <a:indent size="9144" hang="4572"/>
+              <a:spcAft>
+                <a:spcPts val="500"/>
+              </a:spcAft>
+            </a:pPr>
+            <a:r>
+              <a:rPr sz="1400">
+                <a:solidFill>
+                  <a:srgbClr val="333333"/>
+                </a:solidFill>
+              </a:rPr>
+              <a:t>◦  </a:t>
+            </a:r>
+            <a:r>
+              <a:rPr sz="1800">
+                <a:solidFill>
+                  <a:srgbClr val="333333"/>
+                </a:solidFill>
+              </a:rPr>
               <a:t>Teacher: Qwen3.5-27B generating answers with DM system prompts.</a:t>
             </a:r>
           </a:p>
           <a:p>
             <a:pPr>
-              <a:spcAft>
-                <a:spcPts val="400"/>
-              </a:spcAft>
-              <a:defRPr sz="2000">
-                <a:solidFill>
-                  <a:srgbClr val="333333"/>
-                </a:solidFill>
-              </a:defRPr>
-            </a:pPr>
-            <a:r>
+              <a:indent size="9144" hang="4572"/>
+              <a:spcAft>
+                <a:spcPts val="500"/>
+              </a:spcAft>
+            </a:pPr>
+            <a:r>
+              <a:rPr sz="1400">
+                <a:solidFill>
+                  <a:srgbClr val="333333"/>
+                </a:solidFill>
+              </a:rPr>
+              <a:t>◦  </a:t>
+            </a:r>
+            <a:r>
+              <a:rPr sz="1800">
+                <a:solidFill>
+                  <a:srgbClr val="333333"/>
+                </a:solidFill>
+              </a:rPr>
               <a:t>Evaluated across general capability, formal causal logic, and applied economic reasoning.</a:t>
             </a:r>
           </a:p>
@@ -4764,7 +4905,7 @@
           </a:solidFill>
         </p:spPr>
         <p:txBody>
-          <a:bodyPr wrap="square" lIns="182880" rIns="182880" tIns="91440" bIns="91440">
+          <a:bodyPr wrap="square" lIns="274320" rIns="182880" tIns="91440" bIns="91440">
             <a:spAutoFit/>
           </a:bodyPr>
           <a:lstStyle/>
@@ -4804,7 +4945,7 @@
           </a:solidFill>
         </p:spPr>
         <p:txBody>
-          <a:bodyPr wrap="square" lIns="182880" rIns="182880" tIns="91440" bIns="91440">
+          <a:bodyPr wrap="square" lIns="274320" rIns="182880" tIns="91440" bIns="91440">
             <a:spAutoFit/>
           </a:bodyPr>
           <a:lstStyle/>
@@ -4907,14 +5048,14 @@
           </a:solidFill>
         </p:spPr>
         <p:txBody>
-          <a:bodyPr wrap="square" lIns="182880" rIns="182880" tIns="91440" bIns="91440">
+          <a:bodyPr wrap="square" lIns="274320" rIns="182880" tIns="91440" bIns="91440">
             <a:spAutoFit/>
           </a:bodyPr>
           <a:lstStyle/>
           <a:p>
             <a:pPr>
               <a:spcAft>
-                <a:spcPts val="400"/>
+                <a:spcPts val="600"/>
               </a:spcAft>
               <a:defRPr sz="2000" b="1">
                 <a:solidFill>
@@ -4929,7 +5070,7 @@
           <a:p>
             <a:pPr>
               <a:spcAft>
-                <a:spcPts val="400"/>
+                <a:spcPts val="600"/>
               </a:spcAft>
               <a:defRPr sz="2000" b="1">
                 <a:solidFill>
@@ -4944,60 +5085,92 @@
           <a:p>
             <a:pPr>
               <a:spcAft>
-                <a:spcPts val="400"/>
-              </a:spcAft>
-              <a:defRPr sz="2000">
+                <a:spcPts val="500"/>
+              </a:spcAft>
+            </a:pPr>
+            <a:r>
+              <a:rPr sz="1600">
                 <a:solidFill>
                   <a:srgbClr val="2E7D32"/>
                 </a:solidFill>
-              </a:defRPr>
-            </a:pPr>
-            <a:r>
+              </a:rPr>
+              <a:t>◦  </a:t>
+            </a:r>
+            <a:r>
+              <a:rPr sz="2000">
+                <a:solidFill>
+                  <a:srgbClr val="2E7D32"/>
+                </a:solidFill>
+              </a:rPr>
               <a:t>MMLU: -0.8pp</a:t>
             </a:r>
           </a:p>
           <a:p>
             <a:pPr>
               <a:spcAft>
-                <a:spcPts val="400"/>
-              </a:spcAft>
-              <a:defRPr sz="2000">
+                <a:spcPts val="500"/>
+              </a:spcAft>
+            </a:pPr>
+            <a:r>
+              <a:rPr sz="1600">
                 <a:solidFill>
                   <a:srgbClr val="2E7D32"/>
                 </a:solidFill>
-              </a:defRPr>
-            </a:pPr>
-            <a:r>
+              </a:rPr>
+              <a:t>◦  </a:t>
+            </a:r>
+            <a:r>
+              <a:rPr sz="2000">
+                <a:solidFill>
+                  <a:srgbClr val="2E7D32"/>
+                </a:solidFill>
+              </a:rPr>
               <a:t>HumanEval: 0.0pp</a:t>
             </a:r>
           </a:p>
           <a:p>
             <a:pPr>
               <a:spcAft>
-                <a:spcPts val="400"/>
-              </a:spcAft>
-              <a:defRPr sz="2000">
+                <a:spcPts val="500"/>
+              </a:spcAft>
+            </a:pPr>
+            <a:r>
+              <a:rPr sz="1600">
                 <a:solidFill>
                   <a:srgbClr val="2E7D32"/>
                 </a:solidFill>
-              </a:defRPr>
-            </a:pPr>
-            <a:r>
+              </a:rPr>
+              <a:t>◦  </a:t>
+            </a:r>
+            <a:r>
+              <a:rPr sz="2000">
+                <a:solidFill>
+                  <a:srgbClr val="2E7D32"/>
+                </a:solidFill>
+              </a:rPr>
               <a:t>GPQA: -1.5pp</a:t>
             </a:r>
           </a:p>
           <a:p>
             <a:pPr>
               <a:spcAft>
-                <a:spcPts val="400"/>
-              </a:spcAft>
-              <a:defRPr sz="2000">
+                <a:spcPts val="500"/>
+              </a:spcAft>
+            </a:pPr>
+            <a:r>
+              <a:rPr sz="1600">
                 <a:solidFill>
                   <a:srgbClr val="2E7D32"/>
                 </a:solidFill>
-              </a:defRPr>
-            </a:pPr>
-            <a:r>
+              </a:rPr>
+              <a:t>◦  </a:t>
+            </a:r>
+            <a:r>
+              <a:rPr sz="2000">
+                <a:solidFill>
+                  <a:srgbClr val="2E7D32"/>
+                </a:solidFill>
+              </a:rPr>
               <a:t>No catastrophic forgetting</a:t>
             </a:r>
           </a:p>
@@ -5022,14 +5195,14 @@
           </a:solidFill>
         </p:spPr>
         <p:txBody>
-          <a:bodyPr wrap="square" lIns="182880" rIns="182880" tIns="91440" bIns="91440">
+          <a:bodyPr wrap="square" lIns="274320" rIns="182880" tIns="91440" bIns="91440">
             <a:spAutoFit/>
           </a:bodyPr>
           <a:lstStyle/>
           <a:p>
             <a:pPr>
               <a:spcAft>
-                <a:spcPts val="400"/>
+                <a:spcPts val="600"/>
               </a:spcAft>
               <a:defRPr sz="2000" b="1">
                 <a:solidFill>
@@ -5044,7 +5217,7 @@
           <a:p>
             <a:pPr>
               <a:spcAft>
-                <a:spcPts val="400"/>
+                <a:spcPts val="600"/>
               </a:spcAft>
               <a:defRPr sz="2000" b="1">
                 <a:solidFill>
@@ -5059,60 +5232,92 @@
           <a:p>
             <a:pPr>
               <a:spcAft>
-                <a:spcPts val="400"/>
-              </a:spcAft>
-              <a:defRPr sz="2000">
+                <a:spcPts val="500"/>
+              </a:spcAft>
+            </a:pPr>
+            <a:r>
+              <a:rPr sz="1600">
                 <a:solidFill>
                   <a:srgbClr val="1565C0"/>
                 </a:solidFill>
-              </a:defRPr>
-            </a:pPr>
-            <a:r>
+              </a:rPr>
+              <a:t>◦  </a:t>
+            </a:r>
+            <a:r>
+              <a:rPr sz="2000">
+                <a:solidFill>
+                  <a:srgbClr val="1565C0"/>
+                </a:solidFill>
+              </a:rPr>
               <a:t>Corr2Cause: 36% to 75%</a:t>
             </a:r>
           </a:p>
           <a:p>
             <a:pPr>
               <a:spcAft>
-                <a:spcPts val="400"/>
-              </a:spcAft>
-              <a:defRPr sz="2000">
+                <a:spcPts val="500"/>
+              </a:spcAft>
+            </a:pPr>
+            <a:r>
+              <a:rPr sz="1600">
                 <a:solidFill>
                   <a:srgbClr val="1565C0"/>
                 </a:solidFill>
-              </a:defRPr>
-            </a:pPr>
-            <a:r>
+              </a:rPr>
+              <a:t>◦  </a:t>
+            </a:r>
+            <a:r>
+              <a:rPr sz="2000">
+                <a:solidFill>
+                  <a:srgbClr val="1565C0"/>
+                </a:solidFill>
+              </a:rPr>
               <a:t>520 errors corrected</a:t>
             </a:r>
           </a:p>
           <a:p>
             <a:pPr>
               <a:spcAft>
-                <a:spcPts val="400"/>
-              </a:spcAft>
-              <a:defRPr sz="2000">
+                <a:spcPts val="500"/>
+              </a:spcAft>
+            </a:pPr>
+            <a:r>
+              <a:rPr sz="1600">
                 <a:solidFill>
                   <a:srgbClr val="1565C0"/>
                 </a:solidFill>
-              </a:defRPr>
-            </a:pPr>
-            <a:r>
+              </a:rPr>
+              <a:t>◦  </a:t>
+            </a:r>
+            <a:r>
+              <a:rPr sz="2000">
+                <a:solidFill>
+                  <a:srgbClr val="1565C0"/>
+                </a:solidFill>
+              </a:rPr>
               <a:t>Only 75 new errors</a:t>
             </a:r>
           </a:p>
           <a:p>
             <a:pPr>
               <a:spcAft>
-                <a:spcPts val="400"/>
-              </a:spcAft>
-              <a:defRPr sz="2000">
+                <a:spcPts val="500"/>
+              </a:spcAft>
+            </a:pPr>
+            <a:r>
+              <a:rPr sz="1600">
                 <a:solidFill>
                   <a:srgbClr val="1565C0"/>
                 </a:solidFill>
-              </a:defRPr>
-            </a:pPr>
-            <a:r>
+              </a:rPr>
+              <a:t>◦  </a:t>
+            </a:r>
+            <a:r>
+              <a:rPr sz="2000">
+                <a:solidFill>
+                  <a:srgbClr val="1565C0"/>
+                </a:solidFill>
+              </a:rPr>
               <a:t>+81pp on complex templates</a:t>
             </a:r>
           </a:p>
@@ -5137,14 +5342,14 @@
           </a:solidFill>
         </p:spPr>
         <p:txBody>
-          <a:bodyPr wrap="square" lIns="182880" rIns="182880" tIns="91440" bIns="91440">
+          <a:bodyPr wrap="square" lIns="274320" rIns="182880" tIns="91440" bIns="91440">
             <a:spAutoFit/>
           </a:bodyPr>
           <a:lstStyle/>
           <a:p>
             <a:pPr>
               <a:spcAft>
-                <a:spcPts val="400"/>
+                <a:spcPts val="600"/>
               </a:spcAft>
               <a:defRPr sz="2000" b="1">
                 <a:solidFill>
@@ -5159,7 +5364,7 @@
           <a:p>
             <a:pPr>
               <a:spcAft>
-                <a:spcPts val="400"/>
+                <a:spcPts val="600"/>
               </a:spcAft>
               <a:defRPr sz="2000" b="1">
                 <a:solidFill>
@@ -5174,60 +5379,92 @@
           <a:p>
             <a:pPr>
               <a:spcAft>
-                <a:spcPts val="400"/>
-              </a:spcAft>
-              <a:defRPr sz="2000">
+                <a:spcPts val="500"/>
+              </a:spcAft>
+            </a:pPr>
+            <a:r>
+              <a:rPr sz="1600">
                 <a:solidFill>
                   <a:srgbClr val="C62828"/>
                 </a:solidFill>
-              </a:defRPr>
-            </a:pPr>
-            <a:r>
+              </a:rPr>
+              <a:t>◦  </a:t>
+            </a:r>
+            <a:r>
+              <a:rPr sz="2000">
+                <a:solidFill>
+                  <a:srgbClr val="C62828"/>
+                </a:solidFill>
+              </a:rPr>
               <a:t>Task1 Econ: 60% to 48%</a:t>
             </a:r>
           </a:p>
           <a:p>
             <a:pPr>
               <a:spcAft>
-                <a:spcPts val="400"/>
-              </a:spcAft>
-              <a:defRPr sz="2000">
+                <a:spcPts val="500"/>
+              </a:spcAft>
+            </a:pPr>
+            <a:r>
+              <a:rPr sz="1600">
                 <a:solidFill>
                   <a:srgbClr val="C62828"/>
                 </a:solidFill>
-              </a:defRPr>
-            </a:pPr>
-            <a:r>
+              </a:rPr>
+              <a:t>◦  </a:t>
+            </a:r>
+            <a:r>
+              <a:rPr sz="2000">
+                <a:solidFill>
+                  <a:srgbClr val="C62828"/>
+                </a:solidFill>
+              </a:rPr>
               <a:t>Task1 Finance: 57% to 43%</a:t>
             </a:r>
           </a:p>
           <a:p>
             <a:pPr>
               <a:spcAft>
-                <a:spcPts val="400"/>
-              </a:spcAft>
-              <a:defRPr sz="2000">
+                <a:spcPts val="500"/>
+              </a:spcAft>
+            </a:pPr>
+            <a:r>
+              <a:rPr sz="1600">
                 <a:solidFill>
                   <a:srgbClr val="C62828"/>
                 </a:solidFill>
-              </a:defRPr>
-            </a:pPr>
-            <a:r>
+              </a:rPr>
+              <a:t>◦  </a:t>
+            </a:r>
+            <a:r>
+              <a:rPr sz="2000">
+                <a:solidFill>
+                  <a:srgbClr val="C62828"/>
+                </a:solidFill>
+              </a:rPr>
               <a:t>Task3: 22% to 11%</a:t>
             </a:r>
           </a:p>
           <a:p>
             <a:pPr>
               <a:spcAft>
-                <a:spcPts val="400"/>
-              </a:spcAft>
-              <a:defRPr sz="2000">
+                <a:spcPts val="500"/>
+              </a:spcAft>
+            </a:pPr>
+            <a:r>
+              <a:rPr sz="1600">
                 <a:solidFill>
                   <a:srgbClr val="C62828"/>
                 </a:solidFill>
-              </a:defRPr>
-            </a:pPr>
-            <a:r>
+              </a:rPr>
+              <a:t>◦  </a:t>
+            </a:r>
+            <a:r>
+              <a:rPr sz="2000">
+                <a:solidFill>
+                  <a:srgbClr val="C62828"/>
+                </a:solidFill>
+              </a:rPr>
               <a:t>All regressions significant</a:t>
             </a:r>
           </a:p>
@@ -5315,16 +5552,16 @@
           </a:solidFill>
         </p:spPr>
         <p:txBody>
-          <a:bodyPr wrap="square" lIns="182880" rIns="182880" tIns="91440" bIns="91440">
+          <a:bodyPr wrap="square" lIns="274320" rIns="182880" tIns="91440" bIns="91440">
             <a:spAutoFit/>
           </a:bodyPr>
           <a:lstStyle/>
           <a:p>
             <a:pPr>
               <a:spcAft>
-                <a:spcPts val="400"/>
-              </a:spcAft>
-              <a:defRPr sz="2000">
+                <a:spcPts val="600"/>
+              </a:spcAft>
+              <a:defRPr sz="2200" b="1">
                 <a:solidFill>
                   <a:srgbClr val="333333"/>
                 </a:solidFill>
@@ -5336,47 +5573,74 @@
           </a:p>
           <a:p>
             <a:pPr>
-              <a:spcAft>
-                <a:spcPts val="400"/>
-              </a:spcAft>
-              <a:defRPr sz="2000">
-                <a:solidFill>
-                  <a:srgbClr val="333333"/>
-                </a:solidFill>
-              </a:defRPr>
-            </a:pPr>
-            <a:r>
+              <a:indent size="9144" hang="4572"/>
+              <a:spcAft>
+                <a:spcPts val="500"/>
+              </a:spcAft>
+            </a:pPr>
+            <a:r>
+              <a:rPr sz="1400">
+                <a:solidFill>
+                  <a:srgbClr val="333333"/>
+                </a:solidFill>
+              </a:rPr>
+              <a:t>◦  </a:t>
+            </a:r>
+            <a:r>
+              <a:rPr sz="1800">
+                <a:solidFill>
+                  <a:srgbClr val="333333"/>
+                </a:solidFill>
+              </a:rPr>
               <a:t>The model converts correct positive causal predictions to ambiguous mixed answers.</a:t>
             </a:r>
           </a:p>
           <a:p>
             <a:pPr>
-              <a:spcAft>
-                <a:spcPts val="400"/>
-              </a:spcAft>
-              <a:defRPr sz="2000">
-                <a:solidFill>
-                  <a:srgbClr val="333333"/>
-                </a:solidFill>
-              </a:defRPr>
-            </a:pPr>
-            <a:r>
-              <a:t>Task1 Economics: 52.7 percent of regressions are positive to mixed.</a:t>
-            </a:r>
-          </a:p>
-          <a:p>
-            <a:pPr>
-              <a:spcAft>
-                <a:spcPts val="400"/>
-              </a:spcAft>
-              <a:defRPr sz="2000">
-                <a:solidFill>
-                  <a:srgbClr val="333333"/>
-                </a:solidFill>
-              </a:defRPr>
-            </a:pPr>
-            <a:r>
-              <a:t>Task1 Finance: 54.6 percent.</a:t>
+              <a:indent size="9144" hang="4572"/>
+              <a:spcAft>
+                <a:spcPts val="500"/>
+              </a:spcAft>
+            </a:pPr>
+            <a:r>
+              <a:rPr sz="1400">
+                <a:solidFill>
+                  <a:srgbClr val="333333"/>
+                </a:solidFill>
+              </a:rPr>
+              <a:t>◦  </a:t>
+            </a:r>
+            <a:r>
+              <a:rPr sz="1800">
+                <a:solidFill>
+                  <a:srgbClr val="333333"/>
+                </a:solidFill>
+              </a:rPr>
+              <a:t>Task1 Economics: 52.7% of regressions are positive to mixed.</a:t>
+            </a:r>
+          </a:p>
+          <a:p>
+            <a:pPr>
+              <a:indent size="9144" hang="4572"/>
+              <a:spcAft>
+                <a:spcPts val="500"/>
+              </a:spcAft>
+            </a:pPr>
+            <a:r>
+              <a:rPr sz="1400">
+                <a:solidFill>
+                  <a:srgbClr val="333333"/>
+                </a:solidFill>
+              </a:rPr>
+              <a:t>◦  </a:t>
+            </a:r>
+            <a:r>
+              <a:rPr sz="1800">
+                <a:solidFill>
+                  <a:srgbClr val="333333"/>
+                </a:solidFill>
+              </a:rPr>
+              <a:t>Task1 Finance: 54.6%.</a:t>
             </a:r>
           </a:p>
         </p:txBody>
@@ -5400,16 +5664,16 @@
           </a:solidFill>
         </p:spPr>
         <p:txBody>
-          <a:bodyPr wrap="square" lIns="182880" rIns="182880" tIns="91440" bIns="91440">
+          <a:bodyPr wrap="square" lIns="274320" rIns="182880" tIns="91440" bIns="91440">
             <a:spAutoFit/>
           </a:bodyPr>
           <a:lstStyle/>
           <a:p>
             <a:pPr>
               <a:spcAft>
-                <a:spcPts val="400"/>
-              </a:spcAft>
-              <a:defRPr sz="2000">
+                <a:spcPts val="600"/>
+              </a:spcAft>
+              <a:defRPr sz="2200" b="1">
                 <a:solidFill>
                   <a:srgbClr val="333333"/>
                 </a:solidFill>
@@ -5421,46 +5685,73 @@
           </a:p>
           <a:p>
             <a:pPr>
-              <a:spcAft>
-                <a:spcPts val="400"/>
-              </a:spcAft>
-              <a:defRPr sz="2000">
-                <a:solidFill>
-                  <a:srgbClr val="333333"/>
-                </a:solidFill>
-              </a:defRPr>
-            </a:pPr>
-            <a:r>
-              <a:t>The teacher hedges only 4.0 percent of the time. The pattern is not in the data.</a:t>
-            </a:r>
-          </a:p>
-          <a:p>
-            <a:pPr>
-              <a:spcAft>
-                <a:spcPts val="400"/>
-              </a:spcAft>
-              <a:defRPr sz="2000">
-                <a:solidFill>
-                  <a:srgbClr val="333333"/>
-                </a:solidFill>
-              </a:defRPr>
-            </a:pPr>
-            <a:r>
+              <a:indent size="9144" hang="4572"/>
+              <a:spcAft>
+                <a:spcPts val="500"/>
+              </a:spcAft>
+            </a:pPr>
+            <a:r>
+              <a:rPr sz="1400">
+                <a:solidFill>
+                  <a:srgbClr val="333333"/>
+                </a:solidFill>
+              </a:rPr>
+              <a:t>◦  </a:t>
+            </a:r>
+            <a:r>
+              <a:rPr sz="1800">
+                <a:solidFill>
+                  <a:srgbClr val="333333"/>
+                </a:solidFill>
+              </a:rPr>
+              <a:t>The teacher hedges only 4.0% of the time. The pattern is not in the data.</a:t>
+            </a:r>
+          </a:p>
+          <a:p>
+            <a:pPr>
+              <a:indent size="9144" hang="4572"/>
+              <a:spcAft>
+                <a:spcPts val="500"/>
+              </a:spcAft>
+            </a:pPr>
+            <a:r>
+              <a:rPr sz="1400">
+                <a:solidFill>
+                  <a:srgbClr val="333333"/>
+                </a:solidFill>
+              </a:rPr>
+              <a:t>◦  </a:t>
+            </a:r>
+            <a:r>
+              <a:rPr sz="1800">
+                <a:solidFill>
+                  <a:srgbClr val="333333"/>
+                </a:solidFill>
+              </a:rPr>
               <a:t>The model internalized DM structural skepticism: outcomes depend on material conditions.</a:t>
             </a:r>
           </a:p>
           <a:p>
             <a:pPr>
-              <a:spcAft>
-                <a:spcPts val="400"/>
-              </a:spcAft>
-              <a:defRPr sz="2000">
-                <a:solidFill>
-                  <a:srgbClr val="333333"/>
-                </a:solidFill>
-              </a:defRPr>
-            </a:pPr>
-            <a:r>
+              <a:indent size="9144" hang="4572"/>
+              <a:spcAft>
+                <a:spcPts val="500"/>
+              </a:spcAft>
+            </a:pPr>
+            <a:r>
+              <a:rPr sz="1400">
+                <a:solidFill>
+                  <a:srgbClr val="333333"/>
+                </a:solidFill>
+              </a:rPr>
+              <a:t>◦  </a:t>
+            </a:r>
+            <a:r>
+              <a:rPr sz="1800">
+                <a:solidFill>
+                  <a:srgbClr val="333333"/>
+                </a:solidFill>
+              </a:rPr>
               <a:t>It applies this rule universally, even where definitive directional effects exist.</a:t>
             </a:r>
           </a:p>
@@ -5485,7 +5776,7 @@
           </a:solidFill>
         </p:spPr>
         <p:txBody>
-          <a:bodyPr wrap="square" lIns="182880" rIns="182880" tIns="91440" bIns="91440">
+          <a:bodyPr wrap="square" lIns="274320" rIns="182880" tIns="91440" bIns="91440">
             <a:spAutoFit/>
           </a:bodyPr>
           <a:lstStyle/>
@@ -5525,7 +5816,7 @@
           </a:solidFill>
         </p:spPr>
         <p:txBody>
-          <a:bodyPr wrap="square" lIns="182880" rIns="182880" tIns="91440" bIns="91440">
+          <a:bodyPr wrap="square" lIns="274320" rIns="182880" tIns="91440" bIns="91440">
             <a:spAutoFit/>
           </a:bodyPr>
           <a:lstStyle/>
@@ -5663,67 +5954,103 @@
           </a:solidFill>
         </p:spPr>
         <p:txBody>
-          <a:bodyPr wrap="square" lIns="182880" rIns="182880" tIns="91440" bIns="91440">
+          <a:bodyPr wrap="square" lIns="274320" rIns="182880" tIns="91440" bIns="91440">
             <a:spAutoFit/>
           </a:bodyPr>
           <a:lstStyle/>
           <a:p>
             <a:pPr>
-              <a:spcAft>
-                <a:spcPts val="400"/>
-              </a:spcAft>
-              <a:defRPr sz="2000">
-                <a:solidFill>
-                  <a:srgbClr val="333333"/>
-                </a:solidFill>
-              </a:defRPr>
-            </a:pPr>
-            <a:r>
+              <a:indent size="9144" hang="4572"/>
+              <a:spcAft>
+                <a:spcPts val="500"/>
+              </a:spcAft>
+            </a:pPr>
+            <a:r>
+              <a:rPr sz="1600">
+                <a:solidFill>
+                  <a:srgbClr val="333333"/>
+                </a:solidFill>
+              </a:rPr>
+              <a:t>◦  </a:t>
+            </a:r>
+            <a:r>
+              <a:rPr sz="2000">
+                <a:solidFill>
+                  <a:srgbClr val="333333"/>
+                </a:solidFill>
+              </a:rPr>
               <a:t>SFT transfers epistemic stances, not just behavioral patterns.</a:t>
             </a:r>
           </a:p>
           <a:p>
             <a:pPr>
-              <a:spcAft>
-                <a:spcPts val="400"/>
-              </a:spcAft>
-              <a:defRPr sz="2000">
-                <a:solidFill>
-                  <a:srgbClr val="333333"/>
-                </a:solidFill>
-              </a:defRPr>
-            </a:pPr>
-            <a:r>
+              <a:indent size="9144" hang="4572"/>
+              <a:spcAft>
+                <a:spcPts val="500"/>
+              </a:spcAft>
+            </a:pPr>
+            <a:r>
+              <a:rPr sz="1600">
+                <a:solidFill>
+                  <a:srgbClr val="333333"/>
+                </a:solidFill>
+              </a:rPr>
+              <a:t>◦  </a:t>
+            </a:r>
+            <a:r>
+              <a:rPr sz="2000">
+                <a:solidFill>
+                  <a:srgbClr val="333333"/>
+                </a:solidFill>
+              </a:rPr>
               <a:t>The same training that strengthens formal logic breaks applied reasoning.</a:t>
             </a:r>
           </a:p>
           <a:p>
             <a:pPr>
-              <a:spcAft>
-                <a:spcPts val="400"/>
-              </a:spcAft>
-              <a:defRPr sz="2000">
-                <a:solidFill>
-                  <a:srgbClr val="333333"/>
-                </a:solidFill>
-              </a:defRPr>
-            </a:pPr>
-            <a:r>
+              <a:indent size="9144" hang="4572"/>
+              <a:spcAft>
+                <a:spcPts val="500"/>
+              </a:spcAft>
+            </a:pPr>
+            <a:r>
+              <a:rPr sz="1600">
+                <a:solidFill>
+                  <a:srgbClr val="333333"/>
+                </a:solidFill>
+              </a:rPr>
+              <a:t>◦  </a:t>
+            </a:r>
+            <a:r>
+              <a:rPr sz="2000">
+                <a:solidFill>
+                  <a:srgbClr val="333333"/>
+                </a:solidFill>
+              </a:rPr>
               <a:t>The model generalized a correct insight into a universal bias.</a:t>
             </a:r>
           </a:p>
           <a:p>
             <a:pPr>
-              <a:spcAft>
-                <a:spcPts val="400"/>
-              </a:spcAft>
-              <a:defRPr sz="2000">
-                <a:solidFill>
-                  <a:srgbClr val="333333"/>
-                </a:solidFill>
-              </a:defRPr>
-            </a:pPr>
-            <a:r>
+              <a:indent size="9144" hang="4572"/>
+              <a:spcAft>
+                <a:spcPts val="500"/>
+              </a:spcAft>
+            </a:pPr>
+            <a:r>
+              <a:rPr sz="1600">
+                <a:solidFill>
+                  <a:srgbClr val="333333"/>
+                </a:solidFill>
+              </a:rPr>
+              <a:t>◦  </a:t>
+            </a:r>
+            <a:r>
+              <a:rPr sz="2000">
+                <a:solidFill>
+                  <a:srgbClr val="333333"/>
+                </a:solidFill>
+              </a:rPr>
               <a:t>Standard RLHF may carry similar hidden priors, aligned with the evaluator own assumptions.</a:t>
             </a:r>
           </a:p>
@@ -5783,52 +6110,79 @@
           </a:solidFill>
         </p:spPr>
         <p:txBody>
-          <a:bodyPr wrap="square" lIns="182880" rIns="182880" tIns="91440" bIns="91440">
+          <a:bodyPr wrap="square" lIns="274320" rIns="182880" tIns="91440" bIns="91440">
             <a:spAutoFit/>
           </a:bodyPr>
           <a:lstStyle/>
           <a:p>
             <a:pPr>
-              <a:spcAft>
-                <a:spcPts val="400"/>
-              </a:spcAft>
-              <a:defRPr sz="2000">
-                <a:solidFill>
-                  <a:srgbClr val="333333"/>
-                </a:solidFill>
-              </a:defRPr>
-            </a:pPr>
-            <a:r>
+              <a:indent size="9144" hang="4572"/>
+              <a:spcAft>
+                <a:spcPts val="500"/>
+              </a:spcAft>
+            </a:pPr>
+            <a:r>
+              <a:rPr sz="1600">
+                <a:solidFill>
+                  <a:srgbClr val="333333"/>
+                </a:solidFill>
+              </a:rPr>
+              <a:t>◦  </a:t>
+            </a:r>
+            <a:r>
+              <a:rPr sz="2000">
+                <a:solidFill>
+                  <a:srgbClr val="333333"/>
+                </a:solidFill>
+              </a:rPr>
               <a:t>If alignment training produces hidden reasoning shifts, we need a way to detect them.</a:t>
             </a:r>
           </a:p>
           <a:p>
             <a:pPr>
-              <a:spcAft>
-                <a:spcPts val="400"/>
-              </a:spcAft>
-              <a:defRPr sz="2000">
-                <a:solidFill>
-                  <a:srgbClr val="333333"/>
-                </a:solidFill>
-              </a:defRPr>
-            </a:pPr>
-            <a:r>
+              <a:indent size="9144" hang="4572"/>
+              <a:spcAft>
+                <a:spcPts val="500"/>
+              </a:spcAft>
+            </a:pPr>
+            <a:r>
+              <a:rPr sz="1600">
+                <a:solidFill>
+                  <a:srgbClr val="333333"/>
+                </a:solidFill>
+              </a:rPr>
+              <a:t>◦  </a:t>
+            </a:r>
+            <a:r>
+              <a:rPr sz="2000">
+                <a:solidFill>
+                  <a:srgbClr val="333333"/>
+                </a:solidFill>
+              </a:rPr>
               <a:t>This project provides a diagnostic: improve formal logic while impairing applied reasoning signals over-generalized skepticism.</a:t>
             </a:r>
           </a:p>
           <a:p>
             <a:pPr>
-              <a:spcAft>
-                <a:spcPts val="400"/>
-              </a:spcAft>
-              <a:defRPr sz="2000">
-                <a:solidFill>
-                  <a:srgbClr val="333333"/>
-                </a:solidFill>
-              </a:defRPr>
-            </a:pPr>
-            <a:r>
+              <a:indent size="9144" hang="4572"/>
+              <a:spcAft>
+                <a:spcPts val="500"/>
+              </a:spcAft>
+            </a:pPr>
+            <a:r>
+              <a:rPr sz="1600">
+                <a:solidFill>
+                  <a:srgbClr val="333333"/>
+                </a:solidFill>
+              </a:rPr>
+              <a:t>◦  </a:t>
+            </a:r>
+            <a:r>
+              <a:rPr sz="2000">
+                <a:solidFill>
+                  <a:srgbClr val="333333"/>
+                </a:solidFill>
+              </a:rPr>
               <a:t>The same diagnostic applies to standard RLHF pipelines.</a:t>
             </a:r>
           </a:p>
@@ -5916,7 +6270,7 @@
           </a:solidFill>
         </p:spPr>
         <p:txBody>
-          <a:bodyPr wrap="square" lIns="182880" rIns="182880" tIns="91440" bIns="91440">
+          <a:bodyPr wrap="square" lIns="274320" rIns="182880" tIns="91440" bIns="91440">
             <a:spAutoFit/>
           </a:bodyPr>
           <a:lstStyle/>
@@ -5956,16 +6310,16 @@
           </a:solidFill>
         </p:spPr>
         <p:txBody>
-          <a:bodyPr wrap="square" lIns="182880" rIns="182880" tIns="91440" bIns="91440">
+          <a:bodyPr wrap="square" lIns="274320" rIns="182880" tIns="91440" bIns="91440">
             <a:spAutoFit/>
           </a:bodyPr>
           <a:lstStyle/>
           <a:p>
             <a:pPr>
               <a:spcAft>
-                <a:spcPts val="400"/>
-              </a:spcAft>
-              <a:defRPr sz="1800">
+                <a:spcPts val="600"/>
+              </a:spcAft>
+              <a:defRPr sz="2000" b="1">
                 <a:solidFill>
                   <a:srgbClr val="333333"/>
                 </a:solidFill>
@@ -5977,46 +6331,73 @@
           </a:p>
           <a:p>
             <a:pPr>
-              <a:spcAft>
-                <a:spcPts val="400"/>
-              </a:spcAft>
-              <a:defRPr sz="1800">
-                <a:solidFill>
-                  <a:srgbClr val="333333"/>
-                </a:solidFill>
-              </a:defRPr>
-            </a:pPr>
-            <a:r>
+              <a:indent size="9144" hang="4572"/>
+              <a:spcAft>
+                <a:spcPts val="500"/>
+              </a:spcAft>
+            </a:pPr>
+            <a:r>
+              <a:rPr sz="1400">
+                <a:solidFill>
+                  <a:srgbClr val="333333"/>
+                </a:solidFill>
+              </a:rPr>
+              <a:t>◦  </a:t>
+            </a:r>
+            <a:r>
+              <a:rPr sz="1800">
+                <a:solidFill>
+                  <a:srgbClr val="333333"/>
+                </a:solidFill>
+              </a:rPr>
               <a:t>Reverse the hedging regression on EconCausal while preserving Corr2Cause gains.</a:t>
             </a:r>
           </a:p>
           <a:p>
             <a:pPr>
-              <a:spcAft>
-                <a:spcPts val="400"/>
-              </a:spcAft>
-              <a:defRPr sz="1800">
-                <a:solidFill>
-                  <a:srgbClr val="333333"/>
-                </a:solidFill>
-              </a:defRPr>
-            </a:pPr>
-            <a:r>
+              <a:indent size="9144" hang="4572"/>
+              <a:spcAft>
+                <a:spcPts val="500"/>
+              </a:spcAft>
+            </a:pPr>
+            <a:r>
+              <a:rPr sz="1400">
+                <a:solidFill>
+                  <a:srgbClr val="333333"/>
+                </a:solidFill>
+              </a:rPr>
+              <a:t>◦  </a:t>
+            </a:r>
+            <a:r>
+              <a:rPr sz="1800">
+                <a:solidFill>
+                  <a:srgbClr val="333333"/>
+                </a:solidFill>
+              </a:rPr>
               <a:t>Two conditions: outcome-only rewards (v3) versus dual advantage with process rewards (v4).</a:t>
             </a:r>
           </a:p>
           <a:p>
             <a:pPr>
-              <a:spcAft>
-                <a:spcPts val="400"/>
-              </a:spcAft>
-              <a:defRPr sz="1800">
-                <a:solidFill>
-                  <a:srgbClr val="333333"/>
-                </a:solidFill>
-              </a:defRPr>
-            </a:pPr>
-            <a:r>
+              <a:indent size="9144" hang="4572"/>
+              <a:spcAft>
+                <a:spcPts val="500"/>
+              </a:spcAft>
+            </a:pPr>
+            <a:r>
+              <a:rPr sz="1400">
+                <a:solidFill>
+                  <a:srgbClr val="333333"/>
+                </a:solidFill>
+              </a:rPr>
+              <a:t>◦  </a:t>
+            </a:r>
+            <a:r>
+              <a:rPr sz="1800">
+                <a:solidFill>
+                  <a:srgbClr val="333333"/>
+                </a:solidFill>
+              </a:rPr>
               <a:t>V3 at step 902 of 1,500. V4 at step 410 of 1,500. V4 leading on outcome reward.</a:t>
             </a:r>
           </a:p>
@@ -6041,16 +6422,16 @@
           </a:solidFill>
         </p:spPr>
         <p:txBody>
-          <a:bodyPr wrap="square" lIns="182880" rIns="182880" tIns="91440" bIns="91440">
+          <a:bodyPr wrap="square" lIns="274320" rIns="182880" tIns="91440" bIns="91440">
             <a:spAutoFit/>
           </a:bodyPr>
           <a:lstStyle/>
           <a:p>
             <a:pPr>
               <a:spcAft>
-                <a:spcPts val="400"/>
-              </a:spcAft>
-              <a:defRPr sz="1800">
+                <a:spcPts val="600"/>
+              </a:spcAft>
+              <a:defRPr sz="2000" b="1">
                 <a:solidFill>
                   <a:srgbClr val="333333"/>
                 </a:solidFill>
@@ -6062,46 +6443,73 @@
           </a:p>
           <a:p>
             <a:pPr>
-              <a:spcAft>
-                <a:spcPts val="400"/>
-              </a:spcAft>
-              <a:defRPr sz="1800">
-                <a:solidFill>
-                  <a:srgbClr val="333333"/>
-                </a:solidFill>
-              </a:defRPr>
-            </a:pPr>
-            <a:r>
+              <a:indent size="9144" hang="4572"/>
+              <a:spcAft>
+                <a:spcPts val="500"/>
+              </a:spcAft>
+            </a:pPr>
+            <a:r>
+              <a:rPr sz="1400">
+                <a:solidFill>
+                  <a:srgbClr val="333333"/>
+                </a:solidFill>
+              </a:rPr>
+              <a:t>◦  </a:t>
+            </a:r>
+            <a:r>
+              <a:rPr sz="1800">
+                <a:solidFill>
+                  <a:srgbClr val="333333"/>
+                </a:solidFill>
+              </a:rPr>
               <a:t>Evaluate Liberal and Libertarian SFT models on the same 11-task benchmark.</a:t>
             </a:r>
           </a:p>
           <a:p>
             <a:pPr>
-              <a:spcAft>
-                <a:spcPts val="400"/>
-              </a:spcAft>
-              <a:defRPr sz="1800">
-                <a:solidFill>
-                  <a:srgbClr val="333333"/>
-                </a:solidFill>
-              </a:defRPr>
-            </a:pPr>
-            <a:r>
+              <a:indent size="9144" hang="4572"/>
+              <a:spcAft>
+                <a:spcPts val="500"/>
+              </a:spcAft>
+            </a:pPr>
+            <a:r>
+              <a:rPr sz="1400">
+                <a:solidFill>
+                  <a:srgbClr val="333333"/>
+                </a:solidFill>
+              </a:rPr>
+              <a:t>◦  </a:t>
+            </a:r>
+            <a:r>
+              <a:rPr sz="1800">
+                <a:solidFill>
+                  <a:srgbClr val="333333"/>
+                </a:solidFill>
+              </a:rPr>
               <a:t>Test whether the hedging regression is specific to DM or general to SFT on non-dominant frameworks.</a:t>
             </a:r>
           </a:p>
           <a:p>
             <a:pPr>
-              <a:spcAft>
-                <a:spcPts val="400"/>
-              </a:spcAft>
-              <a:defRPr sz="1800">
-                <a:solidFill>
-                  <a:srgbClr val="333333"/>
-                </a:solidFill>
-              </a:defRPr>
-            </a:pPr>
-            <a:r>
+              <a:indent size="9144" hang="4572"/>
+              <a:spcAft>
+                <a:spcPts val="500"/>
+              </a:spcAft>
+            </a:pPr>
+            <a:r>
+              <a:rPr sz="1400">
+                <a:solidFill>
+                  <a:srgbClr val="333333"/>
+                </a:solidFill>
+              </a:rPr>
+              <a:t>◦  </a:t>
+            </a:r>
+            <a:r>
+              <a:rPr sz="1800">
+                <a:solidFill>
+                  <a:srgbClr val="333333"/>
+                </a:solidFill>
+              </a:rPr>
               <a:t>Models already trained. Evaluation pending after final submission.</a:t>
             </a:r>
           </a:p>
@@ -6126,7 +6534,7 @@
           </a:solidFill>
         </p:spPr>
         <p:txBody>
-          <a:bodyPr wrap="square" lIns="182880" rIns="182880" tIns="91440" bIns="91440">
+          <a:bodyPr wrap="square" lIns="274320" rIns="182880" tIns="91440" bIns="91440">
             <a:spAutoFit/>
           </a:bodyPr>
           <a:lstStyle/>
@@ -6229,14 +6637,14 @@
           </a:solidFill>
         </p:spPr>
         <p:txBody>
-          <a:bodyPr wrap="square" lIns="182880" rIns="182880" tIns="91440" bIns="91440">
+          <a:bodyPr wrap="square" lIns="274320" rIns="182880" tIns="91440" bIns="91440">
             <a:spAutoFit/>
           </a:bodyPr>
           <a:lstStyle/>
           <a:p>
             <a:pPr>
               <a:spcAft>
-                <a:spcPts val="400"/>
+                <a:spcPts val="600"/>
               </a:spcAft>
               <a:defRPr sz="2000" b="1">
                 <a:solidFill>
@@ -6251,15 +6659,23 @@
           <a:p>
             <a:pPr>
               <a:spcAft>
-                <a:spcPts val="400"/>
-              </a:spcAft>
-              <a:defRPr sz="1800">
-                <a:solidFill>
-                  <a:srgbClr val="333333"/>
-                </a:solidFill>
-              </a:defRPr>
-            </a:pPr>
-            <a:r>
+                <a:spcPts val="500"/>
+              </a:spcAft>
+            </a:pPr>
+            <a:r>
+              <a:rPr sz="1400">
+                <a:solidFill>
+                  <a:srgbClr val="333333"/>
+                </a:solidFill>
+              </a:rPr>
+              <a:t>◦  </a:t>
+            </a:r>
+            <a:r>
+              <a:rPr sz="1800">
+                <a:solidFill>
+                  <a:srgbClr val="333333"/>
+                </a:solidFill>
+              </a:rPr>
               <a:t>April to June 2026: Dataset assembly, SFT training, BF16 evaluation across 11 tasks, paper draft.</a:t>
             </a:r>
           </a:p>
@@ -6284,14 +6700,14 @@
           </a:solidFill>
         </p:spPr>
         <p:txBody>
-          <a:bodyPr wrap="square" lIns="182880" rIns="182880" tIns="91440" bIns="91440">
+          <a:bodyPr wrap="square" lIns="274320" rIns="182880" tIns="91440" bIns="91440">
             <a:spAutoFit/>
           </a:bodyPr>
           <a:lstStyle/>
           <a:p>
             <a:pPr>
               <a:spcAft>
-                <a:spcPts val="400"/>
+                <a:spcPts val="600"/>
               </a:spcAft>
               <a:defRPr sz="2000" b="1">
                 <a:solidFill>
@@ -6306,15 +6722,23 @@
           <a:p>
             <a:pPr>
               <a:spcAft>
-                <a:spcPts val="400"/>
-              </a:spcAft>
-              <a:defRPr sz="1800">
-                <a:solidFill>
-                  <a:srgbClr val="333333"/>
-                </a:solidFill>
-              </a:defRPr>
-            </a:pPr>
-            <a:r>
+                <a:spcPts val="500"/>
+              </a:spcAft>
+            </a:pPr>
+            <a:r>
+              <a:rPr sz="1400">
+                <a:solidFill>
+                  <a:srgbClr val="FFFFFF"/>
+                </a:solidFill>
+              </a:rPr>
+              <a:t>◦  </a:t>
+            </a:r>
+            <a:r>
+              <a:rPr sz="1800">
+                <a:solidFill>
+                  <a:srgbClr val="FFFFFF"/>
+                </a:solidFill>
+              </a:rPr>
               <a:t>Final report, slides, and paper covering SFT results, hedging artifact analysis, and implications.</a:t>
             </a:r>
           </a:p>
@@ -6339,14 +6763,14 @@
           </a:solidFill>
         </p:spPr>
         <p:txBody>
-          <a:bodyPr wrap="square" lIns="182880" rIns="182880" tIns="91440" bIns="91440">
+          <a:bodyPr wrap="square" lIns="274320" rIns="182880" tIns="91440" bIns="91440">
             <a:spAutoFit/>
           </a:bodyPr>
           <a:lstStyle/>
           <a:p>
             <a:pPr>
               <a:spcAft>
-                <a:spcPts val="400"/>
+                <a:spcPts val="600"/>
               </a:spcAft>
               <a:defRPr sz="2000" b="1">
                 <a:solidFill>
@@ -6361,15 +6785,23 @@
           <a:p>
             <a:pPr>
               <a:spcAft>
-                <a:spcPts val="400"/>
-              </a:spcAft>
-              <a:defRPr sz="1800">
-                <a:solidFill>
-                  <a:srgbClr val="333333"/>
-                </a:solidFill>
-              </a:defRPr>
-            </a:pPr>
-            <a:r>
+                <a:spcPts val="500"/>
+              </a:spcAft>
+            </a:pPr>
+            <a:r>
+              <a:rPr sz="1400">
+                <a:solidFill>
+                  <a:srgbClr val="333333"/>
+                </a:solidFill>
+              </a:rPr>
+              <a:t>◦  </a:t>
+            </a:r>
+            <a:r>
+              <a:rPr sz="1800">
+                <a:solidFill>
+                  <a:srgbClr val="333333"/>
+                </a:solidFill>
+              </a:rPr>
               <a:t>June to July: Complete v3 and v4 GRPO runs, merge checkpoints, evaluate, compare against SFT baseline.</a:t>
             </a:r>
           </a:p>
@@ -6394,14 +6826,14 @@
           </a:solidFill>
         </p:spPr>
         <p:txBody>
-          <a:bodyPr wrap="square" lIns="182880" rIns="182880" tIns="91440" bIns="91440">
+          <a:bodyPr wrap="square" lIns="274320" rIns="182880" tIns="91440" bIns="91440">
             <a:spAutoFit/>
           </a:bodyPr>
           <a:lstStyle/>
           <a:p>
             <a:pPr>
               <a:spcAft>
-                <a:spcPts val="400"/>
+                <a:spcPts val="600"/>
               </a:spcAft>
               <a:defRPr sz="2000" b="1">
                 <a:solidFill>
@@ -6416,15 +6848,23 @@
           <a:p>
             <a:pPr>
               <a:spcAft>
-                <a:spcPts val="400"/>
-              </a:spcAft>
-              <a:defRPr sz="1800">
-                <a:solidFill>
-                  <a:srgbClr val="333333"/>
-                </a:solidFill>
-              </a:defRPr>
-            </a:pPr>
-            <a:r>
+                <a:spcPts val="500"/>
+              </a:spcAft>
+            </a:pPr>
+            <a:r>
+              <a:rPr sz="1400">
+                <a:solidFill>
+                  <a:srgbClr val="333333"/>
+                </a:solidFill>
+              </a:rPr>
+              <a:t>◦  </a:t>
+            </a:r>
+            <a:r>
+              <a:rPr sz="1800">
+                <a:solidFill>
+                  <a:srgbClr val="333333"/>
+                </a:solidFill>
+              </a:rPr>
               <a:t>July: Evaluate Liberal and Libertarian SFT models. Test whether hedging is DM-specific.</a:t>
             </a:r>
           </a:p>
@@ -6449,14 +6889,14 @@
           </a:solidFill>
         </p:spPr>
         <p:txBody>
-          <a:bodyPr wrap="square" lIns="182880" rIns="182880" tIns="91440" bIns="91440">
+          <a:bodyPr wrap="square" lIns="274320" rIns="182880" tIns="91440" bIns="91440">
             <a:spAutoFit/>
           </a:bodyPr>
           <a:lstStyle/>
           <a:p>
             <a:pPr>
               <a:spcAft>
-                <a:spcPts val="400"/>
+                <a:spcPts val="600"/>
               </a:spcAft>
               <a:defRPr sz="2000" b="1">
                 <a:solidFill>
@@ -6471,15 +6911,23 @@
           <a:p>
             <a:pPr>
               <a:spcAft>
-                <a:spcPts val="400"/>
-              </a:spcAft>
-              <a:defRPr sz="1800">
-                <a:solidFill>
-                  <a:srgbClr val="333333"/>
-                </a:solidFill>
-              </a:defRPr>
-            </a:pPr>
-            <a:r>
+                <a:spcPts val="500"/>
+              </a:spcAft>
+            </a:pPr>
+            <a:r>
+              <a:rPr sz="1400">
+                <a:solidFill>
+                  <a:srgbClr val="333333"/>
+                </a:solidFill>
+              </a:rPr>
+              <a:t>◦  </a:t>
+            </a:r>
+            <a:r>
+              <a:rPr sz="1800">
+                <a:solidFill>
+                  <a:srgbClr val="333333"/>
+                </a:solidFill>
+              </a:rPr>
               <a:t>July to August: Consolidate GRPO and multi-ideology results, statistical testing, extended paper.</a:t>
             </a:r>
           </a:p>
@@ -6556,29 +7004,106 @@
         </p:nvSpPr>
         <p:spPr>
           <a:xfrm>
-            <a:off x="731520" y="1097280"/>
-            <a:ext cx="10698480" cy="320040"/>
+            <a:off x="457200" y="1097280"/>
+            <a:ext cx="11247120" cy="2057400"/>
           </a:xfrm>
           <a:prstGeom prst="rect">
             <a:avLst/>
           </a:prstGeom>
-          <a:noFill/>
+          <a:solidFill>
+            <a:srgbClr val="F3E5F5"/>
+          </a:solidFill>
         </p:spPr>
         <p:txBody>
-          <a:bodyPr wrap="square" lIns="137160" rIns="137160">
+          <a:bodyPr wrap="square" lIns="274320" rIns="182880" tIns="91440" bIns="91440">
             <a:spAutoFit/>
           </a:bodyPr>
           <a:lstStyle/>
           <a:p>
-            <a:pPr algn="l">
+            <a:pPr>
+              <a:spcAft>
+                <a:spcPts val="600"/>
+              </a:spcAft>
               <a:defRPr sz="2000" b="1">
                 <a:solidFill>
-                  <a:srgbClr val="7B2D8E"/>
+                  <a:srgbClr val="333333"/>
                 </a:solidFill>
               </a:defRPr>
             </a:pPr>
             <a:r>
               <a:t>Motivation</a:t>
+            </a:r>
+          </a:p>
+          <a:p>
+            <a:pPr>
+              <a:indent size="9144" hang="4572"/>
+              <a:spcAft>
+                <a:spcPts val="500"/>
+              </a:spcAft>
+            </a:pPr>
+            <a:r>
+              <a:rPr sz="1400">
+                <a:solidFill>
+                  <a:srgbClr val="333333"/>
+                </a:solidFill>
+              </a:rPr>
+              <a:t>◦  </a:t>
+            </a:r>
+            <a:r>
+              <a:rPr sz="1800">
+                <a:solidFill>
+                  <a:srgbClr val="333333"/>
+                </a:solidFill>
+              </a:rPr>
+              <a:t>Five models converge on carbon pricing for climate policy, despite evidence of insufficient price levels, net negative fiscal signals, and missing complementary policies.</a:t>
+            </a:r>
+          </a:p>
+          <a:p>
+            <a:pPr>
+              <a:indent size="9144" hang="4572"/>
+              <a:spcAft>
+                <a:spcPts val="500"/>
+              </a:spcAft>
+            </a:pPr>
+            <a:r>
+              <a:rPr sz="1400">
+                <a:solidFill>
+                  <a:srgbClr val="333333"/>
+                </a:solidFill>
+              </a:rPr>
+              <a:t>◦  </a:t>
+            </a:r>
+            <a:r>
+              <a:rPr sz="1800">
+                <a:solidFill>
+                  <a:srgbClr val="333333"/>
+                </a:solidFill>
+              </a:rPr>
+              <a:t>Fossil fuel subsidies at $725B exceed carbon pricing revenue at $107B by 6.8x.</a:t>
+            </a:r>
+          </a:p>
+          <a:p>
+            <a:pPr>
+              <a:indent size="9144" hang="4572"/>
+              <a:spcAft>
+                <a:spcPts val="500"/>
+              </a:spcAft>
+            </a:pPr>
+            <a:r>
+              <a:rPr sz="1400">
+                <a:solidFill>
+                  <a:srgbClr val="333333"/>
+                </a:solidFill>
+              </a:rPr>
+              <a:t>◦  </a:t>
+            </a:r>
+            <a:r>
+              <a:rPr sz="1800">
+                <a:solidFill>
+                  <a:srgbClr val="333333"/>
+                </a:solidFill>
+              </a:rPr>
+              <a:t>Only after SFT on DM-aligned data does the model identify these gaps.</a:t>
             </a:r>
           </a:p>
         </p:txBody>
@@ -6591,29 +7116,58 @@
         </p:nvSpPr>
         <p:spPr>
           <a:xfrm>
-            <a:off x="731520" y="1463040"/>
-            <a:ext cx="10698480" cy="457200"/>
+            <a:off x="457200" y="3291840"/>
+            <a:ext cx="11247120" cy="1051560"/>
           </a:xfrm>
           <a:prstGeom prst="rect">
             <a:avLst/>
           </a:prstGeom>
-          <a:noFill/>
+          <a:solidFill>
+            <a:srgbClr val="F5F5F5"/>
+          </a:solidFill>
         </p:spPr>
         <p:txBody>
-          <a:bodyPr wrap="square" lIns="137160" rIns="137160">
+          <a:bodyPr wrap="square" lIns="274320" rIns="182880" tIns="91440" bIns="91440">
             <a:spAutoFit/>
           </a:bodyPr>
           <a:lstStyle/>
           <a:p>
-            <a:pPr algn="l">
-              <a:defRPr sz="1800" b="0">
+            <a:pPr>
+              <a:spcAft>
+                <a:spcPts val="600"/>
+              </a:spcAft>
+              <a:defRPr sz="2000" b="1">
                 <a:solidFill>
                   <a:srgbClr val="333333"/>
                 </a:solidFill>
               </a:defRPr>
             </a:pPr>
             <a:r>
-              <a:t>Five models converge on carbon pricing for climate policy, despite evidence of insufficient price levels, net negative fiscal signals, and missing complementary policies.</a:t>
+              <a:t>Method</a:t>
+            </a:r>
+          </a:p>
+          <a:p>
+            <a:pPr>
+              <a:indent size="9144" hang="4572"/>
+              <a:spcAft>
+                <a:spcPts val="500"/>
+              </a:spcAft>
+            </a:pPr>
+            <a:r>
+              <a:rPr sz="1400">
+                <a:solidFill>
+                  <a:srgbClr val="333333"/>
+                </a:solidFill>
+              </a:rPr>
+              <a:t>◦  </a:t>
+            </a:r>
+            <a:r>
+              <a:rPr sz="1800">
+                <a:solidFill>
+                  <a:srgbClr val="333333"/>
+                </a:solidFill>
+              </a:rPr>
+              <a:t>Fine-tuned Qwen3.5-9B via QLoRA on 1,500 DM question-answer pairs. Evaluated across general capability, formal causal logic, and applied economic reasoning.</a:t>
             </a:r>
           </a:p>
         </p:txBody>
@@ -6626,29 +7180,106 @@
         </p:nvSpPr>
         <p:spPr>
           <a:xfrm>
-            <a:off x="731520" y="1965960"/>
-            <a:ext cx="10698480" cy="457200"/>
+            <a:off x="457200" y="4480560"/>
+            <a:ext cx="11247120" cy="2057400"/>
           </a:xfrm>
           <a:prstGeom prst="rect">
             <a:avLst/>
           </a:prstGeom>
-          <a:noFill/>
+          <a:solidFill>
+            <a:srgbClr val="E8F5E9"/>
+          </a:solidFill>
         </p:spPr>
         <p:txBody>
-          <a:bodyPr wrap="square" lIns="137160" rIns="137160">
+          <a:bodyPr wrap="square" lIns="274320" rIns="182880" tIns="91440" bIns="91440">
             <a:spAutoFit/>
           </a:bodyPr>
           <a:lstStyle/>
           <a:p>
-            <a:pPr algn="l">
-              <a:defRPr sz="1800" b="0">
+            <a:pPr>
+              <a:spcAft>
+                <a:spcPts val="600"/>
+              </a:spcAft>
+              <a:defRPr sz="2000" b="1">
                 <a:solidFill>
                   <a:srgbClr val="333333"/>
                 </a:solidFill>
               </a:defRPr>
             </a:pPr>
             <a:r>
-              <a:t>Explicit fossil fuel subsidies at 725 billion dollars exceed carbon pricing revenue at 107 billion by a factor of 6.8.</a:t>
+              <a:t>Results</a:t>
+            </a:r>
+          </a:p>
+          <a:p>
+            <a:pPr>
+              <a:indent size="9144" hang="4572"/>
+              <a:spcAft>
+                <a:spcPts val="500"/>
+              </a:spcAft>
+            </a:pPr>
+            <a:r>
+              <a:rPr sz="1400">
+                <a:solidFill>
+                  <a:srgbClr val="333333"/>
+                </a:solidFill>
+              </a:rPr>
+              <a:t>◦  </a:t>
+            </a:r>
+            <a:r>
+              <a:rPr sz="1800">
+                <a:solidFill>
+                  <a:srgbClr val="333333"/>
+                </a:solidFill>
+              </a:rPr>
+              <a:t>General capability preserved.</a:t>
+            </a:r>
+          </a:p>
+          <a:p>
+            <a:pPr>
+              <a:indent size="9144" hang="4572"/>
+              <a:spcAft>
+                <a:spcPts val="500"/>
+              </a:spcAft>
+            </a:pPr>
+            <a:r>
+              <a:rPr sz="1400">
+                <a:solidFill>
+                  <a:srgbClr val="333333"/>
+                </a:solidFill>
+              </a:rPr>
+              <a:t>◦  </a:t>
+            </a:r>
+            <a:r>
+              <a:rPr sz="1800">
+                <a:solidFill>
+                  <a:srgbClr val="333333"/>
+                </a:solidFill>
+              </a:rPr>
+              <a:t>Formal causal reasoning improved by 38 points.</a:t>
+            </a:r>
+          </a:p>
+          <a:p>
+            <a:pPr>
+              <a:indent size="9144" hang="4572"/>
+              <a:spcAft>
+                <a:spcPts val="500"/>
+              </a:spcAft>
+            </a:pPr>
+            <a:r>
+              <a:rPr sz="1400">
+                <a:solidFill>
+                  <a:srgbClr val="333333"/>
+                </a:solidFill>
+              </a:rPr>
+              <a:t>◦  </a:t>
+            </a:r>
+            <a:r>
+              <a:rPr sz="1800">
+                <a:solidFill>
+                  <a:srgbClr val="333333"/>
+                </a:solidFill>
+              </a:rPr>
+              <a:t>Applied economic reasoning regressed by 12 points through emergent hedging bias.</a:t>
             </a:r>
           </a:p>
         </p:txBody>
@@ -6661,238 +7292,57 @@
         </p:nvSpPr>
         <p:spPr>
           <a:xfrm>
-            <a:off x="731520" y="2468880"/>
-            <a:ext cx="10698480" cy="457200"/>
+            <a:off x="457200" y="6675120"/>
+            <a:ext cx="11247120" cy="1051560"/>
           </a:xfrm>
           <a:prstGeom prst="rect">
             <a:avLst/>
           </a:prstGeom>
-          <a:noFill/>
+          <a:solidFill>
+            <a:srgbClr val="E3F2FD"/>
+          </a:solidFill>
         </p:spPr>
         <p:txBody>
-          <a:bodyPr wrap="square" lIns="137160" rIns="137160">
+          <a:bodyPr wrap="square" lIns="274320" rIns="182880" tIns="91440" bIns="91440">
             <a:spAutoFit/>
           </a:bodyPr>
           <a:lstStyle/>
           <a:p>
-            <a:pPr algn="l">
-              <a:defRPr sz="1800" b="0">
+            <a:pPr>
+              <a:spcAft>
+                <a:spcPts val="600"/>
+              </a:spcAft>
+              <a:defRPr sz="2000" b="1">
                 <a:solidFill>
                   <a:srgbClr val="333333"/>
                 </a:solidFill>
               </a:defRPr>
             </a:pPr>
             <a:r>
-              <a:t>Only after SFT on DM-aligned data does the model identify these gaps.</a:t>
-            </a:r>
-          </a:p>
-        </p:txBody>
-      </p:sp>
-      <p:sp>
-        <p:nvSpPr>
-          <p:cNvPr id="7" name="TextBox 6"/>
-          <p:cNvSpPr txBox="1"/>
-          <p:nvPr/>
-        </p:nvSpPr>
-        <p:spPr>
-          <a:xfrm>
-            <a:off x="731520" y="3108960"/>
-            <a:ext cx="10698480" cy="320040"/>
-          </a:xfrm>
-          <a:prstGeom prst="rect">
-            <a:avLst/>
-          </a:prstGeom>
-          <a:noFill/>
-        </p:spPr>
-        <p:txBody>
-          <a:bodyPr wrap="square" lIns="137160" rIns="137160">
-            <a:spAutoFit/>
-          </a:bodyPr>
-          <a:lstStyle/>
-          <a:p>
-            <a:pPr algn="l">
-              <a:defRPr sz="2000" b="1">
-                <a:solidFill>
-                  <a:srgbClr val="7B2D8E"/>
-                </a:solidFill>
-              </a:defRPr>
-            </a:pPr>
-            <a:r>
-              <a:t>Method</a:t>
-            </a:r>
-          </a:p>
-        </p:txBody>
-      </p:sp>
-      <p:sp>
-        <p:nvSpPr>
-          <p:cNvPr id="8" name="TextBox 7"/>
-          <p:cNvSpPr txBox="1"/>
-          <p:nvPr/>
-        </p:nvSpPr>
-        <p:spPr>
-          <a:xfrm>
-            <a:off x="731520" y="3474720"/>
-            <a:ext cx="10698480" cy="457200"/>
-          </a:xfrm>
-          <a:prstGeom prst="rect">
-            <a:avLst/>
-          </a:prstGeom>
-          <a:noFill/>
-        </p:spPr>
-        <p:txBody>
-          <a:bodyPr wrap="square" lIns="137160" rIns="137160">
-            <a:spAutoFit/>
-          </a:bodyPr>
-          <a:lstStyle/>
-          <a:p>
-            <a:pPr algn="l">
-              <a:defRPr sz="1800" b="0">
-                <a:solidFill>
-                  <a:srgbClr val="333333"/>
-                </a:solidFill>
-              </a:defRPr>
-            </a:pPr>
-            <a:r>
-              <a:t>Fine-tuned Qwen3.5-9B via QLoRA on 1,500 DM question-answer pairs. Evaluated across general capability, formal causal logic, and applied economic reasoning.</a:t>
-            </a:r>
-          </a:p>
-        </p:txBody>
-      </p:sp>
-      <p:sp>
-        <p:nvSpPr>
-          <p:cNvPr id="9" name="TextBox 8"/>
-          <p:cNvSpPr txBox="1"/>
-          <p:nvPr/>
-        </p:nvSpPr>
-        <p:spPr>
-          <a:xfrm>
-            <a:off x="731520" y="4114800"/>
-            <a:ext cx="10698480" cy="320040"/>
-          </a:xfrm>
-          <a:prstGeom prst="rect">
-            <a:avLst/>
-          </a:prstGeom>
-          <a:noFill/>
-        </p:spPr>
-        <p:txBody>
-          <a:bodyPr wrap="square" lIns="137160" rIns="137160">
-            <a:spAutoFit/>
-          </a:bodyPr>
-          <a:lstStyle/>
-          <a:p>
-            <a:pPr algn="l">
-              <a:defRPr sz="2000" b="1">
-                <a:solidFill>
-                  <a:srgbClr val="7B2D8E"/>
-                </a:solidFill>
-              </a:defRPr>
-            </a:pPr>
-            <a:r>
-              <a:t>Results</a:t>
-            </a:r>
-          </a:p>
-        </p:txBody>
-      </p:sp>
-      <p:sp>
-        <p:nvSpPr>
-          <p:cNvPr id="10" name="TextBox 9"/>
-          <p:cNvSpPr txBox="1"/>
-          <p:nvPr/>
-        </p:nvSpPr>
-        <p:spPr>
-          <a:xfrm>
-            <a:off x="731520" y="4480560"/>
-            <a:ext cx="10698480" cy="457200"/>
-          </a:xfrm>
-          <a:prstGeom prst="rect">
-            <a:avLst/>
-          </a:prstGeom>
-          <a:noFill/>
-        </p:spPr>
-        <p:txBody>
-          <a:bodyPr wrap="square" lIns="137160" rIns="137160">
-            <a:spAutoFit/>
-          </a:bodyPr>
-          <a:lstStyle/>
-          <a:p>
-            <a:pPr algn="l">
-              <a:defRPr sz="1800" b="0">
-                <a:solidFill>
-                  <a:srgbClr val="333333"/>
-                </a:solidFill>
-              </a:defRPr>
-            </a:pPr>
-            <a:r>
-              <a:t>General capability preserved. Formal causal reasoning improved by 38 points. Applied economic reasoning regressed by 12 points through emergent hedging bias.</a:t>
-            </a:r>
-          </a:p>
-        </p:txBody>
-      </p:sp>
-      <p:sp>
-        <p:nvSpPr>
-          <p:cNvPr id="11" name="TextBox 10"/>
-          <p:cNvSpPr txBox="1"/>
-          <p:nvPr/>
-        </p:nvSpPr>
-        <p:spPr>
-          <a:xfrm>
-            <a:off x="731520" y="5120640"/>
-            <a:ext cx="10698480" cy="320040"/>
-          </a:xfrm>
-          <a:prstGeom prst="rect">
-            <a:avLst/>
-          </a:prstGeom>
-          <a:noFill/>
-        </p:spPr>
-        <p:txBody>
-          <a:bodyPr wrap="square" lIns="137160" rIns="137160">
-            <a:spAutoFit/>
-          </a:bodyPr>
-          <a:lstStyle/>
-          <a:p>
-            <a:pPr algn="l">
-              <a:defRPr sz="2000" b="1">
-                <a:solidFill>
-                  <a:srgbClr val="7B2D8E"/>
-                </a:solidFill>
-              </a:defRPr>
-            </a:pPr>
-            <a:r>
               <a:t>Next Phase</a:t>
             </a:r>
           </a:p>
-        </p:txBody>
-      </p:sp>
-      <p:sp>
-        <p:nvSpPr>
-          <p:cNvPr id="12" name="TextBox 11"/>
-          <p:cNvSpPr txBox="1"/>
-          <p:nvPr/>
-        </p:nvSpPr>
-        <p:spPr>
-          <a:xfrm>
-            <a:off x="731520" y="5486400"/>
-            <a:ext cx="10698480" cy="457200"/>
-          </a:xfrm>
-          <a:prstGeom prst="rect">
-            <a:avLst/>
-          </a:prstGeom>
-          <a:noFill/>
-        </p:spPr>
-        <p:txBody>
-          <a:bodyPr wrap="square" lIns="137160" rIns="137160">
-            <a:spAutoFit/>
-          </a:bodyPr>
-          <a:lstStyle/>
-          <a:p>
-            <a:pPr algn="l">
-              <a:defRPr sz="1800" b="0">
-                <a:solidFill>
-                  <a:srgbClr val="333333"/>
-                </a:solidFill>
-              </a:defRPr>
-            </a:pPr>
-            <a:r>
+          <a:p>
+            <a:pPr>
+              <a:indent size="9144" hang="4572"/>
+              <a:spcAft>
+                <a:spcPts val="500"/>
+              </a:spcAft>
+            </a:pPr>
+            <a:r>
+              <a:rPr sz="1400">
+                <a:solidFill>
+                  <a:srgbClr val="333333"/>
+                </a:solidFill>
+              </a:rPr>
+              <a:t>◦  </a:t>
+            </a:r>
+            <a:r>
+              <a:rPr sz="1800">
+                <a:solidFill>
+                  <a:srgbClr val="333333"/>
+                </a:solidFill>
+              </a:rPr>
               <a:t>GRPO training to reverse the hedging regression: outcome-only rewards (v3) versus dual advantage with process rewards (v4).</a:t>
             </a:r>
           </a:p>
